--- a/docs/academic/TeslimEdilecekler/Sunumlar/03_Tasarim_ve_Gelistirme_Sunumu.pptx
+++ b/docs/academic/TeslimEdilecekler/Sunumlar/03_Tasarim_ve_Gelistirme_Sunumu.pptx
@@ -3408,7 +3408,41 @@
       </p:sp>
       <p:sp>
         <p:nvSpPr>
-          <p:cNvPr id="4" name="Rectangle 3"/>
+          <p:cNvPr id="4" name="TextBox 3"/>
+          <p:cNvSpPr txBox="1"/>
+          <p:nvPr/>
+        </p:nvSpPr>
+        <p:spPr>
+          <a:xfrm>
+            <a:off x="320040" y="841248"/>
+            <a:ext cx="11521440" cy="457200"/>
+          </a:xfrm>
+          <a:prstGeom prst="rect">
+            <a:avLst/>
+          </a:prstGeom>
+          <a:noFill/>
+        </p:spPr>
+        <p:txBody>
+          <a:bodyPr wrap="square">
+            <a:spAutoFit/>
+          </a:bodyPr>
+          <a:lstStyle/>
+          <a:p>
+            <a:pPr algn="l"/>
+            <a:r>
+              <a:rPr sz="1200" b="0">
+                <a:solidFill>
+                  <a:srgbClr val="B0C8D8"/>
+                </a:solidFill>
+              </a:rPr>
+              <a:t>5 işlevsel aile (librosa tabanlı)</a:t>
+            </a:r>
+          </a:p>
+        </p:txBody>
+      </p:sp>
+      <p:sp>
+        <p:nvSpPr>
+          <p:cNvPr id="5" name="Rectangle 4"/>
           <p:cNvSpPr/>
           <p:nvPr/>
         </p:nvSpPr>
@@ -3453,7 +3487,7 @@
       </p:sp>
       <p:sp>
         <p:nvSpPr>
-          <p:cNvPr id="5" name="TextBox 4"/>
+          <p:cNvPr id="6" name="TextBox 5"/>
           <p:cNvSpPr txBox="1"/>
           <p:nvPr/>
         </p:nvSpPr>
@@ -3487,7 +3521,7 @@
       </p:sp>
       <p:sp>
         <p:nvSpPr>
-          <p:cNvPr id="6" name="TextBox 5"/>
+          <p:cNvPr id="7" name="TextBox 6"/>
           <p:cNvSpPr txBox="1"/>
           <p:nvPr/>
         </p:nvSpPr>
@@ -3514,15 +3548,15 @@
                   <a:srgbClr val="333333"/>
                 </a:solidFill>
               </a:rPr>
-              <a:t>MFCC×13, centroid, bandwidth,
-rolloff, flatness std</a:t>
-            </a:r>
-          </a:p>
-        </p:txBody>
-      </p:sp>
-      <p:sp>
-        <p:nvSpPr>
-          <p:cNvPr id="7" name="Rectangle 6"/>
+              <a:t>MFCC, mel-spektrogram, centroid,
+bandwidth, rolloff, flatness + delta</a:t>
+            </a:r>
+          </a:p>
+        </p:txBody>
+      </p:sp>
+      <p:sp>
+        <p:nvSpPr>
+          <p:cNvPr id="8" name="Rectangle 7"/>
           <p:cNvSpPr/>
           <p:nvPr/>
         </p:nvSpPr>
@@ -3567,7 +3601,7 @@
       </p:sp>
       <p:sp>
         <p:nvSpPr>
-          <p:cNvPr id="8" name="TextBox 7"/>
+          <p:cNvPr id="9" name="TextBox 8"/>
           <p:cNvSpPr txBox="1"/>
           <p:nvPr/>
         </p:nvSpPr>
@@ -3594,14 +3628,14 @@
                   <a:srgbClr val="0D2B55"/>
                 </a:solidFill>
               </a:rPr>
-              <a:t>Ritmik (10)</a:t>
-            </a:r>
-          </a:p>
-        </p:txBody>
-      </p:sp>
-      <p:sp>
-        <p:nvSpPr>
-          <p:cNvPr id="9" name="TextBox 8"/>
+              <a:t>Zamansal (10)</a:t>
+            </a:r>
+          </a:p>
+        </p:txBody>
+      </p:sp>
+      <p:sp>
+        <p:nvSpPr>
+          <p:cNvPr id="10" name="TextBox 9"/>
           <p:cNvSpPr txBox="1"/>
           <p:nvPr/>
         </p:nvSpPr>
@@ -3628,15 +3662,15 @@
                   <a:srgbClr val="333333"/>
                 </a:solidFill>
               </a:rPr>
-              <a:t>Tempo, beat strength,
-onset density, regularity</a:t>
-            </a:r>
-          </a:p>
-        </p:txBody>
-      </p:sp>
-      <p:sp>
-        <p:nvSpPr>
-          <p:cNvPr id="10" name="Rectangle 9"/>
+              <a:t>RMS enerjisi, sıfır geçiş hızı,
+dinamik aralık türevleri</a:t>
+            </a:r>
+          </a:p>
+        </p:txBody>
+      </p:sp>
+      <p:sp>
+        <p:nvSpPr>
+          <p:cNvPr id="11" name="Rectangle 10"/>
           <p:cNvSpPr/>
           <p:nvPr/>
         </p:nvSpPr>
@@ -3681,7 +3715,7 @@
       </p:sp>
       <p:sp>
         <p:nvSpPr>
-          <p:cNvPr id="11" name="TextBox 10"/>
+          <p:cNvPr id="12" name="TextBox 11"/>
           <p:cNvSpPr txBox="1"/>
           <p:nvPr/>
         </p:nvSpPr>
@@ -3708,14 +3742,14 @@
                   <a:srgbClr val="0D2B55"/>
                 </a:solidFill>
               </a:rPr>
-              <a:t>Tonal (9)</a:t>
-            </a:r>
-          </a:p>
-        </p:txBody>
-      </p:sp>
-      <p:sp>
-        <p:nvSpPr>
-          <p:cNvPr id="12" name="TextBox 11"/>
+              <a:t>Ritmik (9)</a:t>
+            </a:r>
+          </a:p>
+        </p:txBody>
+      </p:sp>
+      <p:sp>
+        <p:nvSpPr>
+          <p:cNvPr id="13" name="TextBox 12"/>
           <p:cNvSpPr txBox="1"/>
           <p:nvPr/>
         </p:nvSpPr>
@@ -3742,15 +3776,15 @@
                   <a:srgbClr val="333333"/>
                 </a:solidFill>
               </a:rPr>
-              <a:t>Chroma×9, key confidence,
-HNR</a:t>
-            </a:r>
-          </a:p>
-        </p:txBody>
-      </p:sp>
-      <p:sp>
-        <p:nvSpPr>
-          <p:cNvPr id="13" name="Rectangle 12"/>
+              <a:t>Tempo, beat sayısı,
+onset gücü istatistikleri</a:t>
+            </a:r>
+          </a:p>
+        </p:txBody>
+      </p:sp>
+      <p:sp>
+        <p:nvSpPr>
+          <p:cNvPr id="14" name="Rectangle 13"/>
           <p:cNvSpPr/>
           <p:nvPr/>
         </p:nvSpPr>
@@ -3795,7 +3829,7 @@
       </p:sp>
       <p:sp>
         <p:nvSpPr>
-          <p:cNvPr id="14" name="TextBox 13"/>
+          <p:cNvPr id="15" name="TextBox 14"/>
           <p:cNvSpPr txBox="1"/>
           <p:nvPr/>
         </p:nvSpPr>
@@ -3822,14 +3856,14 @@
                   <a:srgbClr val="0D2B55"/>
                 </a:solidFill>
               </a:rPr>
-              <a:t>Enerji (8)</a:t>
-            </a:r>
-          </a:p>
-        </p:txBody>
-      </p:sp>
-      <p:sp>
-        <p:nvSpPr>
-          <p:cNvPr id="15" name="TextBox 14"/>
+              <a:t>Harmonik (8)</a:t>
+            </a:r>
+          </a:p>
+        </p:txBody>
+      </p:sp>
+      <p:sp>
+        <p:nvSpPr>
+          <p:cNvPr id="16" name="TextBox 15"/>
           <p:cNvSpPr txBox="1"/>
           <p:nvPr/>
         </p:nvSpPr>
@@ -3856,15 +3890,15 @@
                   <a:srgbClr val="333333"/>
                 </a:solidFill>
               </a:rPr>
-              <a:t>RMS, ZCR,
-dynamic range, crest factor</a:t>
-            </a:r>
-          </a:p>
-        </p:txBody>
-      </p:sp>
-      <p:sp>
-        <p:nvSpPr>
-          <p:cNvPr id="16" name="Rectangle 15"/>
+              <a:t>Chroma vektörü, harmonik-
+algısal ayrıştırma bileşenleri</a:t>
+            </a:r>
+          </a:p>
+        </p:txBody>
+      </p:sp>
+      <p:sp>
+        <p:nvSpPr>
+          <p:cNvPr id="17" name="Rectangle 16"/>
           <p:cNvSpPr/>
           <p:nvPr/>
         </p:nvSpPr>
@@ -3909,7 +3943,7 @@
       </p:sp>
       <p:sp>
         <p:nvSpPr>
-          <p:cNvPr id="17" name="TextBox 16"/>
+          <p:cNvPr id="18" name="TextBox 17"/>
           <p:cNvSpPr txBox="1"/>
           <p:nvPr/>
         </p:nvSpPr>
@@ -3936,14 +3970,14 @@
                   <a:srgbClr val="0D2B55"/>
                 </a:solidFill>
               </a:rPr>
-              <a:t>Yapısal (4)</a:t>
-            </a:r>
-          </a:p>
-        </p:txBody>
-      </p:sp>
-      <p:sp>
-        <p:nvSpPr>
-          <p:cNvPr id="18" name="TextBox 17"/>
+              <a:t>Vokal (4)</a:t>
+            </a:r>
+          </a:p>
+        </p:txBody>
+      </p:sp>
+      <p:sp>
+        <p:nvSpPr>
+          <p:cNvPr id="19" name="TextBox 18"/>
           <p:cNvSpPr txBox="1"/>
           <p:nvPr/>
         </p:nvSpPr>
@@ -3970,15 +4004,15 @@
                   <a:srgbClr val="333333"/>
                 </a:solidFill>
               </a:rPr>
-              <a:t>Segment sınırı yoğunluğu,
-tekrar oranı</a:t>
-            </a:r>
-          </a:p>
-        </p:txBody>
-      </p:sp>
-      <p:sp>
-        <p:nvSpPr>
-          <p:cNvPr id="19" name="Rectangle 18"/>
+              <a:t>Temel frekans istatistikleri,
+vibrato, formant</a:t>
+            </a:r>
+          </a:p>
+        </p:txBody>
+      </p:sp>
+      <p:sp>
+        <p:nvSpPr>
+          <p:cNvPr id="20" name="Rectangle 19"/>
           <p:cNvSpPr/>
           <p:nvPr/>
         </p:nvSpPr>
@@ -4021,7 +4055,7 @@
       </p:sp>
       <p:sp>
         <p:nvSpPr>
-          <p:cNvPr id="20" name="TextBox 19"/>
+          <p:cNvPr id="21" name="TextBox 20"/>
           <p:cNvSpPr txBox="1"/>
           <p:nvPr/>
         </p:nvSpPr>
@@ -4055,7 +4089,7 @@
       </p:sp>
       <p:sp>
         <p:nvSpPr>
-          <p:cNvPr id="21" name="TextBox 20"/>
+          <p:cNvPr id="22" name="TextBox 21"/>
           <p:cNvSpPr txBox="1"/>
           <p:nvPr/>
         </p:nvSpPr>
@@ -4082,14 +4116,14 @@
                   <a:srgbClr val="FFFFFF"/>
                 </a:solidFill>
               </a:rPr>
-              <a:t>16+10+9+8+4</a:t>
-            </a:r>
-          </a:p>
-        </p:txBody>
-      </p:sp>
-      <p:sp>
-        <p:nvSpPr>
-          <p:cNvPr id="22" name="TextBox 21"/>
+              <a:t>16 + 10 + 9 + 8 + 4</a:t>
+            </a:r>
+          </a:p>
+        </p:txBody>
+      </p:sp>
+      <p:sp>
+        <p:nvSpPr>
+          <p:cNvPr id="23" name="TextBox 22"/>
           <p:cNvSpPr txBox="1"/>
           <p:nvPr/>
         </p:nvSpPr>
@@ -4311,7 +4345,7 @@
                   <a:srgbClr val="777777"/>
                 </a:solidFill>
               </a:rPr>
-              <a:t>Şekil 2: YZ ve insan müziğinin öznitelik dağılımları karşılaştırması</a:t>
+              <a:t>Şekil 2: YZ ve insan müziğinin öznitelik dağılımları</a:t>
             </a:r>
           </a:p>
         </p:txBody>
@@ -4516,7 +4550,7 @@
                   <a:srgbClr val="333333"/>
                 </a:solidFill>
               </a:rPr>
-              <a:t>  • XGBoost — scale_pos_weight</a:t>
+              <a:t>  • XGBoost — n_estimators=400</a:t>
             </a:r>
           </a:p>
           <a:p>
@@ -4531,7 +4565,7 @@
                   <a:srgbClr val="333333"/>
                 </a:solidFill>
               </a:rPr>
-              <a:t>  • Random Forest — class_weight=balanced</a:t>
+              <a:t>  • Gradyan Artırma — max_depth=4</a:t>
             </a:r>
           </a:p>
           <a:p>
@@ -4546,7 +4580,7 @@
                   <a:srgbClr val="333333"/>
                 </a:solidFill>
               </a:rPr>
-              <a:t>  • Extra Trees</a:t>
+              <a:t>  • Rastgele Orman — n_estimators=500</a:t>
             </a:r>
           </a:p>
           <a:p>
@@ -4561,7 +4595,7 @@
                   <a:srgbClr val="333333"/>
                 </a:solidFill>
               </a:rPr>
-              <a:t>  • AdaBoost</a:t>
+              <a:t>  • SVM-RBF — C=10, gamma=0,05</a:t>
             </a:r>
           </a:p>
           <a:p>
@@ -4576,7 +4610,7 @@
                   <a:srgbClr val="333333"/>
                 </a:solidFill>
               </a:rPr>
-              <a:t>  • Logistic Regression</a:t>
+              <a:t>  • ÇKA Sinir Ağı — 128-64, relu</a:t>
             </a:r>
           </a:p>
           <a:p>
@@ -4591,9 +4625,32 @@
                   <a:srgbClr val="333333"/>
                 </a:solidFill>
               </a:rPr>
-              <a:t>  • SVM (RBF kernel)</a:t>
-            </a:r>
-          </a:p>
+              <a:t>  • Lojistik Regresyon — balanced</a:t>
+            </a:r>
+          </a:p>
+        </p:txBody>
+      </p:sp>
+      <p:sp>
+        <p:nvSpPr>
+          <p:cNvPr id="5" name="TextBox 4"/>
+          <p:cNvSpPr txBox="1"/>
+          <p:nvPr/>
+        </p:nvSpPr>
+        <p:spPr>
+          <a:xfrm>
+            <a:off x="5943600" y="1554480"/>
+            <a:ext cx="5852160" cy="4754880"/>
+          </a:xfrm>
+          <a:prstGeom prst="rect">
+            <a:avLst/>
+          </a:prstGeom>
+          <a:noFill/>
+        </p:spPr>
+        <p:txBody>
+          <a:bodyPr wrap="square">
+            <a:spAutoFit/>
+          </a:bodyPr>
+          <a:lstStyle/>
           <a:p>
             <a:pPr>
               <a:spcAft>
@@ -4606,7 +4663,7 @@
                   <a:srgbClr val="333333"/>
                 </a:solidFill>
               </a:rPr>
-              <a:t/>
+              <a:t>Derin Öğrenme (4):</a:t>
             </a:r>
           </a:p>
           <a:p>
@@ -4621,7 +4678,7 @@
                   <a:srgbClr val="333333"/>
                 </a:solidFill>
               </a:rPr>
-              <a:t>Topluluk: soft voting</a:t>
+              <a:t>  • Derin ÇKA — 512-256-128-64, BatchNorm</a:t>
             </a:r>
           </a:p>
           <a:p>
@@ -4636,32 +4693,9 @@
                   <a:srgbClr val="333333"/>
                 </a:solidFill>
               </a:rPr>
-              <a:t>LightGBM ağırlığı 2x</a:t>
-            </a:r>
-          </a:p>
-        </p:txBody>
-      </p:sp>
-      <p:sp>
-        <p:nvSpPr>
-          <p:cNvPr id="5" name="TextBox 4"/>
-          <p:cNvSpPr txBox="1"/>
-          <p:nvPr/>
-        </p:nvSpPr>
-        <p:spPr>
-          <a:xfrm>
-            <a:off x="5943600" y="1554480"/>
-            <a:ext cx="5852160" cy="4754880"/>
-          </a:xfrm>
-          <a:prstGeom prst="rect">
-            <a:avLst/>
-          </a:prstGeom>
-          <a:noFill/>
-        </p:spPr>
-        <p:txBody>
-          <a:bodyPr wrap="square">
-            <a:spAutoFit/>
-          </a:bodyPr>
-          <a:lstStyle/>
+              <a:t>  • Artık ÇKA — 3 blok, 256-256</a:t>
+            </a:r>
+          </a:p>
           <a:p>
             <a:pPr>
               <a:spcAft>
@@ -4674,7 +4708,7 @@
                   <a:srgbClr val="333333"/>
                 </a:solidFill>
               </a:rPr>
-              <a:t>Derin Öğrenme (4):</a:t>
+              <a:t>  • Dikkat ÇKA — öz-dikkat, 4 baş</a:t>
             </a:r>
           </a:p>
           <a:p>
@@ -4689,7 +4723,7 @@
                   <a:srgbClr val="333333"/>
                 </a:solidFill>
               </a:rPr>
-              <a:t>  • MLP (3 katman, ReLU, dropout=0,3)</a:t>
+              <a:t>  • 1B-ESA — Conv1D + max-pool</a:t>
             </a:r>
           </a:p>
           <a:p>
@@ -4704,7 +4738,7 @@
                   <a:srgbClr val="333333"/>
                 </a:solidFill>
               </a:rPr>
-              <a:t>  • 1D-CNN (temporal convolution)</a:t>
+              <a:t/>
             </a:r>
           </a:p>
           <a:p>
@@ -4719,7 +4753,7 @@
                   <a:srgbClr val="333333"/>
                 </a:solidFill>
               </a:rPr>
-              <a:t>  • LSTM (128 birim, dropout=0,3)</a:t>
+              <a:t>Sınıf dengesi:</a:t>
             </a:r>
           </a:p>
           <a:p>
@@ -4734,7 +4768,7 @@
                   <a:srgbClr val="333333"/>
                 </a:solidFill>
               </a:rPr>
-              <a:t>  • Transformer (2 head, dim=64)</a:t>
+              <a:t>  %59,9 insan — %40,1 YZ</a:t>
             </a:r>
           </a:p>
           <a:p>
@@ -4749,7 +4783,7 @@
                   <a:srgbClr val="333333"/>
                 </a:solidFill>
               </a:rPr>
-              <a:t/>
+              <a:t>  class_weight='balanced'</a:t>
             </a:r>
           </a:p>
           <a:p>
@@ -4764,52 +4798,7 @@
                   <a:srgbClr val="333333"/>
                 </a:solidFill>
               </a:rPr>
-              <a:t>Sınıf dengesi:</a:t>
-            </a:r>
-          </a:p>
-          <a:p>
-            <a:pPr>
-              <a:spcAft>
-                <a:spcPts val="400"/>
-              </a:spcAft>
-            </a:pPr>
-            <a:r>
-              <a:rPr sz="1400">
-                <a:solidFill>
-                  <a:srgbClr val="333333"/>
-                </a:solidFill>
-              </a:rPr>
-              <a:t>  %59,9 YZ — %40,1 insan</a:t>
-            </a:r>
-          </a:p>
-          <a:p>
-            <a:pPr>
-              <a:spcAft>
-                <a:spcPts val="400"/>
-              </a:spcAft>
-            </a:pPr>
-            <a:r>
-              <a:rPr sz="1400">
-                <a:solidFill>
-                  <a:srgbClr val="333333"/>
-                </a:solidFill>
-              </a:rPr>
-              <a:t>  class_weight='balanced'</a:t>
-            </a:r>
-          </a:p>
-          <a:p>
-            <a:pPr>
-              <a:spcAft>
-                <a:spcPts val="400"/>
-              </a:spcAft>
-            </a:pPr>
-            <a:r>
-              <a:rPr sz="1400">
-                <a:solidFill>
-                  <a:srgbClr val="333333"/>
-                </a:solidFill>
-              </a:rPr>
-              <a:t>  Yöntem: ağırlık tabanlı</a:t>
+              <a:t>  is_unbalance=True (ağaç modelleri)</a:t>
             </a:r>
           </a:p>
         </p:txBody>

--- a/docs/academic/TeslimEdilecekler/Sunumlar/03_Tasarim_ve_Gelistirme_Sunumu.pptx
+++ b/docs/academic/TeslimEdilecekler/Sunumlar/03_Tasarim_ve_Gelistirme_Sunumu.pptx
@@ -10,6 +10,8 @@
     <p:sldId id="258" r:id="rId9"/>
     <p:sldId id="259" r:id="rId10"/>
     <p:sldId id="260" r:id="rId11"/>
+    <p:sldId id="261" r:id="rId12"/>
+    <p:sldId id="262" r:id="rId13"/>
   </p:sldIdLst>
   <p:sldSz cx="12188952" cy="6858000" type="screen4x3"/>
   <p:notesSz cx="6858000" cy="9144000"/>
@@ -3109,7 +3111,7 @@
         <p:spPr>
           <a:xfrm>
             <a:off x="0" y="0"/>
-            <a:ext cx="12188952" cy="1417320"/>
+            <a:ext cx="12188952" cy="2468880"/>
           </a:xfrm>
           <a:prstGeom prst="rect">
             <a:avLst/>
@@ -3145,14 +3147,57 @@
       </p:sp>
       <p:sp>
         <p:nvSpPr>
-          <p:cNvPr id="3" name="TextBox 2"/>
-          <p:cNvSpPr txBox="1"/>
-          <p:nvPr/>
-        </p:nvSpPr>
-        <p:spPr>
-          <a:xfrm>
-            <a:off x="320040" y="91440"/>
-            <a:ext cx="11521440" cy="822960"/>
+          <p:cNvPr id="3" name="Rectangle 2"/>
+          <p:cNvSpPr/>
+          <p:nvPr/>
+        </p:nvSpPr>
+        <p:spPr>
+          <a:xfrm>
+            <a:off x="0" y="2468880"/>
+            <a:ext cx="12188952" cy="64008"/>
+          </a:xfrm>
+          <a:prstGeom prst="rect">
+            <a:avLst/>
+          </a:prstGeom>
+          <a:solidFill>
+            <a:srgbClr val="E0A800"/>
+          </a:solidFill>
+          <a:ln>
+            <a:noFill/>
+          </a:ln>
+        </p:spPr>
+        <p:style>
+          <a:lnRef idx="1">
+            <a:schemeClr val="accent1"/>
+          </a:lnRef>
+          <a:fillRef idx="3">
+            <a:schemeClr val="accent1"/>
+          </a:fillRef>
+          <a:effectRef idx="2">
+            <a:schemeClr val="accent1"/>
+          </a:effectRef>
+          <a:fontRef idx="minor">
+            <a:schemeClr val="lt1"/>
+          </a:fontRef>
+        </p:style>
+        <p:txBody>
+          <a:bodyPr rtlCol="0" anchor="ctr"/>
+          <a:lstStyle/>
+          <a:p>
+            <a:pPr algn="ctr"/>
+          </a:p>
+        </p:txBody>
+      </p:sp>
+      <p:sp>
+        <p:nvSpPr>
+          <p:cNvPr id="4" name="TextBox 3"/>
+          <p:cNvSpPr txBox="1"/>
+          <p:nvPr/>
+        </p:nvSpPr>
+        <p:spPr>
+          <a:xfrm>
+            <a:off x="548640" y="411480"/>
+            <a:ext cx="10972800" cy="365760"/>
           </a:xfrm>
           <a:prstGeom prst="rect">
             <a:avLst/>
@@ -3167,26 +3212,60 @@
           <a:p>
             <a:pPr algn="l"/>
             <a:r>
-              <a:rPr sz="2500" b="1">
+              <a:rPr sz="1300" b="1" i="0">
+                <a:solidFill>
+                  <a:srgbClr val="E0A800"/>
+                </a:solidFill>
+              </a:rPr>
+              <a:t>03 — TASARIM VE GELİŞTİRME</a:t>
+            </a:r>
+          </a:p>
+        </p:txBody>
+      </p:sp>
+      <p:sp>
+        <p:nvSpPr>
+          <p:cNvPr id="5" name="TextBox 4"/>
+          <p:cNvSpPr txBox="1"/>
+          <p:nvPr/>
+        </p:nvSpPr>
+        <p:spPr>
+          <a:xfrm>
+            <a:off x="548640" y="868680"/>
+            <a:ext cx="10972800" cy="914400"/>
+          </a:xfrm>
+          <a:prstGeom prst="rect">
+            <a:avLst/>
+          </a:prstGeom>
+          <a:noFill/>
+        </p:spPr>
+        <p:txBody>
+          <a:bodyPr wrap="square">
+            <a:spAutoFit/>
+          </a:bodyPr>
+          <a:lstStyle/>
+          <a:p>
+            <a:pPr algn="l"/>
+            <a:r>
+              <a:rPr sz="3400" b="1" i="0">
                 <a:solidFill>
                   <a:srgbClr val="FFFFFF"/>
                 </a:solidFill>
               </a:rPr>
-              <a:t>03 — Tasarım ve Geliştirme</a:t>
-            </a:r>
-          </a:p>
-        </p:txBody>
-      </p:sp>
-      <p:sp>
-        <p:nvSpPr>
-          <p:cNvPr id="4" name="TextBox 3"/>
-          <p:cNvSpPr txBox="1"/>
-          <p:nvPr/>
-        </p:nvSpPr>
-        <p:spPr>
-          <a:xfrm>
-            <a:off x="320040" y="841248"/>
-            <a:ext cx="11521440" cy="457200"/>
+              <a:t>Sistem Mimarisi ve Yöntem</a:t>
+            </a:r>
+          </a:p>
+        </p:txBody>
+      </p:sp>
+      <p:sp>
+        <p:nvSpPr>
+          <p:cNvPr id="6" name="TextBox 5"/>
+          <p:cNvSpPr txBox="1"/>
+          <p:nvPr/>
+        </p:nvSpPr>
+        <p:spPr>
+          <a:xfrm>
+            <a:off x="548640" y="1691640"/>
+            <a:ext cx="10972800" cy="548640"/>
           </a:xfrm>
           <a:prstGeom prst="rect">
             <a:avLst/>
@@ -3201,50 +3280,26 @@
           <a:p>
             <a:pPr algn="l"/>
             <a:r>
-              <a:rPr sz="1200" b="0">
-                <a:solidFill>
-                  <a:srgbClr val="B0C8D8"/>
-                </a:solidFill>
-              </a:rPr>
-              <a:t>Sistem mimarisi</a:t>
-            </a:r>
-          </a:p>
-        </p:txBody>
-      </p:sp>
-      <p:pic>
-        <p:nvPicPr>
-          <p:cNvPr id="5" name="Picture 4" descr="paper_pipeline_diagram.png"/>
-          <p:cNvPicPr>
-            <a:picLocks noChangeAspect="1"/>
-          </p:cNvPicPr>
-          <p:nvPr/>
-        </p:nvPicPr>
-        <p:blipFill>
-          <a:blip r:embed="rId2"/>
-          <a:stretch>
-            <a:fillRect/>
-          </a:stretch>
-        </p:blipFill>
-        <p:spPr>
-          <a:xfrm>
-            <a:off x="365760" y="1508760"/>
-            <a:ext cx="11430000" cy="4572000"/>
-          </a:xfrm>
-          <a:prstGeom prst="rect">
-            <a:avLst/>
-          </a:prstGeom>
-        </p:spPr>
-      </p:pic>
-      <p:sp>
-        <p:nvSpPr>
-          <p:cNvPr id="6" name="TextBox 5"/>
-          <p:cNvSpPr txBox="1"/>
-          <p:nvPr/>
-        </p:nvSpPr>
-        <p:spPr>
-          <a:xfrm>
-            <a:off x="365760" y="6172200"/>
-            <a:ext cx="11430000" cy="347472"/>
+              <a:rPr sz="1600" b="0" i="0">
+                <a:solidFill>
+                  <a:srgbClr val="AEC6D6"/>
+                </a:solidFill>
+              </a:rPr>
+              <a:t>Ham sesten karara: yedi aşamalı uçtan uca işlem zinciri</a:t>
+            </a:r>
+          </a:p>
+        </p:txBody>
+      </p:sp>
+      <p:sp>
+        <p:nvSpPr>
+          <p:cNvPr id="7" name="TextBox 6"/>
+          <p:cNvSpPr txBox="1"/>
+          <p:nvPr/>
+        </p:nvSpPr>
+        <p:spPr>
+          <a:xfrm>
+            <a:off x="640080" y="2971800"/>
+            <a:ext cx="10972800" cy="3291840"/>
           </a:xfrm>
           <a:prstGeom prst="rect">
             <a:avLst/>
@@ -3257,28 +3312,92 @@
           </a:bodyPr>
           <a:lstStyle/>
           <a:p>
-            <a:pPr algn="ctr"/>
-            <a:r>
-              <a:rPr sz="1100" b="0">
-                <a:solidFill>
-                  <a:srgbClr val="777777"/>
-                </a:solidFill>
-              </a:rPr>
-              <a:t>Şekil 1: AURIS uçtan uca işleyiş şeması</a:t>
-            </a:r>
-          </a:p>
-        </p:txBody>
-      </p:sp>
-      <p:sp>
-        <p:nvSpPr>
-          <p:cNvPr id="7" name="TextBox 6"/>
-          <p:cNvSpPr txBox="1"/>
-          <p:nvPr/>
-        </p:nvSpPr>
-        <p:spPr>
-          <a:xfrm>
-            <a:off x="0" y="6510528"/>
-            <a:ext cx="12188952" cy="301752"/>
+            <a:pPr>
+              <a:spcAft>
+                <a:spcPts val="1000"/>
+              </a:spcAft>
+            </a:pPr>
+            <a:r>
+              <a:rPr sz="1400">
+                <a:solidFill>
+                  <a:srgbClr val="2A2A2A"/>
+                </a:solidFill>
+              </a:rPr>
+              <a:t>●  Veri katmanı: 5.195 ses örneği sekiz farklı insan ve YZ kaynağından derlendi.</a:t>
+            </a:r>
+          </a:p>
+          <a:p>
+            <a:pPr>
+              <a:spcAft>
+                <a:spcPts val="1000"/>
+              </a:spcAft>
+            </a:pPr>
+            <a:r>
+              <a:rPr sz="1400">
+                <a:solidFill>
+                  <a:srgbClr val="2A2A2A"/>
+                </a:solidFill>
+              </a:rPr>
+              <a:t>●  Öznitelik katmanı: librosa ile 22.050 Hz'de 47 boyutlu vektör çıkarıldı.</a:t>
+            </a:r>
+          </a:p>
+          <a:p>
+            <a:pPr>
+              <a:spcAft>
+                <a:spcPts val="1000"/>
+              </a:spcAft>
+            </a:pPr>
+            <a:r>
+              <a:rPr sz="1400">
+                <a:solidFill>
+                  <a:srgbClr val="2A2A2A"/>
+                </a:solidFill>
+              </a:rPr>
+              <a:t>●  Model katmanı: 7 ML + 4 DL modeli 5-katlı çapraz doğrulamada karşılaştırıldı.</a:t>
+            </a:r>
+          </a:p>
+          <a:p>
+            <a:pPr>
+              <a:spcAft>
+                <a:spcPts val="1000"/>
+              </a:spcAft>
+            </a:pPr>
+            <a:r>
+              <a:rPr sz="1400">
+                <a:solidFill>
+                  <a:srgbClr val="2A2A2A"/>
+                </a:solidFill>
+              </a:rPr>
+              <a:t>●  Karar katmanı: LightGBM olasılığına Youden-optimal eşik (θ*=0,4316) uygulandı.</a:t>
+            </a:r>
+          </a:p>
+          <a:p>
+            <a:pPr>
+              <a:spcAft>
+                <a:spcPts val="1000"/>
+              </a:spcAft>
+            </a:pPr>
+            <a:r>
+              <a:rPr sz="1400">
+                <a:solidFill>
+                  <a:srgbClr val="2A2A2A"/>
+                </a:solidFill>
+              </a:rPr>
+              <a:t>●  Açıklama katmanı: TreeSHAP her kararın akustik gerekçesini üretir.</a:t>
+            </a:r>
+          </a:p>
+        </p:txBody>
+      </p:sp>
+      <p:sp>
+        <p:nvSpPr>
+          <p:cNvPr id="8" name="TextBox 7"/>
+          <p:cNvSpPr txBox="1"/>
+          <p:nvPr/>
+        </p:nvSpPr>
+        <p:spPr>
+          <a:xfrm>
+            <a:off x="365760" y="6510528"/>
+            <a:ext cx="8229600" cy="301752"/>
           </a:xfrm>
           <a:prstGeom prst="rect">
             <a:avLst/>
@@ -3291,14 +3410,48 @@
           </a:bodyPr>
           <a:lstStyle/>
           <a:p>
-            <a:pPr algn="ctr"/>
-            <a:r>
-              <a:rPr sz="900" b="0">
-                <a:solidFill>
-                  <a:srgbClr val="8899AA"/>
-                </a:solidFill>
-              </a:rPr>
-              <a:t>Hasan Arthur Altuntaş  |  BM498  |  Düzce Üniversitesi  |  2025-2026</a:t>
+            <a:pPr algn="l"/>
+            <a:r>
+              <a:rPr sz="900" b="0" i="0">
+                <a:solidFill>
+                  <a:srgbClr val="66707A"/>
+                </a:solidFill>
+              </a:rPr>
+              <a:t>AURIS  ·  Hasan Arthur Altuntaş  ·  BM498 Mezuniyet Tezi</a:t>
+            </a:r>
+          </a:p>
+        </p:txBody>
+      </p:sp>
+      <p:sp>
+        <p:nvSpPr>
+          <p:cNvPr id="9" name="TextBox 8"/>
+          <p:cNvSpPr txBox="1"/>
+          <p:nvPr/>
+        </p:nvSpPr>
+        <p:spPr>
+          <a:xfrm>
+            <a:off x="8595360" y="6510528"/>
+            <a:ext cx="3200400" cy="301752"/>
+          </a:xfrm>
+          <a:prstGeom prst="rect">
+            <a:avLst/>
+          </a:prstGeom>
+          <a:noFill/>
+        </p:spPr>
+        <p:txBody>
+          <a:bodyPr wrap="square">
+            <a:spAutoFit/>
+          </a:bodyPr>
+          <a:lstStyle/>
+          <a:p>
+            <a:pPr algn="r"/>
+            <a:r>
+              <a:rPr sz="900" b="0" i="0">
+                <a:solidFill>
+                  <a:srgbClr val="66707A"/>
+                </a:solidFill>
+              </a:rPr>
+              <a:t>Düzce Üniversitesi · 2025-2026</a:t>
             </a:r>
           </a:p>
         </p:txBody>
@@ -3338,7 +3491,7 @@
         <p:spPr>
           <a:xfrm>
             <a:off x="0" y="0"/>
-            <a:ext cx="12188952" cy="1417320"/>
+            <a:ext cx="12188952" cy="1371600"/>
           </a:xfrm>
           <a:prstGeom prst="rect">
             <a:avLst/>
@@ -3374,93 +3527,23 @@
       </p:sp>
       <p:sp>
         <p:nvSpPr>
-          <p:cNvPr id="3" name="TextBox 2"/>
-          <p:cNvSpPr txBox="1"/>
-          <p:nvPr/>
-        </p:nvSpPr>
-        <p:spPr>
-          <a:xfrm>
-            <a:off x="320040" y="91440"/>
-            <a:ext cx="11521440" cy="822960"/>
-          </a:xfrm>
-          <a:prstGeom prst="rect">
-            <a:avLst/>
-          </a:prstGeom>
-          <a:noFill/>
-        </p:spPr>
-        <p:txBody>
-          <a:bodyPr wrap="square">
-            <a:spAutoFit/>
-          </a:bodyPr>
-          <a:lstStyle/>
-          <a:p>
-            <a:pPr algn="l"/>
-            <a:r>
-              <a:rPr sz="2500" b="1">
-                <a:solidFill>
-                  <a:srgbClr val="FFFFFF"/>
-                </a:solidFill>
-              </a:rPr>
-              <a:t>Öznitelik Çıkarma — 47 Boyutlu Vektör</a:t>
-            </a:r>
-          </a:p>
-        </p:txBody>
-      </p:sp>
-      <p:sp>
-        <p:nvSpPr>
-          <p:cNvPr id="4" name="TextBox 3"/>
-          <p:cNvSpPr txBox="1"/>
-          <p:nvPr/>
-        </p:nvSpPr>
-        <p:spPr>
-          <a:xfrm>
-            <a:off x="320040" y="841248"/>
-            <a:ext cx="11521440" cy="457200"/>
-          </a:xfrm>
-          <a:prstGeom prst="rect">
-            <a:avLst/>
-          </a:prstGeom>
-          <a:noFill/>
-        </p:spPr>
-        <p:txBody>
-          <a:bodyPr wrap="square">
-            <a:spAutoFit/>
-          </a:bodyPr>
-          <a:lstStyle/>
-          <a:p>
-            <a:pPr algn="l"/>
-            <a:r>
-              <a:rPr sz="1200" b="0">
-                <a:solidFill>
-                  <a:srgbClr val="B0C8D8"/>
-                </a:solidFill>
-              </a:rPr>
-              <a:t>5 işlevsel aile (librosa tabanlı)</a:t>
-            </a:r>
-          </a:p>
-        </p:txBody>
-      </p:sp>
-      <p:sp>
-        <p:nvSpPr>
-          <p:cNvPr id="5" name="Rectangle 4"/>
+          <p:cNvPr id="3" name="Rectangle 2"/>
           <p:cNvSpPr/>
           <p:nvPr/>
         </p:nvSpPr>
         <p:spPr>
           <a:xfrm>
-            <a:off x="320040" y="1600200"/>
-            <a:ext cx="3657600" cy="2148840"/>
+            <a:off x="0" y="1371600"/>
+            <a:ext cx="12188952" cy="54864"/>
           </a:xfrm>
           <a:prstGeom prst="rect">
             <a:avLst/>
           </a:prstGeom>
           <a:solidFill>
-            <a:srgbClr val="FFFFFF"/>
+            <a:srgbClr val="E0A800"/>
           </a:solidFill>
           <a:ln>
-            <a:solidFill>
-              <a:srgbClr val="007A87"/>
-            </a:solidFill>
+            <a:noFill/>
           </a:ln>
         </p:spPr>
         <p:style>
@@ -3487,14 +3570,14 @@
       </p:sp>
       <p:sp>
         <p:nvSpPr>
-          <p:cNvPr id="6" name="TextBox 5"/>
-          <p:cNvSpPr txBox="1"/>
-          <p:nvPr/>
-        </p:nvSpPr>
-        <p:spPr>
-          <a:xfrm>
-            <a:off x="411479" y="1691640"/>
-            <a:ext cx="3474720" cy="411480"/>
+          <p:cNvPr id="4" name="TextBox 3"/>
+          <p:cNvSpPr txBox="1"/>
+          <p:nvPr/>
+        </p:nvSpPr>
+        <p:spPr>
+          <a:xfrm>
+            <a:off x="365760" y="109728"/>
+            <a:ext cx="11430000" cy="320040"/>
           </a:xfrm>
           <a:prstGeom prst="rect">
             <a:avLst/>
@@ -3509,16 +3592,74 @@
           <a:p>
             <a:pPr algn="l"/>
             <a:r>
-              <a:rPr sz="1400" b="1">
-                <a:solidFill>
-                  <a:srgbClr val="0D2B55"/>
-                </a:solidFill>
-              </a:rPr>
-              <a:t>Spektral (16)</a:t>
-            </a:r>
-          </a:p>
-        </p:txBody>
-      </p:sp>
+              <a:rPr sz="1100" b="1" i="0">
+                <a:solidFill>
+                  <a:srgbClr val="E0A800"/>
+                </a:solidFill>
+              </a:rPr>
+              <a:t>MIMARI</a:t>
+            </a:r>
+          </a:p>
+        </p:txBody>
+      </p:sp>
+      <p:sp>
+        <p:nvSpPr>
+          <p:cNvPr id="5" name="TextBox 4"/>
+          <p:cNvSpPr txBox="1"/>
+          <p:nvPr/>
+        </p:nvSpPr>
+        <p:spPr>
+          <a:xfrm>
+            <a:off x="365760" y="402336"/>
+            <a:ext cx="11430000" cy="640080"/>
+          </a:xfrm>
+          <a:prstGeom prst="rect">
+            <a:avLst/>
+          </a:prstGeom>
+          <a:noFill/>
+        </p:spPr>
+        <p:txBody>
+          <a:bodyPr wrap="square">
+            <a:spAutoFit/>
+          </a:bodyPr>
+          <a:lstStyle/>
+          <a:p>
+            <a:pPr algn="l"/>
+            <a:r>
+              <a:rPr sz="2400" b="1" i="0">
+                <a:solidFill>
+                  <a:srgbClr val="FFFFFF"/>
+                </a:solidFill>
+              </a:rPr>
+              <a:t>AURIS Uçtan Uca İşleyiş Şeması</a:t>
+            </a:r>
+          </a:p>
+        </p:txBody>
+      </p:sp>
+      <p:pic>
+        <p:nvPicPr>
+          <p:cNvPr id="6" name="Picture 5" descr="paper_pipeline_diagram.png"/>
+          <p:cNvPicPr>
+            <a:picLocks noChangeAspect="1"/>
+          </p:cNvPicPr>
+          <p:nvPr/>
+        </p:nvPicPr>
+        <p:blipFill>
+          <a:blip r:embed="rId2"/>
+          <a:stretch>
+            <a:fillRect/>
+          </a:stretch>
+        </p:blipFill>
+        <p:spPr>
+          <a:xfrm>
+            <a:off x="365760" y="1600200"/>
+            <a:ext cx="7680960" cy="4297680"/>
+          </a:xfrm>
+          <a:prstGeom prst="rect">
+            <a:avLst/>
+          </a:prstGeom>
+        </p:spPr>
+      </p:pic>
       <p:sp>
         <p:nvSpPr>
           <p:cNvPr id="7" name="TextBox 6"/>
@@ -3527,8 +3668,8 @@
         </p:nvSpPr>
         <p:spPr>
           <a:xfrm>
-            <a:off x="411479" y="2194560"/>
-            <a:ext cx="3474720" cy="1417320"/>
+            <a:off x="365760" y="5934456"/>
+            <a:ext cx="7680960" cy="292608"/>
           </a:xfrm>
           <a:prstGeom prst="rect">
             <a:avLst/>
@@ -3541,15 +3682,14 @@
           </a:bodyPr>
           <a:lstStyle/>
           <a:p>
-            <a:pPr algn="l"/>
-            <a:r>
-              <a:rPr sz="1200" b="0">
-                <a:solidFill>
-                  <a:srgbClr val="333333"/>
-                </a:solidFill>
-              </a:rPr>
-              <a:t>MFCC, mel-spektrogram, centroid,
-bandwidth, rolloff, flatness + delta</a:t>
+            <a:pPr algn="ctr"/>
+            <a:r>
+              <a:rPr sz="1000" b="0" i="1">
+                <a:solidFill>
+                  <a:srgbClr val="66707A"/>
+                </a:solidFill>
+              </a:rPr>
+              <a:t>Şekil 1: Yedi aşamalı işlem zinciri</a:t>
             </a:r>
           </a:p>
         </p:txBody>
@@ -3562,464 +3702,8 @@
         </p:nvSpPr>
         <p:spPr>
           <a:xfrm>
-            <a:off x="4251959" y="1600200"/>
-            <a:ext cx="3657600" cy="2148840"/>
-          </a:xfrm>
-          <a:prstGeom prst="rect">
-            <a:avLst/>
-          </a:prstGeom>
-          <a:solidFill>
-            <a:srgbClr val="FFFFFF"/>
-          </a:solidFill>
-          <a:ln>
-            <a:solidFill>
-              <a:srgbClr val="007A87"/>
-            </a:solidFill>
-          </a:ln>
-        </p:spPr>
-        <p:style>
-          <a:lnRef idx="1">
-            <a:schemeClr val="accent1"/>
-          </a:lnRef>
-          <a:fillRef idx="3">
-            <a:schemeClr val="accent1"/>
-          </a:fillRef>
-          <a:effectRef idx="2">
-            <a:schemeClr val="accent1"/>
-          </a:effectRef>
-          <a:fontRef idx="minor">
-            <a:schemeClr val="lt1"/>
-          </a:fontRef>
-        </p:style>
-        <p:txBody>
-          <a:bodyPr rtlCol="0" anchor="ctr"/>
-          <a:lstStyle/>
-          <a:p>
-            <a:pPr algn="ctr"/>
-          </a:p>
-        </p:txBody>
-      </p:sp>
-      <p:sp>
-        <p:nvSpPr>
-          <p:cNvPr id="9" name="TextBox 8"/>
-          <p:cNvSpPr txBox="1"/>
-          <p:nvPr/>
-        </p:nvSpPr>
-        <p:spPr>
-          <a:xfrm>
-            <a:off x="4343399" y="1691640"/>
-            <a:ext cx="3474720" cy="411480"/>
-          </a:xfrm>
-          <a:prstGeom prst="rect">
-            <a:avLst/>
-          </a:prstGeom>
-          <a:noFill/>
-        </p:spPr>
-        <p:txBody>
-          <a:bodyPr wrap="square">
-            <a:spAutoFit/>
-          </a:bodyPr>
-          <a:lstStyle/>
-          <a:p>
-            <a:pPr algn="l"/>
-            <a:r>
-              <a:rPr sz="1400" b="1">
-                <a:solidFill>
-                  <a:srgbClr val="0D2B55"/>
-                </a:solidFill>
-              </a:rPr>
-              <a:t>Zamansal (10)</a:t>
-            </a:r>
-          </a:p>
-        </p:txBody>
-      </p:sp>
-      <p:sp>
-        <p:nvSpPr>
-          <p:cNvPr id="10" name="TextBox 9"/>
-          <p:cNvSpPr txBox="1"/>
-          <p:nvPr/>
-        </p:nvSpPr>
-        <p:spPr>
-          <a:xfrm>
-            <a:off x="4343399" y="2194560"/>
-            <a:ext cx="3474720" cy="1417320"/>
-          </a:xfrm>
-          <a:prstGeom prst="rect">
-            <a:avLst/>
-          </a:prstGeom>
-          <a:noFill/>
-        </p:spPr>
-        <p:txBody>
-          <a:bodyPr wrap="square">
-            <a:spAutoFit/>
-          </a:bodyPr>
-          <a:lstStyle/>
-          <a:p>
-            <a:pPr algn="l"/>
-            <a:r>
-              <a:rPr sz="1200" b="0">
-                <a:solidFill>
-                  <a:srgbClr val="333333"/>
-                </a:solidFill>
-              </a:rPr>
-              <a:t>RMS enerjisi, sıfır geçiş hızı,
-dinamik aralık türevleri</a:t>
-            </a:r>
-          </a:p>
-        </p:txBody>
-      </p:sp>
-      <p:sp>
-        <p:nvSpPr>
-          <p:cNvPr id="11" name="Rectangle 10"/>
-          <p:cNvSpPr/>
-          <p:nvPr/>
-        </p:nvSpPr>
-        <p:spPr>
-          <a:xfrm>
-            <a:off x="8183879" y="1600200"/>
-            <a:ext cx="3657600" cy="2148840"/>
-          </a:xfrm>
-          <a:prstGeom prst="rect">
-            <a:avLst/>
-          </a:prstGeom>
-          <a:solidFill>
-            <a:srgbClr val="FFFFFF"/>
-          </a:solidFill>
-          <a:ln>
-            <a:solidFill>
-              <a:srgbClr val="007A87"/>
-            </a:solidFill>
-          </a:ln>
-        </p:spPr>
-        <p:style>
-          <a:lnRef idx="1">
-            <a:schemeClr val="accent1"/>
-          </a:lnRef>
-          <a:fillRef idx="3">
-            <a:schemeClr val="accent1"/>
-          </a:fillRef>
-          <a:effectRef idx="2">
-            <a:schemeClr val="accent1"/>
-          </a:effectRef>
-          <a:fontRef idx="minor">
-            <a:schemeClr val="lt1"/>
-          </a:fontRef>
-        </p:style>
-        <p:txBody>
-          <a:bodyPr rtlCol="0" anchor="ctr"/>
-          <a:lstStyle/>
-          <a:p>
-            <a:pPr algn="ctr"/>
-          </a:p>
-        </p:txBody>
-      </p:sp>
-      <p:sp>
-        <p:nvSpPr>
-          <p:cNvPr id="12" name="TextBox 11"/>
-          <p:cNvSpPr txBox="1"/>
-          <p:nvPr/>
-        </p:nvSpPr>
-        <p:spPr>
-          <a:xfrm>
-            <a:off x="8275319" y="1691640"/>
-            <a:ext cx="3474720" cy="411480"/>
-          </a:xfrm>
-          <a:prstGeom prst="rect">
-            <a:avLst/>
-          </a:prstGeom>
-          <a:noFill/>
-        </p:spPr>
-        <p:txBody>
-          <a:bodyPr wrap="square">
-            <a:spAutoFit/>
-          </a:bodyPr>
-          <a:lstStyle/>
-          <a:p>
-            <a:pPr algn="l"/>
-            <a:r>
-              <a:rPr sz="1400" b="1">
-                <a:solidFill>
-                  <a:srgbClr val="0D2B55"/>
-                </a:solidFill>
-              </a:rPr>
-              <a:t>Ritmik (9)</a:t>
-            </a:r>
-          </a:p>
-        </p:txBody>
-      </p:sp>
-      <p:sp>
-        <p:nvSpPr>
-          <p:cNvPr id="13" name="TextBox 12"/>
-          <p:cNvSpPr txBox="1"/>
-          <p:nvPr/>
-        </p:nvSpPr>
-        <p:spPr>
-          <a:xfrm>
-            <a:off x="8275319" y="2194560"/>
-            <a:ext cx="3474720" cy="1417320"/>
-          </a:xfrm>
-          <a:prstGeom prst="rect">
-            <a:avLst/>
-          </a:prstGeom>
-          <a:noFill/>
-        </p:spPr>
-        <p:txBody>
-          <a:bodyPr wrap="square">
-            <a:spAutoFit/>
-          </a:bodyPr>
-          <a:lstStyle/>
-          <a:p>
-            <a:pPr algn="l"/>
-            <a:r>
-              <a:rPr sz="1200" b="0">
-                <a:solidFill>
-                  <a:srgbClr val="333333"/>
-                </a:solidFill>
-              </a:rPr>
-              <a:t>Tempo, beat sayısı,
-onset gücü istatistikleri</a:t>
-            </a:r>
-          </a:p>
-        </p:txBody>
-      </p:sp>
-      <p:sp>
-        <p:nvSpPr>
-          <p:cNvPr id="14" name="Rectangle 13"/>
-          <p:cNvSpPr/>
-          <p:nvPr/>
-        </p:nvSpPr>
-        <p:spPr>
-          <a:xfrm>
-            <a:off x="320040" y="3931920"/>
-            <a:ext cx="3657600" cy="2148840"/>
-          </a:xfrm>
-          <a:prstGeom prst="rect">
-            <a:avLst/>
-          </a:prstGeom>
-          <a:solidFill>
-            <a:srgbClr val="FFFFFF"/>
-          </a:solidFill>
-          <a:ln>
-            <a:solidFill>
-              <a:srgbClr val="007A87"/>
-            </a:solidFill>
-          </a:ln>
-        </p:spPr>
-        <p:style>
-          <a:lnRef idx="1">
-            <a:schemeClr val="accent1"/>
-          </a:lnRef>
-          <a:fillRef idx="3">
-            <a:schemeClr val="accent1"/>
-          </a:fillRef>
-          <a:effectRef idx="2">
-            <a:schemeClr val="accent1"/>
-          </a:effectRef>
-          <a:fontRef idx="minor">
-            <a:schemeClr val="lt1"/>
-          </a:fontRef>
-        </p:style>
-        <p:txBody>
-          <a:bodyPr rtlCol="0" anchor="ctr"/>
-          <a:lstStyle/>
-          <a:p>
-            <a:pPr algn="ctr"/>
-          </a:p>
-        </p:txBody>
-      </p:sp>
-      <p:sp>
-        <p:nvSpPr>
-          <p:cNvPr id="15" name="TextBox 14"/>
-          <p:cNvSpPr txBox="1"/>
-          <p:nvPr/>
-        </p:nvSpPr>
-        <p:spPr>
-          <a:xfrm>
-            <a:off x="411479" y="4023359"/>
-            <a:ext cx="3474720" cy="411480"/>
-          </a:xfrm>
-          <a:prstGeom prst="rect">
-            <a:avLst/>
-          </a:prstGeom>
-          <a:noFill/>
-        </p:spPr>
-        <p:txBody>
-          <a:bodyPr wrap="square">
-            <a:spAutoFit/>
-          </a:bodyPr>
-          <a:lstStyle/>
-          <a:p>
-            <a:pPr algn="l"/>
-            <a:r>
-              <a:rPr sz="1400" b="1">
-                <a:solidFill>
-                  <a:srgbClr val="0D2B55"/>
-                </a:solidFill>
-              </a:rPr>
-              <a:t>Harmonik (8)</a:t>
-            </a:r>
-          </a:p>
-        </p:txBody>
-      </p:sp>
-      <p:sp>
-        <p:nvSpPr>
-          <p:cNvPr id="16" name="TextBox 15"/>
-          <p:cNvSpPr txBox="1"/>
-          <p:nvPr/>
-        </p:nvSpPr>
-        <p:spPr>
-          <a:xfrm>
-            <a:off x="411479" y="4526280"/>
-            <a:ext cx="3474720" cy="1417320"/>
-          </a:xfrm>
-          <a:prstGeom prst="rect">
-            <a:avLst/>
-          </a:prstGeom>
-          <a:noFill/>
-        </p:spPr>
-        <p:txBody>
-          <a:bodyPr wrap="square">
-            <a:spAutoFit/>
-          </a:bodyPr>
-          <a:lstStyle/>
-          <a:p>
-            <a:pPr algn="l"/>
-            <a:r>
-              <a:rPr sz="1200" b="0">
-                <a:solidFill>
-                  <a:srgbClr val="333333"/>
-                </a:solidFill>
-              </a:rPr>
-              <a:t>Chroma vektörü, harmonik-
-algısal ayrıştırma bileşenleri</a:t>
-            </a:r>
-          </a:p>
-        </p:txBody>
-      </p:sp>
-      <p:sp>
-        <p:nvSpPr>
-          <p:cNvPr id="17" name="Rectangle 16"/>
-          <p:cNvSpPr/>
-          <p:nvPr/>
-        </p:nvSpPr>
-        <p:spPr>
-          <a:xfrm>
-            <a:off x="4251959" y="3931920"/>
-            <a:ext cx="3657600" cy="2148840"/>
-          </a:xfrm>
-          <a:prstGeom prst="rect">
-            <a:avLst/>
-          </a:prstGeom>
-          <a:solidFill>
-            <a:srgbClr val="FFFFFF"/>
-          </a:solidFill>
-          <a:ln>
-            <a:solidFill>
-              <a:srgbClr val="007A87"/>
-            </a:solidFill>
-          </a:ln>
-        </p:spPr>
-        <p:style>
-          <a:lnRef idx="1">
-            <a:schemeClr val="accent1"/>
-          </a:lnRef>
-          <a:fillRef idx="3">
-            <a:schemeClr val="accent1"/>
-          </a:fillRef>
-          <a:effectRef idx="2">
-            <a:schemeClr val="accent1"/>
-          </a:effectRef>
-          <a:fontRef idx="minor">
-            <a:schemeClr val="lt1"/>
-          </a:fontRef>
-        </p:style>
-        <p:txBody>
-          <a:bodyPr rtlCol="0" anchor="ctr"/>
-          <a:lstStyle/>
-          <a:p>
-            <a:pPr algn="ctr"/>
-          </a:p>
-        </p:txBody>
-      </p:sp>
-      <p:sp>
-        <p:nvSpPr>
-          <p:cNvPr id="18" name="TextBox 17"/>
-          <p:cNvSpPr txBox="1"/>
-          <p:nvPr/>
-        </p:nvSpPr>
-        <p:spPr>
-          <a:xfrm>
-            <a:off x="4343399" y="4023359"/>
-            <a:ext cx="3474720" cy="411480"/>
-          </a:xfrm>
-          <a:prstGeom prst="rect">
-            <a:avLst/>
-          </a:prstGeom>
-          <a:noFill/>
-        </p:spPr>
-        <p:txBody>
-          <a:bodyPr wrap="square">
-            <a:spAutoFit/>
-          </a:bodyPr>
-          <a:lstStyle/>
-          <a:p>
-            <a:pPr algn="l"/>
-            <a:r>
-              <a:rPr sz="1400" b="1">
-                <a:solidFill>
-                  <a:srgbClr val="0D2B55"/>
-                </a:solidFill>
-              </a:rPr>
-              <a:t>Vokal (4)</a:t>
-            </a:r>
-          </a:p>
-        </p:txBody>
-      </p:sp>
-      <p:sp>
-        <p:nvSpPr>
-          <p:cNvPr id="19" name="TextBox 18"/>
-          <p:cNvSpPr txBox="1"/>
-          <p:nvPr/>
-        </p:nvSpPr>
-        <p:spPr>
-          <a:xfrm>
-            <a:off x="4343399" y="4526280"/>
-            <a:ext cx="3474720" cy="1417320"/>
-          </a:xfrm>
-          <a:prstGeom prst="rect">
-            <a:avLst/>
-          </a:prstGeom>
-          <a:noFill/>
-        </p:spPr>
-        <p:txBody>
-          <a:bodyPr wrap="square">
-            <a:spAutoFit/>
-          </a:bodyPr>
-          <a:lstStyle/>
-          <a:p>
-            <a:pPr algn="l"/>
-            <a:r>
-              <a:rPr sz="1200" b="0">
-                <a:solidFill>
-                  <a:srgbClr val="333333"/>
-                </a:solidFill>
-              </a:rPr>
-              <a:t>Temel frekans istatistikleri,
-vibrato, formant</a:t>
-            </a:r>
-          </a:p>
-        </p:txBody>
-      </p:sp>
-      <p:sp>
-        <p:nvSpPr>
-          <p:cNvPr id="20" name="Rectangle 19"/>
-          <p:cNvSpPr/>
-          <p:nvPr/>
-        </p:nvSpPr>
-        <p:spPr>
-          <a:xfrm>
-            <a:off x="7909560" y="3977639"/>
-            <a:ext cx="3886200" cy="1005840"/>
+            <a:off x="8229600" y="1600200"/>
+            <a:ext cx="3611880" cy="4297680"/>
           </a:xfrm>
           <a:prstGeom prst="rect">
             <a:avLst/>
@@ -4055,14 +3739,57 @@
       </p:sp>
       <p:sp>
         <p:nvSpPr>
-          <p:cNvPr id="21" name="TextBox 20"/>
-          <p:cNvSpPr txBox="1"/>
-          <p:nvPr/>
-        </p:nvSpPr>
-        <p:spPr>
-          <a:xfrm>
-            <a:off x="8001000" y="4041648"/>
-            <a:ext cx="3703320" cy="475488"/>
+          <p:cNvPr id="9" name="Rectangle 8"/>
+          <p:cNvSpPr/>
+          <p:nvPr/>
+        </p:nvSpPr>
+        <p:spPr>
+          <a:xfrm>
+            <a:off x="8229600" y="1600200"/>
+            <a:ext cx="82296" cy="4297680"/>
+          </a:xfrm>
+          <a:prstGeom prst="rect">
+            <a:avLst/>
+          </a:prstGeom>
+          <a:solidFill>
+            <a:srgbClr val="E0A800"/>
+          </a:solidFill>
+          <a:ln>
+            <a:noFill/>
+          </a:ln>
+        </p:spPr>
+        <p:style>
+          <a:lnRef idx="1">
+            <a:schemeClr val="accent1"/>
+          </a:lnRef>
+          <a:fillRef idx="3">
+            <a:schemeClr val="accent1"/>
+          </a:fillRef>
+          <a:effectRef idx="2">
+            <a:schemeClr val="accent1"/>
+          </a:effectRef>
+          <a:fontRef idx="minor">
+            <a:schemeClr val="lt1"/>
+          </a:fontRef>
+        </p:style>
+        <p:txBody>
+          <a:bodyPr rtlCol="0" anchor="ctr"/>
+          <a:lstStyle/>
+          <a:p>
+            <a:pPr algn="ctr"/>
+          </a:p>
+        </p:txBody>
+      </p:sp>
+      <p:sp>
+        <p:nvSpPr>
+          <p:cNvPr id="10" name="TextBox 9"/>
+          <p:cNvSpPr txBox="1"/>
+          <p:nvPr/>
+        </p:nvSpPr>
+        <p:spPr>
+          <a:xfrm>
+            <a:off x="8430768" y="1709928"/>
+            <a:ext cx="3291840" cy="365760"/>
           </a:xfrm>
           <a:prstGeom prst="rect">
             <a:avLst/>
@@ -4075,28 +3802,28 @@
           </a:bodyPr>
           <a:lstStyle/>
           <a:p>
-            <a:pPr algn="ctr"/>
-            <a:r>
-              <a:rPr sz="1800" b="1">
+            <a:pPr algn="l"/>
+            <a:r>
+              <a:rPr sz="1300" b="1" i="0">
                 <a:solidFill>
                   <a:srgbClr val="E0A800"/>
                 </a:solidFill>
               </a:rPr>
-              <a:t>Toplam: 47 boyut</a:t>
-            </a:r>
-          </a:p>
-        </p:txBody>
-      </p:sp>
-      <p:sp>
-        <p:nvSpPr>
-          <p:cNvPr id="22" name="TextBox 21"/>
-          <p:cNvSpPr txBox="1"/>
-          <p:nvPr/>
-        </p:nvSpPr>
-        <p:spPr>
-          <a:xfrm>
-            <a:off x="8001000" y="4462272"/>
-            <a:ext cx="3703320" cy="365760"/>
+              <a:t>Aşamalar</a:t>
+            </a:r>
+          </a:p>
+        </p:txBody>
+      </p:sp>
+      <p:sp>
+        <p:nvSpPr>
+          <p:cNvPr id="11" name="TextBox 10"/>
+          <p:cNvSpPr txBox="1"/>
+          <p:nvPr/>
+        </p:nvSpPr>
+        <p:spPr>
+          <a:xfrm>
+            <a:off x="8430768" y="2103120"/>
+            <a:ext cx="3291840" cy="3703320"/>
           </a:xfrm>
           <a:prstGeom prst="rect">
             <a:avLst/>
@@ -4109,28 +3836,34 @@
           </a:bodyPr>
           <a:lstStyle/>
           <a:p>
-            <a:pPr algn="ctr"/>
-            <a:r>
-              <a:rPr sz="1300" b="0">
-                <a:solidFill>
-                  <a:srgbClr val="FFFFFF"/>
-                </a:solidFill>
-              </a:rPr>
-              <a:t>16 + 10 + 9 + 8 + 4</a:t>
-            </a:r>
-          </a:p>
-        </p:txBody>
-      </p:sp>
-      <p:sp>
-        <p:nvSpPr>
-          <p:cNvPr id="23" name="TextBox 22"/>
-          <p:cNvSpPr txBox="1"/>
-          <p:nvPr/>
-        </p:nvSpPr>
-        <p:spPr>
-          <a:xfrm>
-            <a:off x="0" y="6510528"/>
-            <a:ext cx="12188952" cy="301752"/>
+            <a:pPr algn="l"/>
+            <a:r>
+              <a:rPr sz="1200" b="0" i="0">
+                <a:solidFill>
+                  <a:srgbClr val="2A2A2A"/>
+                </a:solidFill>
+              </a:rPr>
+              <a:t>1 · Ham ses (WAV/MP3)
+2 · Ön işleme: 22.050 Hz, mono
+3 · 47 öznitelik çıkarma
+4 · StandardScaler (kat-içi)
+5 · 11 model / 5-katlı CV
+6 · Youden eşik θ*=0,4316
+7 · Karar + SHAP açıklaması</a:t>
+            </a:r>
+          </a:p>
+        </p:txBody>
+      </p:sp>
+      <p:sp>
+        <p:nvSpPr>
+          <p:cNvPr id="12" name="TextBox 11"/>
+          <p:cNvSpPr txBox="1"/>
+          <p:nvPr/>
+        </p:nvSpPr>
+        <p:spPr>
+          <a:xfrm>
+            <a:off x="365760" y="6510528"/>
+            <a:ext cx="8229600" cy="301752"/>
           </a:xfrm>
           <a:prstGeom prst="rect">
             <a:avLst/>
@@ -4143,14 +3876,48 @@
           </a:bodyPr>
           <a:lstStyle/>
           <a:p>
-            <a:pPr algn="ctr"/>
-            <a:r>
-              <a:rPr sz="900" b="0">
-                <a:solidFill>
-                  <a:srgbClr val="8899AA"/>
-                </a:solidFill>
-              </a:rPr>
-              <a:t>Hasan Arthur Altuntaş  |  BM498  |  Düzce Üniversitesi  |  2025-2026</a:t>
+            <a:pPr algn="l"/>
+            <a:r>
+              <a:rPr sz="900" b="0" i="0">
+                <a:solidFill>
+                  <a:srgbClr val="66707A"/>
+                </a:solidFill>
+              </a:rPr>
+              <a:t>AURIS  ·  Hasan Arthur Altuntaş  ·  BM498 Mezuniyet Tezi</a:t>
+            </a:r>
+          </a:p>
+        </p:txBody>
+      </p:sp>
+      <p:sp>
+        <p:nvSpPr>
+          <p:cNvPr id="13" name="TextBox 12"/>
+          <p:cNvSpPr txBox="1"/>
+          <p:nvPr/>
+        </p:nvSpPr>
+        <p:spPr>
+          <a:xfrm>
+            <a:off x="8595360" y="6510528"/>
+            <a:ext cx="3200400" cy="301752"/>
+          </a:xfrm>
+          <a:prstGeom prst="rect">
+            <a:avLst/>
+          </a:prstGeom>
+          <a:noFill/>
+        </p:spPr>
+        <p:txBody>
+          <a:bodyPr wrap="square">
+            <a:spAutoFit/>
+          </a:bodyPr>
+          <a:lstStyle/>
+          <a:p>
+            <a:pPr algn="r"/>
+            <a:r>
+              <a:rPr sz="900" b="0" i="0">
+                <a:solidFill>
+                  <a:srgbClr val="66707A"/>
+                </a:solidFill>
+              </a:rPr>
+              <a:t>Düzce Üniversitesi · 2025-2026</a:t>
             </a:r>
           </a:p>
         </p:txBody>
@@ -4190,7 +3957,7 @@
         <p:spPr>
           <a:xfrm>
             <a:off x="0" y="0"/>
-            <a:ext cx="12188952" cy="1417320"/>
+            <a:ext cx="12188952" cy="1371600"/>
           </a:xfrm>
           <a:prstGeom prst="rect">
             <a:avLst/>
@@ -4226,14 +3993,57 @@
       </p:sp>
       <p:sp>
         <p:nvSpPr>
-          <p:cNvPr id="3" name="TextBox 2"/>
-          <p:cNvSpPr txBox="1"/>
-          <p:nvPr/>
-        </p:nvSpPr>
-        <p:spPr>
-          <a:xfrm>
-            <a:off x="320040" y="91440"/>
-            <a:ext cx="11521440" cy="822960"/>
+          <p:cNvPr id="3" name="Rectangle 2"/>
+          <p:cNvSpPr/>
+          <p:nvPr/>
+        </p:nvSpPr>
+        <p:spPr>
+          <a:xfrm>
+            <a:off x="0" y="1371600"/>
+            <a:ext cx="12188952" cy="54864"/>
+          </a:xfrm>
+          <a:prstGeom prst="rect">
+            <a:avLst/>
+          </a:prstGeom>
+          <a:solidFill>
+            <a:srgbClr val="E0A800"/>
+          </a:solidFill>
+          <a:ln>
+            <a:noFill/>
+          </a:ln>
+        </p:spPr>
+        <p:style>
+          <a:lnRef idx="1">
+            <a:schemeClr val="accent1"/>
+          </a:lnRef>
+          <a:fillRef idx="3">
+            <a:schemeClr val="accent1"/>
+          </a:fillRef>
+          <a:effectRef idx="2">
+            <a:schemeClr val="accent1"/>
+          </a:effectRef>
+          <a:fontRef idx="minor">
+            <a:schemeClr val="lt1"/>
+          </a:fontRef>
+        </p:style>
+        <p:txBody>
+          <a:bodyPr rtlCol="0" anchor="ctr"/>
+          <a:lstStyle/>
+          <a:p>
+            <a:pPr algn="ctr"/>
+          </a:p>
+        </p:txBody>
+      </p:sp>
+      <p:sp>
+        <p:nvSpPr>
+          <p:cNvPr id="4" name="TextBox 3"/>
+          <p:cNvSpPr txBox="1"/>
+          <p:nvPr/>
+        </p:nvSpPr>
+        <p:spPr>
+          <a:xfrm>
+            <a:off x="365760" y="109728"/>
+            <a:ext cx="11430000" cy="320040"/>
           </a:xfrm>
           <a:prstGeom prst="rect">
             <a:avLst/>
@@ -4248,26 +4058,60 @@
           <a:p>
             <a:pPr algn="l"/>
             <a:r>
-              <a:rPr sz="2500" b="1">
+              <a:rPr sz="1100" b="1" i="0">
+                <a:solidFill>
+                  <a:srgbClr val="E0A800"/>
+                </a:solidFill>
+              </a:rPr>
+              <a:t>VERI</a:t>
+            </a:r>
+          </a:p>
+        </p:txBody>
+      </p:sp>
+      <p:sp>
+        <p:nvSpPr>
+          <p:cNvPr id="5" name="TextBox 4"/>
+          <p:cNvSpPr txBox="1"/>
+          <p:nvPr/>
+        </p:nvSpPr>
+        <p:spPr>
+          <a:xfrm>
+            <a:off x="365760" y="402336"/>
+            <a:ext cx="11430000" cy="640080"/>
+          </a:xfrm>
+          <a:prstGeom prst="rect">
+            <a:avLst/>
+          </a:prstGeom>
+          <a:noFill/>
+        </p:spPr>
+        <p:txBody>
+          <a:bodyPr wrap="square">
+            <a:spAutoFit/>
+          </a:bodyPr>
+          <a:lstStyle/>
+          <a:p>
+            <a:pPr algn="l"/>
+            <a:r>
+              <a:rPr sz="2400" b="1" i="0">
                 <a:solidFill>
                   <a:srgbClr val="FFFFFF"/>
                 </a:solidFill>
               </a:rPr>
-              <a:t>Öznitelik Dağılımları</a:t>
-            </a:r>
-          </a:p>
-        </p:txBody>
-      </p:sp>
-      <p:sp>
-        <p:nvSpPr>
-          <p:cNvPr id="4" name="TextBox 3"/>
-          <p:cNvSpPr txBox="1"/>
-          <p:nvPr/>
-        </p:nvSpPr>
-        <p:spPr>
-          <a:xfrm>
-            <a:off x="320040" y="841248"/>
-            <a:ext cx="11521440" cy="457200"/>
+              <a:t>Veri Kümesi Kompozisyonu</a:t>
+            </a:r>
+          </a:p>
+        </p:txBody>
+      </p:sp>
+      <p:sp>
+        <p:nvSpPr>
+          <p:cNvPr id="6" name="TextBox 5"/>
+          <p:cNvSpPr txBox="1"/>
+          <p:nvPr/>
+        </p:nvSpPr>
+        <p:spPr>
+          <a:xfrm>
+            <a:off x="365760" y="987552"/>
+            <a:ext cx="11430000" cy="365760"/>
           </a:xfrm>
           <a:prstGeom prst="rect">
             <a:avLst/>
@@ -4282,50 +4126,69 @@
           <a:p>
             <a:pPr algn="l"/>
             <a:r>
-              <a:rPr sz="1200" b="0">
-                <a:solidFill>
-                  <a:srgbClr val="B0C8D8"/>
-                </a:solidFill>
-              </a:rPr>
-              <a:t>YZ vs İnsan — ilk 8 öznitelik</a:t>
-            </a:r>
-          </a:p>
-        </p:txBody>
-      </p:sp>
-      <p:pic>
-        <p:nvPicPr>
-          <p:cNvPr id="5" name="Picture 4" descr="feature_distribution_ai_vs_human.png"/>
-          <p:cNvPicPr>
-            <a:picLocks noChangeAspect="1"/>
-          </p:cNvPicPr>
-          <p:nvPr/>
-        </p:nvPicPr>
-        <p:blipFill>
-          <a:blip r:embed="rId2"/>
-          <a:stretch>
-            <a:fillRect/>
-          </a:stretch>
-        </p:blipFill>
-        <p:spPr>
-          <a:xfrm>
-            <a:off x="365760" y="1508760"/>
-            <a:ext cx="11430000" cy="4663440"/>
-          </a:xfrm>
-          <a:prstGeom prst="rect">
-            <a:avLst/>
-          </a:prstGeom>
-        </p:spPr>
-      </p:pic>
-      <p:sp>
-        <p:nvSpPr>
-          <p:cNvPr id="6" name="TextBox 5"/>
-          <p:cNvSpPr txBox="1"/>
-          <p:nvPr/>
-        </p:nvSpPr>
-        <p:spPr>
-          <a:xfrm>
-            <a:off x="365760" y="6236208"/>
-            <a:ext cx="11430000" cy="320040"/>
+              <a:rPr sz="1250" b="0" i="0">
+                <a:solidFill>
+                  <a:srgbClr val="AEC6D6"/>
+                </a:solidFill>
+              </a:rPr>
+              <a:t>5.195 örnek · 8 kaynak · iki sınıf</a:t>
+            </a:r>
+          </a:p>
+        </p:txBody>
+      </p:sp>
+      <p:sp>
+        <p:nvSpPr>
+          <p:cNvPr id="7" name="Rectangle 6"/>
+          <p:cNvSpPr/>
+          <p:nvPr/>
+        </p:nvSpPr>
+        <p:spPr>
+          <a:xfrm>
+            <a:off x="365760" y="1554480"/>
+            <a:ext cx="3931920" cy="384048"/>
+          </a:xfrm>
+          <a:prstGeom prst="rect">
+            <a:avLst/>
+          </a:prstGeom>
+          <a:solidFill>
+            <a:srgbClr val="0D2B55"/>
+          </a:solidFill>
+          <a:ln>
+            <a:noFill/>
+          </a:ln>
+        </p:spPr>
+        <p:style>
+          <a:lnRef idx="1">
+            <a:schemeClr val="accent1"/>
+          </a:lnRef>
+          <a:fillRef idx="3">
+            <a:schemeClr val="accent1"/>
+          </a:fillRef>
+          <a:effectRef idx="2">
+            <a:schemeClr val="accent1"/>
+          </a:effectRef>
+          <a:fontRef idx="minor">
+            <a:schemeClr val="lt1"/>
+          </a:fontRef>
+        </p:style>
+        <p:txBody>
+          <a:bodyPr rtlCol="0" anchor="ctr"/>
+          <a:lstStyle/>
+          <a:p>
+            <a:pPr algn="ctr"/>
+          </a:p>
+        </p:txBody>
+      </p:sp>
+      <p:sp>
+        <p:nvSpPr>
+          <p:cNvPr id="8" name="TextBox 7"/>
+          <p:cNvSpPr txBox="1"/>
+          <p:nvPr/>
+        </p:nvSpPr>
+        <p:spPr>
+          <a:xfrm>
+            <a:off x="438912" y="1581912"/>
+            <a:ext cx="3822191" cy="329184"/>
           </a:xfrm>
           <a:prstGeom prst="rect">
             <a:avLst/>
@@ -4340,26 +4203,69 @@
           <a:p>
             <a:pPr algn="ctr"/>
             <a:r>
-              <a:rPr sz="1100" b="0">
-                <a:solidFill>
-                  <a:srgbClr val="777777"/>
-                </a:solidFill>
-              </a:rPr>
-              <a:t>Şekil 2: YZ ve insan müziğinin öznitelik dağılımları</a:t>
-            </a:r>
-          </a:p>
-        </p:txBody>
-      </p:sp>
-      <p:sp>
-        <p:nvSpPr>
-          <p:cNvPr id="7" name="TextBox 6"/>
-          <p:cNvSpPr txBox="1"/>
-          <p:nvPr/>
-        </p:nvSpPr>
-        <p:spPr>
-          <a:xfrm>
-            <a:off x="0" y="6510528"/>
-            <a:ext cx="12188952" cy="301752"/>
+              <a:rPr sz="1200" b="1" i="0">
+                <a:solidFill>
+                  <a:srgbClr val="FFFFFF"/>
+                </a:solidFill>
+              </a:rPr>
+              <a:t>Kaynak</a:t>
+            </a:r>
+          </a:p>
+        </p:txBody>
+      </p:sp>
+      <p:sp>
+        <p:nvSpPr>
+          <p:cNvPr id="9" name="Rectangle 8"/>
+          <p:cNvSpPr/>
+          <p:nvPr/>
+        </p:nvSpPr>
+        <p:spPr>
+          <a:xfrm>
+            <a:off x="4297680" y="1554480"/>
+            <a:ext cx="2651760" cy="384048"/>
+          </a:xfrm>
+          <a:prstGeom prst="rect">
+            <a:avLst/>
+          </a:prstGeom>
+          <a:solidFill>
+            <a:srgbClr val="0D2B55"/>
+          </a:solidFill>
+          <a:ln>
+            <a:noFill/>
+          </a:ln>
+        </p:spPr>
+        <p:style>
+          <a:lnRef idx="1">
+            <a:schemeClr val="accent1"/>
+          </a:lnRef>
+          <a:fillRef idx="3">
+            <a:schemeClr val="accent1"/>
+          </a:fillRef>
+          <a:effectRef idx="2">
+            <a:schemeClr val="accent1"/>
+          </a:effectRef>
+          <a:fontRef idx="minor">
+            <a:schemeClr val="lt1"/>
+          </a:fontRef>
+        </p:style>
+        <p:txBody>
+          <a:bodyPr rtlCol="0" anchor="ctr"/>
+          <a:lstStyle/>
+          <a:p>
+            <a:pPr algn="ctr"/>
+          </a:p>
+        </p:txBody>
+      </p:sp>
+      <p:sp>
+        <p:nvSpPr>
+          <p:cNvPr id="10" name="TextBox 9"/>
+          <p:cNvSpPr txBox="1"/>
+          <p:nvPr/>
+        </p:nvSpPr>
+        <p:spPr>
+          <a:xfrm>
+            <a:off x="4370832" y="1581912"/>
+            <a:ext cx="2542032" cy="329184"/>
           </a:xfrm>
           <a:prstGeom prst="rect">
             <a:avLst/>
@@ -4374,12 +4280,3393 @@
           <a:p>
             <a:pPr algn="ctr"/>
             <a:r>
-              <a:rPr sz="900" b="0">
-                <a:solidFill>
-                  <a:srgbClr val="8899AA"/>
-                </a:solidFill>
-              </a:rPr>
-              <a:t>Hasan Arthur Altuntaş  |  BM498  |  Düzce Üniversitesi  |  2025-2026</a:t>
+              <a:rPr sz="1200" b="1" i="0">
+                <a:solidFill>
+                  <a:srgbClr val="FFFFFF"/>
+                </a:solidFill>
+              </a:rPr>
+              <a:t>Tür</a:t>
+            </a:r>
+          </a:p>
+        </p:txBody>
+      </p:sp>
+      <p:sp>
+        <p:nvSpPr>
+          <p:cNvPr id="11" name="Rectangle 10"/>
+          <p:cNvSpPr/>
+          <p:nvPr/>
+        </p:nvSpPr>
+        <p:spPr>
+          <a:xfrm>
+            <a:off x="6949440" y="1554480"/>
+            <a:ext cx="1828800" cy="384048"/>
+          </a:xfrm>
+          <a:prstGeom prst="rect">
+            <a:avLst/>
+          </a:prstGeom>
+          <a:solidFill>
+            <a:srgbClr val="0D2B55"/>
+          </a:solidFill>
+          <a:ln>
+            <a:noFill/>
+          </a:ln>
+        </p:spPr>
+        <p:style>
+          <a:lnRef idx="1">
+            <a:schemeClr val="accent1"/>
+          </a:lnRef>
+          <a:fillRef idx="3">
+            <a:schemeClr val="accent1"/>
+          </a:fillRef>
+          <a:effectRef idx="2">
+            <a:schemeClr val="accent1"/>
+          </a:effectRef>
+          <a:fontRef idx="minor">
+            <a:schemeClr val="lt1"/>
+          </a:fontRef>
+        </p:style>
+        <p:txBody>
+          <a:bodyPr rtlCol="0" anchor="ctr"/>
+          <a:lstStyle/>
+          <a:p>
+            <a:pPr algn="ctr"/>
+          </a:p>
+        </p:txBody>
+      </p:sp>
+      <p:sp>
+        <p:nvSpPr>
+          <p:cNvPr id="12" name="TextBox 11"/>
+          <p:cNvSpPr txBox="1"/>
+          <p:nvPr/>
+        </p:nvSpPr>
+        <p:spPr>
+          <a:xfrm>
+            <a:off x="7022592" y="1581912"/>
+            <a:ext cx="1719072" cy="329184"/>
+          </a:xfrm>
+          <a:prstGeom prst="rect">
+            <a:avLst/>
+          </a:prstGeom>
+          <a:noFill/>
+        </p:spPr>
+        <p:txBody>
+          <a:bodyPr wrap="square">
+            <a:spAutoFit/>
+          </a:bodyPr>
+          <a:lstStyle/>
+          <a:p>
+            <a:pPr algn="ctr"/>
+            <a:r>
+              <a:rPr sz="1200" b="1" i="0">
+                <a:solidFill>
+                  <a:srgbClr val="FFFFFF"/>
+                </a:solidFill>
+              </a:rPr>
+              <a:t>Örnek</a:t>
+            </a:r>
+          </a:p>
+        </p:txBody>
+      </p:sp>
+      <p:sp>
+        <p:nvSpPr>
+          <p:cNvPr id="13" name="Rectangle 12"/>
+          <p:cNvSpPr/>
+          <p:nvPr/>
+        </p:nvSpPr>
+        <p:spPr>
+          <a:xfrm>
+            <a:off x="8778240" y="1554480"/>
+            <a:ext cx="1463040" cy="384048"/>
+          </a:xfrm>
+          <a:prstGeom prst="rect">
+            <a:avLst/>
+          </a:prstGeom>
+          <a:solidFill>
+            <a:srgbClr val="0D2B55"/>
+          </a:solidFill>
+          <a:ln>
+            <a:noFill/>
+          </a:ln>
+        </p:spPr>
+        <p:style>
+          <a:lnRef idx="1">
+            <a:schemeClr val="accent1"/>
+          </a:lnRef>
+          <a:fillRef idx="3">
+            <a:schemeClr val="accent1"/>
+          </a:fillRef>
+          <a:effectRef idx="2">
+            <a:schemeClr val="accent1"/>
+          </a:effectRef>
+          <a:fontRef idx="minor">
+            <a:schemeClr val="lt1"/>
+          </a:fontRef>
+        </p:style>
+        <p:txBody>
+          <a:bodyPr rtlCol="0" anchor="ctr"/>
+          <a:lstStyle/>
+          <a:p>
+            <a:pPr algn="ctr"/>
+          </a:p>
+        </p:txBody>
+      </p:sp>
+      <p:sp>
+        <p:nvSpPr>
+          <p:cNvPr id="14" name="TextBox 13"/>
+          <p:cNvSpPr txBox="1"/>
+          <p:nvPr/>
+        </p:nvSpPr>
+        <p:spPr>
+          <a:xfrm>
+            <a:off x="8851392" y="1581912"/>
+            <a:ext cx="1353312" cy="329184"/>
+          </a:xfrm>
+          <a:prstGeom prst="rect">
+            <a:avLst/>
+          </a:prstGeom>
+          <a:noFill/>
+        </p:spPr>
+        <p:txBody>
+          <a:bodyPr wrap="square">
+            <a:spAutoFit/>
+          </a:bodyPr>
+          <a:lstStyle/>
+          <a:p>
+            <a:pPr algn="ctr"/>
+            <a:r>
+              <a:rPr sz="1200" b="1" i="0">
+                <a:solidFill>
+                  <a:srgbClr val="FFFFFF"/>
+                </a:solidFill>
+              </a:rPr>
+              <a:t>Etiket</a:t>
+            </a:r>
+          </a:p>
+        </p:txBody>
+      </p:sp>
+      <p:sp>
+        <p:nvSpPr>
+          <p:cNvPr id="15" name="Rectangle 14"/>
+          <p:cNvSpPr/>
+          <p:nvPr/>
+        </p:nvSpPr>
+        <p:spPr>
+          <a:xfrm>
+            <a:off x="365760" y="1956816"/>
+            <a:ext cx="3931920" cy="365760"/>
+          </a:xfrm>
+          <a:prstGeom prst="rect">
+            <a:avLst/>
+          </a:prstGeom>
+          <a:solidFill>
+            <a:srgbClr val="FFFFFF"/>
+          </a:solidFill>
+          <a:ln w="12700">
+            <a:solidFill>
+              <a:srgbClr val="D5D9DD"/>
+            </a:solidFill>
+          </a:ln>
+        </p:spPr>
+        <p:style>
+          <a:lnRef idx="1">
+            <a:schemeClr val="accent1"/>
+          </a:lnRef>
+          <a:fillRef idx="3">
+            <a:schemeClr val="accent1"/>
+          </a:fillRef>
+          <a:effectRef idx="2">
+            <a:schemeClr val="accent1"/>
+          </a:effectRef>
+          <a:fontRef idx="minor">
+            <a:schemeClr val="lt1"/>
+          </a:fontRef>
+        </p:style>
+        <p:txBody>
+          <a:bodyPr rtlCol="0" anchor="ctr"/>
+          <a:lstStyle/>
+          <a:p>
+            <a:pPr algn="ctr"/>
+          </a:p>
+        </p:txBody>
+      </p:sp>
+      <p:sp>
+        <p:nvSpPr>
+          <p:cNvPr id="16" name="TextBox 15"/>
+          <p:cNvSpPr txBox="1"/>
+          <p:nvPr/>
+        </p:nvSpPr>
+        <p:spPr>
+          <a:xfrm>
+            <a:off x="411480" y="1993392"/>
+            <a:ext cx="3840480" cy="292608"/>
+          </a:xfrm>
+          <a:prstGeom prst="rect">
+            <a:avLst/>
+          </a:prstGeom>
+          <a:noFill/>
+        </p:spPr>
+        <p:txBody>
+          <a:bodyPr wrap="square" anchor="ctr">
+            <a:spAutoFit/>
+          </a:bodyPr>
+          <a:lstStyle/>
+          <a:p>
+            <a:pPr algn="ctr"/>
+            <a:r>
+              <a:rPr sz="1150" b="0" i="0">
+                <a:solidFill>
+                  <a:srgbClr val="2A2A2A"/>
+                </a:solidFill>
+              </a:rPr>
+              <a:t>GTZAN</a:t>
+            </a:r>
+          </a:p>
+        </p:txBody>
+      </p:sp>
+      <p:sp>
+        <p:nvSpPr>
+          <p:cNvPr id="17" name="Rectangle 16"/>
+          <p:cNvSpPr/>
+          <p:nvPr/>
+        </p:nvSpPr>
+        <p:spPr>
+          <a:xfrm>
+            <a:off x="4297680" y="1956816"/>
+            <a:ext cx="2651760" cy="365760"/>
+          </a:xfrm>
+          <a:prstGeom prst="rect">
+            <a:avLst/>
+          </a:prstGeom>
+          <a:solidFill>
+            <a:srgbClr val="FFFFFF"/>
+          </a:solidFill>
+          <a:ln w="12700">
+            <a:solidFill>
+              <a:srgbClr val="D5D9DD"/>
+            </a:solidFill>
+          </a:ln>
+        </p:spPr>
+        <p:style>
+          <a:lnRef idx="1">
+            <a:schemeClr val="accent1"/>
+          </a:lnRef>
+          <a:fillRef idx="3">
+            <a:schemeClr val="accent1"/>
+          </a:fillRef>
+          <a:effectRef idx="2">
+            <a:schemeClr val="accent1"/>
+          </a:effectRef>
+          <a:fontRef idx="minor">
+            <a:schemeClr val="lt1"/>
+          </a:fontRef>
+        </p:style>
+        <p:txBody>
+          <a:bodyPr rtlCol="0" anchor="ctr"/>
+          <a:lstStyle/>
+          <a:p>
+            <a:pPr algn="ctr"/>
+          </a:p>
+        </p:txBody>
+      </p:sp>
+      <p:sp>
+        <p:nvSpPr>
+          <p:cNvPr id="18" name="TextBox 17"/>
+          <p:cNvSpPr txBox="1"/>
+          <p:nvPr/>
+        </p:nvSpPr>
+        <p:spPr>
+          <a:xfrm>
+            <a:off x="4343400" y="1993392"/>
+            <a:ext cx="2560320" cy="292608"/>
+          </a:xfrm>
+          <a:prstGeom prst="rect">
+            <a:avLst/>
+          </a:prstGeom>
+          <a:noFill/>
+        </p:spPr>
+        <p:txBody>
+          <a:bodyPr wrap="square" anchor="ctr">
+            <a:spAutoFit/>
+          </a:bodyPr>
+          <a:lstStyle/>
+          <a:p>
+            <a:pPr algn="ctr"/>
+            <a:r>
+              <a:rPr sz="1150" b="0" i="0">
+                <a:solidFill>
+                  <a:srgbClr val="2A2A2A"/>
+                </a:solidFill>
+              </a:rPr>
+              <a:t>İnsan</a:t>
+            </a:r>
+          </a:p>
+        </p:txBody>
+      </p:sp>
+      <p:sp>
+        <p:nvSpPr>
+          <p:cNvPr id="19" name="Rectangle 18"/>
+          <p:cNvSpPr/>
+          <p:nvPr/>
+        </p:nvSpPr>
+        <p:spPr>
+          <a:xfrm>
+            <a:off x="6949440" y="1956816"/>
+            <a:ext cx="1828800" cy="365760"/>
+          </a:xfrm>
+          <a:prstGeom prst="rect">
+            <a:avLst/>
+          </a:prstGeom>
+          <a:solidFill>
+            <a:srgbClr val="FFFFFF"/>
+          </a:solidFill>
+          <a:ln w="12700">
+            <a:solidFill>
+              <a:srgbClr val="D5D9DD"/>
+            </a:solidFill>
+          </a:ln>
+        </p:spPr>
+        <p:style>
+          <a:lnRef idx="1">
+            <a:schemeClr val="accent1"/>
+          </a:lnRef>
+          <a:fillRef idx="3">
+            <a:schemeClr val="accent1"/>
+          </a:fillRef>
+          <a:effectRef idx="2">
+            <a:schemeClr val="accent1"/>
+          </a:effectRef>
+          <a:fontRef idx="minor">
+            <a:schemeClr val="lt1"/>
+          </a:fontRef>
+        </p:style>
+        <p:txBody>
+          <a:bodyPr rtlCol="0" anchor="ctr"/>
+          <a:lstStyle/>
+          <a:p>
+            <a:pPr algn="ctr"/>
+          </a:p>
+        </p:txBody>
+      </p:sp>
+      <p:sp>
+        <p:nvSpPr>
+          <p:cNvPr id="20" name="TextBox 19"/>
+          <p:cNvSpPr txBox="1"/>
+          <p:nvPr/>
+        </p:nvSpPr>
+        <p:spPr>
+          <a:xfrm>
+            <a:off x="6995159" y="1993392"/>
+            <a:ext cx="1737360" cy="292608"/>
+          </a:xfrm>
+          <a:prstGeom prst="rect">
+            <a:avLst/>
+          </a:prstGeom>
+          <a:noFill/>
+        </p:spPr>
+        <p:txBody>
+          <a:bodyPr wrap="square" anchor="ctr">
+            <a:spAutoFit/>
+          </a:bodyPr>
+          <a:lstStyle/>
+          <a:p>
+            <a:pPr algn="ctr"/>
+            <a:r>
+              <a:rPr sz="1150" b="0" i="0">
+                <a:solidFill>
+                  <a:srgbClr val="2A2A2A"/>
+                </a:solidFill>
+              </a:rPr>
+              <a:t>899</a:t>
+            </a:r>
+          </a:p>
+        </p:txBody>
+      </p:sp>
+      <p:sp>
+        <p:nvSpPr>
+          <p:cNvPr id="21" name="Rectangle 20"/>
+          <p:cNvSpPr/>
+          <p:nvPr/>
+        </p:nvSpPr>
+        <p:spPr>
+          <a:xfrm>
+            <a:off x="8778240" y="1956816"/>
+            <a:ext cx="1463040" cy="365760"/>
+          </a:xfrm>
+          <a:prstGeom prst="rect">
+            <a:avLst/>
+          </a:prstGeom>
+          <a:solidFill>
+            <a:srgbClr val="FFFFFF"/>
+          </a:solidFill>
+          <a:ln w="12700">
+            <a:solidFill>
+              <a:srgbClr val="D5D9DD"/>
+            </a:solidFill>
+          </a:ln>
+        </p:spPr>
+        <p:style>
+          <a:lnRef idx="1">
+            <a:schemeClr val="accent1"/>
+          </a:lnRef>
+          <a:fillRef idx="3">
+            <a:schemeClr val="accent1"/>
+          </a:fillRef>
+          <a:effectRef idx="2">
+            <a:schemeClr val="accent1"/>
+          </a:effectRef>
+          <a:fontRef idx="minor">
+            <a:schemeClr val="lt1"/>
+          </a:fontRef>
+        </p:style>
+        <p:txBody>
+          <a:bodyPr rtlCol="0" anchor="ctr"/>
+          <a:lstStyle/>
+          <a:p>
+            <a:pPr algn="ctr"/>
+          </a:p>
+        </p:txBody>
+      </p:sp>
+      <p:sp>
+        <p:nvSpPr>
+          <p:cNvPr id="22" name="TextBox 21"/>
+          <p:cNvSpPr txBox="1"/>
+          <p:nvPr/>
+        </p:nvSpPr>
+        <p:spPr>
+          <a:xfrm>
+            <a:off x="8823960" y="1993392"/>
+            <a:ext cx="1371600" cy="292608"/>
+          </a:xfrm>
+          <a:prstGeom prst="rect">
+            <a:avLst/>
+          </a:prstGeom>
+          <a:noFill/>
+        </p:spPr>
+        <p:txBody>
+          <a:bodyPr wrap="square" anchor="ctr">
+            <a:spAutoFit/>
+          </a:bodyPr>
+          <a:lstStyle/>
+          <a:p>
+            <a:pPr algn="ctr"/>
+            <a:r>
+              <a:rPr sz="1150" b="0" i="0">
+                <a:solidFill>
+                  <a:srgbClr val="2A2A2A"/>
+                </a:solidFill>
+              </a:rPr>
+              <a:t>0</a:t>
+            </a:r>
+          </a:p>
+        </p:txBody>
+      </p:sp>
+      <p:sp>
+        <p:nvSpPr>
+          <p:cNvPr id="23" name="Rectangle 22"/>
+          <p:cNvSpPr/>
+          <p:nvPr/>
+        </p:nvSpPr>
+        <p:spPr>
+          <a:xfrm>
+            <a:off x="365760" y="2350008"/>
+            <a:ext cx="3931920" cy="365760"/>
+          </a:xfrm>
+          <a:prstGeom prst="rect">
+            <a:avLst/>
+          </a:prstGeom>
+          <a:solidFill>
+            <a:srgbClr val="E8ECF0"/>
+          </a:solidFill>
+          <a:ln w="12700">
+            <a:solidFill>
+              <a:srgbClr val="D5D9DD"/>
+            </a:solidFill>
+          </a:ln>
+        </p:spPr>
+        <p:style>
+          <a:lnRef idx="1">
+            <a:schemeClr val="accent1"/>
+          </a:lnRef>
+          <a:fillRef idx="3">
+            <a:schemeClr val="accent1"/>
+          </a:fillRef>
+          <a:effectRef idx="2">
+            <a:schemeClr val="accent1"/>
+          </a:effectRef>
+          <a:fontRef idx="minor">
+            <a:schemeClr val="lt1"/>
+          </a:fontRef>
+        </p:style>
+        <p:txBody>
+          <a:bodyPr rtlCol="0" anchor="ctr"/>
+          <a:lstStyle/>
+          <a:p>
+            <a:pPr algn="ctr"/>
+          </a:p>
+        </p:txBody>
+      </p:sp>
+      <p:sp>
+        <p:nvSpPr>
+          <p:cNvPr id="24" name="TextBox 23"/>
+          <p:cNvSpPr txBox="1"/>
+          <p:nvPr/>
+        </p:nvSpPr>
+        <p:spPr>
+          <a:xfrm>
+            <a:off x="411480" y="2386584"/>
+            <a:ext cx="3840480" cy="292608"/>
+          </a:xfrm>
+          <a:prstGeom prst="rect">
+            <a:avLst/>
+          </a:prstGeom>
+          <a:noFill/>
+        </p:spPr>
+        <p:txBody>
+          <a:bodyPr wrap="square" anchor="ctr">
+            <a:spAutoFit/>
+          </a:bodyPr>
+          <a:lstStyle/>
+          <a:p>
+            <a:pPr algn="ctr"/>
+            <a:r>
+              <a:rPr sz="1150" b="0" i="0">
+                <a:solidFill>
+                  <a:srgbClr val="2A2A2A"/>
+                </a:solidFill>
+              </a:rPr>
+              <a:t>FMA Small</a:t>
+            </a:r>
+          </a:p>
+        </p:txBody>
+      </p:sp>
+      <p:sp>
+        <p:nvSpPr>
+          <p:cNvPr id="25" name="Rectangle 24"/>
+          <p:cNvSpPr/>
+          <p:nvPr/>
+        </p:nvSpPr>
+        <p:spPr>
+          <a:xfrm>
+            <a:off x="4297680" y="2350008"/>
+            <a:ext cx="2651760" cy="365760"/>
+          </a:xfrm>
+          <a:prstGeom prst="rect">
+            <a:avLst/>
+          </a:prstGeom>
+          <a:solidFill>
+            <a:srgbClr val="E8ECF0"/>
+          </a:solidFill>
+          <a:ln w="12700">
+            <a:solidFill>
+              <a:srgbClr val="D5D9DD"/>
+            </a:solidFill>
+          </a:ln>
+        </p:spPr>
+        <p:style>
+          <a:lnRef idx="1">
+            <a:schemeClr val="accent1"/>
+          </a:lnRef>
+          <a:fillRef idx="3">
+            <a:schemeClr val="accent1"/>
+          </a:fillRef>
+          <a:effectRef idx="2">
+            <a:schemeClr val="accent1"/>
+          </a:effectRef>
+          <a:fontRef idx="minor">
+            <a:schemeClr val="lt1"/>
+          </a:fontRef>
+        </p:style>
+        <p:txBody>
+          <a:bodyPr rtlCol="0" anchor="ctr"/>
+          <a:lstStyle/>
+          <a:p>
+            <a:pPr algn="ctr"/>
+          </a:p>
+        </p:txBody>
+      </p:sp>
+      <p:sp>
+        <p:nvSpPr>
+          <p:cNvPr id="26" name="TextBox 25"/>
+          <p:cNvSpPr txBox="1"/>
+          <p:nvPr/>
+        </p:nvSpPr>
+        <p:spPr>
+          <a:xfrm>
+            <a:off x="4343400" y="2386584"/>
+            <a:ext cx="2560320" cy="292608"/>
+          </a:xfrm>
+          <a:prstGeom prst="rect">
+            <a:avLst/>
+          </a:prstGeom>
+          <a:noFill/>
+        </p:spPr>
+        <p:txBody>
+          <a:bodyPr wrap="square" anchor="ctr">
+            <a:spAutoFit/>
+          </a:bodyPr>
+          <a:lstStyle/>
+          <a:p>
+            <a:pPr algn="ctr"/>
+            <a:r>
+              <a:rPr sz="1150" b="0" i="0">
+                <a:solidFill>
+                  <a:srgbClr val="2A2A2A"/>
+                </a:solidFill>
+              </a:rPr>
+              <a:t>İnsan</a:t>
+            </a:r>
+          </a:p>
+        </p:txBody>
+      </p:sp>
+      <p:sp>
+        <p:nvSpPr>
+          <p:cNvPr id="27" name="Rectangle 26"/>
+          <p:cNvSpPr/>
+          <p:nvPr/>
+        </p:nvSpPr>
+        <p:spPr>
+          <a:xfrm>
+            <a:off x="6949440" y="2350008"/>
+            <a:ext cx="1828800" cy="365760"/>
+          </a:xfrm>
+          <a:prstGeom prst="rect">
+            <a:avLst/>
+          </a:prstGeom>
+          <a:solidFill>
+            <a:srgbClr val="E8ECF0"/>
+          </a:solidFill>
+          <a:ln w="12700">
+            <a:solidFill>
+              <a:srgbClr val="D5D9DD"/>
+            </a:solidFill>
+          </a:ln>
+        </p:spPr>
+        <p:style>
+          <a:lnRef idx="1">
+            <a:schemeClr val="accent1"/>
+          </a:lnRef>
+          <a:fillRef idx="3">
+            <a:schemeClr val="accent1"/>
+          </a:fillRef>
+          <a:effectRef idx="2">
+            <a:schemeClr val="accent1"/>
+          </a:effectRef>
+          <a:fontRef idx="minor">
+            <a:schemeClr val="lt1"/>
+          </a:fontRef>
+        </p:style>
+        <p:txBody>
+          <a:bodyPr rtlCol="0" anchor="ctr"/>
+          <a:lstStyle/>
+          <a:p>
+            <a:pPr algn="ctr"/>
+          </a:p>
+        </p:txBody>
+      </p:sp>
+      <p:sp>
+        <p:nvSpPr>
+          <p:cNvPr id="28" name="TextBox 27"/>
+          <p:cNvSpPr txBox="1"/>
+          <p:nvPr/>
+        </p:nvSpPr>
+        <p:spPr>
+          <a:xfrm>
+            <a:off x="6995159" y="2386584"/>
+            <a:ext cx="1737360" cy="292608"/>
+          </a:xfrm>
+          <a:prstGeom prst="rect">
+            <a:avLst/>
+          </a:prstGeom>
+          <a:noFill/>
+        </p:spPr>
+        <p:txBody>
+          <a:bodyPr wrap="square" anchor="ctr">
+            <a:spAutoFit/>
+          </a:bodyPr>
+          <a:lstStyle/>
+          <a:p>
+            <a:pPr algn="ctr"/>
+            <a:r>
+              <a:rPr sz="1150" b="0" i="0">
+                <a:solidFill>
+                  <a:srgbClr val="2A2A2A"/>
+                </a:solidFill>
+              </a:rPr>
+              <a:t>1.000</a:t>
+            </a:r>
+          </a:p>
+        </p:txBody>
+      </p:sp>
+      <p:sp>
+        <p:nvSpPr>
+          <p:cNvPr id="29" name="Rectangle 28"/>
+          <p:cNvSpPr/>
+          <p:nvPr/>
+        </p:nvSpPr>
+        <p:spPr>
+          <a:xfrm>
+            <a:off x="8778240" y="2350008"/>
+            <a:ext cx="1463040" cy="365760"/>
+          </a:xfrm>
+          <a:prstGeom prst="rect">
+            <a:avLst/>
+          </a:prstGeom>
+          <a:solidFill>
+            <a:srgbClr val="E8ECF0"/>
+          </a:solidFill>
+          <a:ln w="12700">
+            <a:solidFill>
+              <a:srgbClr val="D5D9DD"/>
+            </a:solidFill>
+          </a:ln>
+        </p:spPr>
+        <p:style>
+          <a:lnRef idx="1">
+            <a:schemeClr val="accent1"/>
+          </a:lnRef>
+          <a:fillRef idx="3">
+            <a:schemeClr val="accent1"/>
+          </a:fillRef>
+          <a:effectRef idx="2">
+            <a:schemeClr val="accent1"/>
+          </a:effectRef>
+          <a:fontRef idx="minor">
+            <a:schemeClr val="lt1"/>
+          </a:fontRef>
+        </p:style>
+        <p:txBody>
+          <a:bodyPr rtlCol="0" anchor="ctr"/>
+          <a:lstStyle/>
+          <a:p>
+            <a:pPr algn="ctr"/>
+          </a:p>
+        </p:txBody>
+      </p:sp>
+      <p:sp>
+        <p:nvSpPr>
+          <p:cNvPr id="30" name="TextBox 29"/>
+          <p:cNvSpPr txBox="1"/>
+          <p:nvPr/>
+        </p:nvSpPr>
+        <p:spPr>
+          <a:xfrm>
+            <a:off x="8823960" y="2386584"/>
+            <a:ext cx="1371600" cy="292608"/>
+          </a:xfrm>
+          <a:prstGeom prst="rect">
+            <a:avLst/>
+          </a:prstGeom>
+          <a:noFill/>
+        </p:spPr>
+        <p:txBody>
+          <a:bodyPr wrap="square" anchor="ctr">
+            <a:spAutoFit/>
+          </a:bodyPr>
+          <a:lstStyle/>
+          <a:p>
+            <a:pPr algn="ctr"/>
+            <a:r>
+              <a:rPr sz="1150" b="0" i="0">
+                <a:solidFill>
+                  <a:srgbClr val="2A2A2A"/>
+                </a:solidFill>
+              </a:rPr>
+              <a:t>0</a:t>
+            </a:r>
+          </a:p>
+        </p:txBody>
+      </p:sp>
+      <p:sp>
+        <p:nvSpPr>
+          <p:cNvPr id="31" name="Rectangle 30"/>
+          <p:cNvSpPr/>
+          <p:nvPr/>
+        </p:nvSpPr>
+        <p:spPr>
+          <a:xfrm>
+            <a:off x="365760" y="2743200"/>
+            <a:ext cx="3931920" cy="365760"/>
+          </a:xfrm>
+          <a:prstGeom prst="rect">
+            <a:avLst/>
+          </a:prstGeom>
+          <a:solidFill>
+            <a:srgbClr val="FFFFFF"/>
+          </a:solidFill>
+          <a:ln w="12700">
+            <a:solidFill>
+              <a:srgbClr val="D5D9DD"/>
+            </a:solidFill>
+          </a:ln>
+        </p:spPr>
+        <p:style>
+          <a:lnRef idx="1">
+            <a:schemeClr val="accent1"/>
+          </a:lnRef>
+          <a:fillRef idx="3">
+            <a:schemeClr val="accent1"/>
+          </a:fillRef>
+          <a:effectRef idx="2">
+            <a:schemeClr val="accent1"/>
+          </a:effectRef>
+          <a:fontRef idx="minor">
+            <a:schemeClr val="lt1"/>
+          </a:fontRef>
+        </p:style>
+        <p:txBody>
+          <a:bodyPr rtlCol="0" anchor="ctr"/>
+          <a:lstStyle/>
+          <a:p>
+            <a:pPr algn="ctr"/>
+          </a:p>
+        </p:txBody>
+      </p:sp>
+      <p:sp>
+        <p:nvSpPr>
+          <p:cNvPr id="32" name="TextBox 31"/>
+          <p:cNvSpPr txBox="1"/>
+          <p:nvPr/>
+        </p:nvSpPr>
+        <p:spPr>
+          <a:xfrm>
+            <a:off x="411480" y="2779776"/>
+            <a:ext cx="3840480" cy="292608"/>
+          </a:xfrm>
+          <a:prstGeom prst="rect">
+            <a:avLst/>
+          </a:prstGeom>
+          <a:noFill/>
+        </p:spPr>
+        <p:txBody>
+          <a:bodyPr wrap="square" anchor="ctr">
+            <a:spAutoFit/>
+          </a:bodyPr>
+          <a:lstStyle/>
+          <a:p>
+            <a:pPr algn="ctr"/>
+            <a:r>
+              <a:rPr sz="1150" b="0" i="0">
+                <a:solidFill>
+                  <a:srgbClr val="2A2A2A"/>
+                </a:solidFill>
+              </a:rPr>
+              <a:t>SleepyJesse (kapak)</a:t>
+            </a:r>
+          </a:p>
+        </p:txBody>
+      </p:sp>
+      <p:sp>
+        <p:nvSpPr>
+          <p:cNvPr id="33" name="Rectangle 32"/>
+          <p:cNvSpPr/>
+          <p:nvPr/>
+        </p:nvSpPr>
+        <p:spPr>
+          <a:xfrm>
+            <a:off x="4297680" y="2743200"/>
+            <a:ext cx="2651760" cy="365760"/>
+          </a:xfrm>
+          <a:prstGeom prst="rect">
+            <a:avLst/>
+          </a:prstGeom>
+          <a:solidFill>
+            <a:srgbClr val="FFFFFF"/>
+          </a:solidFill>
+          <a:ln w="12700">
+            <a:solidFill>
+              <a:srgbClr val="D5D9DD"/>
+            </a:solidFill>
+          </a:ln>
+        </p:spPr>
+        <p:style>
+          <a:lnRef idx="1">
+            <a:schemeClr val="accent1"/>
+          </a:lnRef>
+          <a:fillRef idx="3">
+            <a:schemeClr val="accent1"/>
+          </a:fillRef>
+          <a:effectRef idx="2">
+            <a:schemeClr val="accent1"/>
+          </a:effectRef>
+          <a:fontRef idx="minor">
+            <a:schemeClr val="lt1"/>
+          </a:fontRef>
+        </p:style>
+        <p:txBody>
+          <a:bodyPr rtlCol="0" anchor="ctr"/>
+          <a:lstStyle/>
+          <a:p>
+            <a:pPr algn="ctr"/>
+          </a:p>
+        </p:txBody>
+      </p:sp>
+      <p:sp>
+        <p:nvSpPr>
+          <p:cNvPr id="34" name="TextBox 33"/>
+          <p:cNvSpPr txBox="1"/>
+          <p:nvPr/>
+        </p:nvSpPr>
+        <p:spPr>
+          <a:xfrm>
+            <a:off x="4343400" y="2779776"/>
+            <a:ext cx="2560320" cy="292608"/>
+          </a:xfrm>
+          <a:prstGeom prst="rect">
+            <a:avLst/>
+          </a:prstGeom>
+          <a:noFill/>
+        </p:spPr>
+        <p:txBody>
+          <a:bodyPr wrap="square" anchor="ctr">
+            <a:spAutoFit/>
+          </a:bodyPr>
+          <a:lstStyle/>
+          <a:p>
+            <a:pPr algn="ctr"/>
+            <a:r>
+              <a:rPr sz="1150" b="0" i="0">
+                <a:solidFill>
+                  <a:srgbClr val="2A2A2A"/>
+                </a:solidFill>
+              </a:rPr>
+              <a:t>İnsan</a:t>
+            </a:r>
+          </a:p>
+        </p:txBody>
+      </p:sp>
+      <p:sp>
+        <p:nvSpPr>
+          <p:cNvPr id="35" name="Rectangle 34"/>
+          <p:cNvSpPr/>
+          <p:nvPr/>
+        </p:nvSpPr>
+        <p:spPr>
+          <a:xfrm>
+            <a:off x="6949440" y="2743200"/>
+            <a:ext cx="1828800" cy="365760"/>
+          </a:xfrm>
+          <a:prstGeom prst="rect">
+            <a:avLst/>
+          </a:prstGeom>
+          <a:solidFill>
+            <a:srgbClr val="FFFFFF"/>
+          </a:solidFill>
+          <a:ln w="12700">
+            <a:solidFill>
+              <a:srgbClr val="D5D9DD"/>
+            </a:solidFill>
+          </a:ln>
+        </p:spPr>
+        <p:style>
+          <a:lnRef idx="1">
+            <a:schemeClr val="accent1"/>
+          </a:lnRef>
+          <a:fillRef idx="3">
+            <a:schemeClr val="accent1"/>
+          </a:fillRef>
+          <a:effectRef idx="2">
+            <a:schemeClr val="accent1"/>
+          </a:effectRef>
+          <a:fontRef idx="minor">
+            <a:schemeClr val="lt1"/>
+          </a:fontRef>
+        </p:style>
+        <p:txBody>
+          <a:bodyPr rtlCol="0" anchor="ctr"/>
+          <a:lstStyle/>
+          <a:p>
+            <a:pPr algn="ctr"/>
+          </a:p>
+        </p:txBody>
+      </p:sp>
+      <p:sp>
+        <p:nvSpPr>
+          <p:cNvPr id="36" name="TextBox 35"/>
+          <p:cNvSpPr txBox="1"/>
+          <p:nvPr/>
+        </p:nvSpPr>
+        <p:spPr>
+          <a:xfrm>
+            <a:off x="6995159" y="2779776"/>
+            <a:ext cx="1737360" cy="292608"/>
+          </a:xfrm>
+          <a:prstGeom prst="rect">
+            <a:avLst/>
+          </a:prstGeom>
+          <a:noFill/>
+        </p:spPr>
+        <p:txBody>
+          <a:bodyPr wrap="square" anchor="ctr">
+            <a:spAutoFit/>
+          </a:bodyPr>
+          <a:lstStyle/>
+          <a:p>
+            <a:pPr algn="ctr"/>
+            <a:r>
+              <a:rPr sz="1150" b="0" i="0">
+                <a:solidFill>
+                  <a:srgbClr val="2A2A2A"/>
+                </a:solidFill>
+              </a:rPr>
+              <a:t>854</a:t>
+            </a:r>
+          </a:p>
+        </p:txBody>
+      </p:sp>
+      <p:sp>
+        <p:nvSpPr>
+          <p:cNvPr id="37" name="Rectangle 36"/>
+          <p:cNvSpPr/>
+          <p:nvPr/>
+        </p:nvSpPr>
+        <p:spPr>
+          <a:xfrm>
+            <a:off x="8778240" y="2743200"/>
+            <a:ext cx="1463040" cy="365760"/>
+          </a:xfrm>
+          <a:prstGeom prst="rect">
+            <a:avLst/>
+          </a:prstGeom>
+          <a:solidFill>
+            <a:srgbClr val="FFFFFF"/>
+          </a:solidFill>
+          <a:ln w="12700">
+            <a:solidFill>
+              <a:srgbClr val="D5D9DD"/>
+            </a:solidFill>
+          </a:ln>
+        </p:spPr>
+        <p:style>
+          <a:lnRef idx="1">
+            <a:schemeClr val="accent1"/>
+          </a:lnRef>
+          <a:fillRef idx="3">
+            <a:schemeClr val="accent1"/>
+          </a:fillRef>
+          <a:effectRef idx="2">
+            <a:schemeClr val="accent1"/>
+          </a:effectRef>
+          <a:fontRef idx="minor">
+            <a:schemeClr val="lt1"/>
+          </a:fontRef>
+        </p:style>
+        <p:txBody>
+          <a:bodyPr rtlCol="0" anchor="ctr"/>
+          <a:lstStyle/>
+          <a:p>
+            <a:pPr algn="ctr"/>
+          </a:p>
+        </p:txBody>
+      </p:sp>
+      <p:sp>
+        <p:nvSpPr>
+          <p:cNvPr id="38" name="TextBox 37"/>
+          <p:cNvSpPr txBox="1"/>
+          <p:nvPr/>
+        </p:nvSpPr>
+        <p:spPr>
+          <a:xfrm>
+            <a:off x="8823960" y="2779776"/>
+            <a:ext cx="1371600" cy="292608"/>
+          </a:xfrm>
+          <a:prstGeom prst="rect">
+            <a:avLst/>
+          </a:prstGeom>
+          <a:noFill/>
+        </p:spPr>
+        <p:txBody>
+          <a:bodyPr wrap="square" anchor="ctr">
+            <a:spAutoFit/>
+          </a:bodyPr>
+          <a:lstStyle/>
+          <a:p>
+            <a:pPr algn="ctr"/>
+            <a:r>
+              <a:rPr sz="1150" b="0" i="0">
+                <a:solidFill>
+                  <a:srgbClr val="2A2A2A"/>
+                </a:solidFill>
+              </a:rPr>
+              <a:t>0</a:t>
+            </a:r>
+          </a:p>
+        </p:txBody>
+      </p:sp>
+      <p:sp>
+        <p:nvSpPr>
+          <p:cNvPr id="39" name="Rectangle 38"/>
+          <p:cNvSpPr/>
+          <p:nvPr/>
+        </p:nvSpPr>
+        <p:spPr>
+          <a:xfrm>
+            <a:off x="365760" y="3136392"/>
+            <a:ext cx="3931920" cy="365760"/>
+          </a:xfrm>
+          <a:prstGeom prst="rect">
+            <a:avLst/>
+          </a:prstGeom>
+          <a:solidFill>
+            <a:srgbClr val="E8ECF0"/>
+          </a:solidFill>
+          <a:ln w="12700">
+            <a:solidFill>
+              <a:srgbClr val="D5D9DD"/>
+            </a:solidFill>
+          </a:ln>
+        </p:spPr>
+        <p:style>
+          <a:lnRef idx="1">
+            <a:schemeClr val="accent1"/>
+          </a:lnRef>
+          <a:fillRef idx="3">
+            <a:schemeClr val="accent1"/>
+          </a:fillRef>
+          <a:effectRef idx="2">
+            <a:schemeClr val="accent1"/>
+          </a:effectRef>
+          <a:fontRef idx="minor">
+            <a:schemeClr val="lt1"/>
+          </a:fontRef>
+        </p:style>
+        <p:txBody>
+          <a:bodyPr rtlCol="0" anchor="ctr"/>
+          <a:lstStyle/>
+          <a:p>
+            <a:pPr algn="ctr"/>
+          </a:p>
+        </p:txBody>
+      </p:sp>
+      <p:sp>
+        <p:nvSpPr>
+          <p:cNvPr id="40" name="TextBox 39"/>
+          <p:cNvSpPr txBox="1"/>
+          <p:nvPr/>
+        </p:nvSpPr>
+        <p:spPr>
+          <a:xfrm>
+            <a:off x="411480" y="3172968"/>
+            <a:ext cx="3840480" cy="292608"/>
+          </a:xfrm>
+          <a:prstGeom prst="rect">
+            <a:avLst/>
+          </a:prstGeom>
+          <a:noFill/>
+        </p:spPr>
+        <p:txBody>
+          <a:bodyPr wrap="square" anchor="ctr">
+            <a:spAutoFit/>
+          </a:bodyPr>
+          <a:lstStyle/>
+          <a:p>
+            <a:pPr algn="ctr"/>
+            <a:r>
+              <a:rPr sz="1150" b="0" i="0">
+                <a:solidFill>
+                  <a:srgbClr val="2A2A2A"/>
+                </a:solidFill>
+              </a:rPr>
+              <a:t>Diğer insan kaynağı</a:t>
+            </a:r>
+          </a:p>
+        </p:txBody>
+      </p:sp>
+      <p:sp>
+        <p:nvSpPr>
+          <p:cNvPr id="41" name="Rectangle 40"/>
+          <p:cNvSpPr/>
+          <p:nvPr/>
+        </p:nvSpPr>
+        <p:spPr>
+          <a:xfrm>
+            <a:off x="4297680" y="3136392"/>
+            <a:ext cx="2651760" cy="365760"/>
+          </a:xfrm>
+          <a:prstGeom prst="rect">
+            <a:avLst/>
+          </a:prstGeom>
+          <a:solidFill>
+            <a:srgbClr val="E8ECF0"/>
+          </a:solidFill>
+          <a:ln w="12700">
+            <a:solidFill>
+              <a:srgbClr val="D5D9DD"/>
+            </a:solidFill>
+          </a:ln>
+        </p:spPr>
+        <p:style>
+          <a:lnRef idx="1">
+            <a:schemeClr val="accent1"/>
+          </a:lnRef>
+          <a:fillRef idx="3">
+            <a:schemeClr val="accent1"/>
+          </a:fillRef>
+          <a:effectRef idx="2">
+            <a:schemeClr val="accent1"/>
+          </a:effectRef>
+          <a:fontRef idx="minor">
+            <a:schemeClr val="lt1"/>
+          </a:fontRef>
+        </p:style>
+        <p:txBody>
+          <a:bodyPr rtlCol="0" anchor="ctr"/>
+          <a:lstStyle/>
+          <a:p>
+            <a:pPr algn="ctr"/>
+          </a:p>
+        </p:txBody>
+      </p:sp>
+      <p:sp>
+        <p:nvSpPr>
+          <p:cNvPr id="42" name="TextBox 41"/>
+          <p:cNvSpPr txBox="1"/>
+          <p:nvPr/>
+        </p:nvSpPr>
+        <p:spPr>
+          <a:xfrm>
+            <a:off x="4343400" y="3172968"/>
+            <a:ext cx="2560320" cy="292608"/>
+          </a:xfrm>
+          <a:prstGeom prst="rect">
+            <a:avLst/>
+          </a:prstGeom>
+          <a:noFill/>
+        </p:spPr>
+        <p:txBody>
+          <a:bodyPr wrap="square" anchor="ctr">
+            <a:spAutoFit/>
+          </a:bodyPr>
+          <a:lstStyle/>
+          <a:p>
+            <a:pPr algn="ctr"/>
+            <a:r>
+              <a:rPr sz="1150" b="0" i="0">
+                <a:solidFill>
+                  <a:srgbClr val="2A2A2A"/>
+                </a:solidFill>
+              </a:rPr>
+              <a:t>İnsan</a:t>
+            </a:r>
+          </a:p>
+        </p:txBody>
+      </p:sp>
+      <p:sp>
+        <p:nvSpPr>
+          <p:cNvPr id="43" name="Rectangle 42"/>
+          <p:cNvSpPr/>
+          <p:nvPr/>
+        </p:nvSpPr>
+        <p:spPr>
+          <a:xfrm>
+            <a:off x="6949440" y="3136392"/>
+            <a:ext cx="1828800" cy="365760"/>
+          </a:xfrm>
+          <a:prstGeom prst="rect">
+            <a:avLst/>
+          </a:prstGeom>
+          <a:solidFill>
+            <a:srgbClr val="E8ECF0"/>
+          </a:solidFill>
+          <a:ln w="12700">
+            <a:solidFill>
+              <a:srgbClr val="D5D9DD"/>
+            </a:solidFill>
+          </a:ln>
+        </p:spPr>
+        <p:style>
+          <a:lnRef idx="1">
+            <a:schemeClr val="accent1"/>
+          </a:lnRef>
+          <a:fillRef idx="3">
+            <a:schemeClr val="accent1"/>
+          </a:fillRef>
+          <a:effectRef idx="2">
+            <a:schemeClr val="accent1"/>
+          </a:effectRef>
+          <a:fontRef idx="minor">
+            <a:schemeClr val="lt1"/>
+          </a:fontRef>
+        </p:style>
+        <p:txBody>
+          <a:bodyPr rtlCol="0" anchor="ctr"/>
+          <a:lstStyle/>
+          <a:p>
+            <a:pPr algn="ctr"/>
+          </a:p>
+        </p:txBody>
+      </p:sp>
+      <p:sp>
+        <p:nvSpPr>
+          <p:cNvPr id="44" name="TextBox 43"/>
+          <p:cNvSpPr txBox="1"/>
+          <p:nvPr/>
+        </p:nvSpPr>
+        <p:spPr>
+          <a:xfrm>
+            <a:off x="6995159" y="3172968"/>
+            <a:ext cx="1737360" cy="292608"/>
+          </a:xfrm>
+          <a:prstGeom prst="rect">
+            <a:avLst/>
+          </a:prstGeom>
+          <a:noFill/>
+        </p:spPr>
+        <p:txBody>
+          <a:bodyPr wrap="square" anchor="ctr">
+            <a:spAutoFit/>
+          </a:bodyPr>
+          <a:lstStyle/>
+          <a:p>
+            <a:pPr algn="ctr"/>
+            <a:r>
+              <a:rPr sz="1150" b="0" i="0">
+                <a:solidFill>
+                  <a:srgbClr val="2A2A2A"/>
+                </a:solidFill>
+              </a:rPr>
+              <a:t>360</a:t>
+            </a:r>
+          </a:p>
+        </p:txBody>
+      </p:sp>
+      <p:sp>
+        <p:nvSpPr>
+          <p:cNvPr id="45" name="Rectangle 44"/>
+          <p:cNvSpPr/>
+          <p:nvPr/>
+        </p:nvSpPr>
+        <p:spPr>
+          <a:xfrm>
+            <a:off x="8778240" y="3136392"/>
+            <a:ext cx="1463040" cy="365760"/>
+          </a:xfrm>
+          <a:prstGeom prst="rect">
+            <a:avLst/>
+          </a:prstGeom>
+          <a:solidFill>
+            <a:srgbClr val="E8ECF0"/>
+          </a:solidFill>
+          <a:ln w="12700">
+            <a:solidFill>
+              <a:srgbClr val="D5D9DD"/>
+            </a:solidFill>
+          </a:ln>
+        </p:spPr>
+        <p:style>
+          <a:lnRef idx="1">
+            <a:schemeClr val="accent1"/>
+          </a:lnRef>
+          <a:fillRef idx="3">
+            <a:schemeClr val="accent1"/>
+          </a:fillRef>
+          <a:effectRef idx="2">
+            <a:schemeClr val="accent1"/>
+          </a:effectRef>
+          <a:fontRef idx="minor">
+            <a:schemeClr val="lt1"/>
+          </a:fontRef>
+        </p:style>
+        <p:txBody>
+          <a:bodyPr rtlCol="0" anchor="ctr"/>
+          <a:lstStyle/>
+          <a:p>
+            <a:pPr algn="ctr"/>
+          </a:p>
+        </p:txBody>
+      </p:sp>
+      <p:sp>
+        <p:nvSpPr>
+          <p:cNvPr id="46" name="TextBox 45"/>
+          <p:cNvSpPr txBox="1"/>
+          <p:nvPr/>
+        </p:nvSpPr>
+        <p:spPr>
+          <a:xfrm>
+            <a:off x="8823960" y="3172968"/>
+            <a:ext cx="1371600" cy="292608"/>
+          </a:xfrm>
+          <a:prstGeom prst="rect">
+            <a:avLst/>
+          </a:prstGeom>
+          <a:noFill/>
+        </p:spPr>
+        <p:txBody>
+          <a:bodyPr wrap="square" anchor="ctr">
+            <a:spAutoFit/>
+          </a:bodyPr>
+          <a:lstStyle/>
+          <a:p>
+            <a:pPr algn="ctr"/>
+            <a:r>
+              <a:rPr sz="1150" b="0" i="0">
+                <a:solidFill>
+                  <a:srgbClr val="2A2A2A"/>
+                </a:solidFill>
+              </a:rPr>
+              <a:t>0</a:t>
+            </a:r>
+          </a:p>
+        </p:txBody>
+      </p:sp>
+      <p:sp>
+        <p:nvSpPr>
+          <p:cNvPr id="47" name="Rectangle 46"/>
+          <p:cNvSpPr/>
+          <p:nvPr/>
+        </p:nvSpPr>
+        <p:spPr>
+          <a:xfrm>
+            <a:off x="365760" y="3529584"/>
+            <a:ext cx="3931920" cy="365760"/>
+          </a:xfrm>
+          <a:prstGeom prst="rect">
+            <a:avLst/>
+          </a:prstGeom>
+          <a:solidFill>
+            <a:srgbClr val="FFFFFF"/>
+          </a:solidFill>
+          <a:ln w="12700">
+            <a:solidFill>
+              <a:srgbClr val="D5D9DD"/>
+            </a:solidFill>
+          </a:ln>
+        </p:spPr>
+        <p:style>
+          <a:lnRef idx="1">
+            <a:schemeClr val="accent1"/>
+          </a:lnRef>
+          <a:fillRef idx="3">
+            <a:schemeClr val="accent1"/>
+          </a:fillRef>
+          <a:effectRef idx="2">
+            <a:schemeClr val="accent1"/>
+          </a:effectRef>
+          <a:fontRef idx="minor">
+            <a:schemeClr val="lt1"/>
+          </a:fontRef>
+        </p:style>
+        <p:txBody>
+          <a:bodyPr rtlCol="0" anchor="ctr"/>
+          <a:lstStyle/>
+          <a:p>
+            <a:pPr algn="ctr"/>
+          </a:p>
+        </p:txBody>
+      </p:sp>
+      <p:sp>
+        <p:nvSpPr>
+          <p:cNvPr id="48" name="TextBox 47"/>
+          <p:cNvSpPr txBox="1"/>
+          <p:nvPr/>
+        </p:nvSpPr>
+        <p:spPr>
+          <a:xfrm>
+            <a:off x="411480" y="3566160"/>
+            <a:ext cx="3840480" cy="292608"/>
+          </a:xfrm>
+          <a:prstGeom prst="rect">
+            <a:avLst/>
+          </a:prstGeom>
+          <a:noFill/>
+        </p:spPr>
+        <p:txBody>
+          <a:bodyPr wrap="square" anchor="ctr">
+            <a:spAutoFit/>
+          </a:bodyPr>
+          <a:lstStyle/>
+          <a:p>
+            <a:pPr algn="ctr"/>
+            <a:r>
+              <a:rPr sz="1150" b="0" i="0">
+                <a:solidFill>
+                  <a:srgbClr val="2A2A2A"/>
+                </a:solidFill>
+              </a:rPr>
+              <a:t>Echoes</a:t>
+            </a:r>
+          </a:p>
+        </p:txBody>
+      </p:sp>
+      <p:sp>
+        <p:nvSpPr>
+          <p:cNvPr id="49" name="Rectangle 48"/>
+          <p:cNvSpPr/>
+          <p:nvPr/>
+        </p:nvSpPr>
+        <p:spPr>
+          <a:xfrm>
+            <a:off x="4297680" y="3529584"/>
+            <a:ext cx="2651760" cy="365760"/>
+          </a:xfrm>
+          <a:prstGeom prst="rect">
+            <a:avLst/>
+          </a:prstGeom>
+          <a:solidFill>
+            <a:srgbClr val="FFFFFF"/>
+          </a:solidFill>
+          <a:ln w="12700">
+            <a:solidFill>
+              <a:srgbClr val="D5D9DD"/>
+            </a:solidFill>
+          </a:ln>
+        </p:spPr>
+        <p:style>
+          <a:lnRef idx="1">
+            <a:schemeClr val="accent1"/>
+          </a:lnRef>
+          <a:fillRef idx="3">
+            <a:schemeClr val="accent1"/>
+          </a:fillRef>
+          <a:effectRef idx="2">
+            <a:schemeClr val="accent1"/>
+          </a:effectRef>
+          <a:fontRef idx="minor">
+            <a:schemeClr val="lt1"/>
+          </a:fontRef>
+        </p:style>
+        <p:txBody>
+          <a:bodyPr rtlCol="0" anchor="ctr"/>
+          <a:lstStyle/>
+          <a:p>
+            <a:pPr algn="ctr"/>
+          </a:p>
+        </p:txBody>
+      </p:sp>
+      <p:sp>
+        <p:nvSpPr>
+          <p:cNvPr id="50" name="TextBox 49"/>
+          <p:cNvSpPr txBox="1"/>
+          <p:nvPr/>
+        </p:nvSpPr>
+        <p:spPr>
+          <a:xfrm>
+            <a:off x="4343400" y="3566160"/>
+            <a:ext cx="2560320" cy="292608"/>
+          </a:xfrm>
+          <a:prstGeom prst="rect">
+            <a:avLst/>
+          </a:prstGeom>
+          <a:noFill/>
+        </p:spPr>
+        <p:txBody>
+          <a:bodyPr wrap="square" anchor="ctr">
+            <a:spAutoFit/>
+          </a:bodyPr>
+          <a:lstStyle/>
+          <a:p>
+            <a:pPr algn="ctr"/>
+            <a:r>
+              <a:rPr sz="1150" b="0" i="0">
+                <a:solidFill>
+                  <a:srgbClr val="2A2A2A"/>
+                </a:solidFill>
+              </a:rPr>
+              <a:t>Yapay zekâ</a:t>
+            </a:r>
+          </a:p>
+        </p:txBody>
+      </p:sp>
+      <p:sp>
+        <p:nvSpPr>
+          <p:cNvPr id="51" name="Rectangle 50"/>
+          <p:cNvSpPr/>
+          <p:nvPr/>
+        </p:nvSpPr>
+        <p:spPr>
+          <a:xfrm>
+            <a:off x="6949440" y="3529584"/>
+            <a:ext cx="1828800" cy="365760"/>
+          </a:xfrm>
+          <a:prstGeom prst="rect">
+            <a:avLst/>
+          </a:prstGeom>
+          <a:solidFill>
+            <a:srgbClr val="FFFFFF"/>
+          </a:solidFill>
+          <a:ln w="12700">
+            <a:solidFill>
+              <a:srgbClr val="D5D9DD"/>
+            </a:solidFill>
+          </a:ln>
+        </p:spPr>
+        <p:style>
+          <a:lnRef idx="1">
+            <a:schemeClr val="accent1"/>
+          </a:lnRef>
+          <a:fillRef idx="3">
+            <a:schemeClr val="accent1"/>
+          </a:fillRef>
+          <a:effectRef idx="2">
+            <a:schemeClr val="accent1"/>
+          </a:effectRef>
+          <a:fontRef idx="minor">
+            <a:schemeClr val="lt1"/>
+          </a:fontRef>
+        </p:style>
+        <p:txBody>
+          <a:bodyPr rtlCol="0" anchor="ctr"/>
+          <a:lstStyle/>
+          <a:p>
+            <a:pPr algn="ctr"/>
+          </a:p>
+        </p:txBody>
+      </p:sp>
+      <p:sp>
+        <p:nvSpPr>
+          <p:cNvPr id="52" name="TextBox 51"/>
+          <p:cNvSpPr txBox="1"/>
+          <p:nvPr/>
+        </p:nvSpPr>
+        <p:spPr>
+          <a:xfrm>
+            <a:off x="6995159" y="3566160"/>
+            <a:ext cx="1737360" cy="292608"/>
+          </a:xfrm>
+          <a:prstGeom prst="rect">
+            <a:avLst/>
+          </a:prstGeom>
+          <a:noFill/>
+        </p:spPr>
+        <p:txBody>
+          <a:bodyPr wrap="square" anchor="ctr">
+            <a:spAutoFit/>
+          </a:bodyPr>
+          <a:lstStyle/>
+          <a:p>
+            <a:pPr algn="ctr"/>
+            <a:r>
+              <a:rPr sz="1150" b="0" i="0">
+                <a:solidFill>
+                  <a:srgbClr val="2A2A2A"/>
+                </a:solidFill>
+              </a:rPr>
+              <a:t>1.128</a:t>
+            </a:r>
+          </a:p>
+        </p:txBody>
+      </p:sp>
+      <p:sp>
+        <p:nvSpPr>
+          <p:cNvPr id="53" name="Rectangle 52"/>
+          <p:cNvSpPr/>
+          <p:nvPr/>
+        </p:nvSpPr>
+        <p:spPr>
+          <a:xfrm>
+            <a:off x="8778240" y="3529584"/>
+            <a:ext cx="1463040" cy="365760"/>
+          </a:xfrm>
+          <a:prstGeom prst="rect">
+            <a:avLst/>
+          </a:prstGeom>
+          <a:solidFill>
+            <a:srgbClr val="FFFFFF"/>
+          </a:solidFill>
+          <a:ln w="12700">
+            <a:solidFill>
+              <a:srgbClr val="D5D9DD"/>
+            </a:solidFill>
+          </a:ln>
+        </p:spPr>
+        <p:style>
+          <a:lnRef idx="1">
+            <a:schemeClr val="accent1"/>
+          </a:lnRef>
+          <a:fillRef idx="3">
+            <a:schemeClr val="accent1"/>
+          </a:fillRef>
+          <a:effectRef idx="2">
+            <a:schemeClr val="accent1"/>
+          </a:effectRef>
+          <a:fontRef idx="minor">
+            <a:schemeClr val="lt1"/>
+          </a:fontRef>
+        </p:style>
+        <p:txBody>
+          <a:bodyPr rtlCol="0" anchor="ctr"/>
+          <a:lstStyle/>
+          <a:p>
+            <a:pPr algn="ctr"/>
+          </a:p>
+        </p:txBody>
+      </p:sp>
+      <p:sp>
+        <p:nvSpPr>
+          <p:cNvPr id="54" name="TextBox 53"/>
+          <p:cNvSpPr txBox="1"/>
+          <p:nvPr/>
+        </p:nvSpPr>
+        <p:spPr>
+          <a:xfrm>
+            <a:off x="8823960" y="3566160"/>
+            <a:ext cx="1371600" cy="292608"/>
+          </a:xfrm>
+          <a:prstGeom prst="rect">
+            <a:avLst/>
+          </a:prstGeom>
+          <a:noFill/>
+        </p:spPr>
+        <p:txBody>
+          <a:bodyPr wrap="square" anchor="ctr">
+            <a:spAutoFit/>
+          </a:bodyPr>
+          <a:lstStyle/>
+          <a:p>
+            <a:pPr algn="ctr"/>
+            <a:r>
+              <a:rPr sz="1150" b="0" i="0">
+                <a:solidFill>
+                  <a:srgbClr val="2A2A2A"/>
+                </a:solidFill>
+              </a:rPr>
+              <a:t>1</a:t>
+            </a:r>
+          </a:p>
+        </p:txBody>
+      </p:sp>
+      <p:sp>
+        <p:nvSpPr>
+          <p:cNvPr id="55" name="Rectangle 54"/>
+          <p:cNvSpPr/>
+          <p:nvPr/>
+        </p:nvSpPr>
+        <p:spPr>
+          <a:xfrm>
+            <a:off x="365760" y="3922776"/>
+            <a:ext cx="3931920" cy="365760"/>
+          </a:xfrm>
+          <a:prstGeom prst="rect">
+            <a:avLst/>
+          </a:prstGeom>
+          <a:solidFill>
+            <a:srgbClr val="E8ECF0"/>
+          </a:solidFill>
+          <a:ln w="12700">
+            <a:solidFill>
+              <a:srgbClr val="D5D9DD"/>
+            </a:solidFill>
+          </a:ln>
+        </p:spPr>
+        <p:style>
+          <a:lnRef idx="1">
+            <a:schemeClr val="accent1"/>
+          </a:lnRef>
+          <a:fillRef idx="3">
+            <a:schemeClr val="accent1"/>
+          </a:fillRef>
+          <a:effectRef idx="2">
+            <a:schemeClr val="accent1"/>
+          </a:effectRef>
+          <a:fontRef idx="minor">
+            <a:schemeClr val="lt1"/>
+          </a:fontRef>
+        </p:style>
+        <p:txBody>
+          <a:bodyPr rtlCol="0" anchor="ctr"/>
+          <a:lstStyle/>
+          <a:p>
+            <a:pPr algn="ctr"/>
+          </a:p>
+        </p:txBody>
+      </p:sp>
+      <p:sp>
+        <p:nvSpPr>
+          <p:cNvPr id="56" name="TextBox 55"/>
+          <p:cNvSpPr txBox="1"/>
+          <p:nvPr/>
+        </p:nvSpPr>
+        <p:spPr>
+          <a:xfrm>
+            <a:off x="411480" y="3959352"/>
+            <a:ext cx="3840480" cy="292608"/>
+          </a:xfrm>
+          <a:prstGeom prst="rect">
+            <a:avLst/>
+          </a:prstGeom>
+          <a:noFill/>
+        </p:spPr>
+        <p:txBody>
+          <a:bodyPr wrap="square" anchor="ctr">
+            <a:spAutoFit/>
+          </a:bodyPr>
+          <a:lstStyle/>
+          <a:p>
+            <a:pPr algn="ctr"/>
+            <a:r>
+              <a:rPr sz="1150" b="0" i="0">
+                <a:solidFill>
+                  <a:srgbClr val="2A2A2A"/>
+                </a:solidFill>
+              </a:rPr>
+              <a:t>Suno (v3-v5)</a:t>
+            </a:r>
+          </a:p>
+        </p:txBody>
+      </p:sp>
+      <p:sp>
+        <p:nvSpPr>
+          <p:cNvPr id="57" name="Rectangle 56"/>
+          <p:cNvSpPr/>
+          <p:nvPr/>
+        </p:nvSpPr>
+        <p:spPr>
+          <a:xfrm>
+            <a:off x="4297680" y="3922776"/>
+            <a:ext cx="2651760" cy="365760"/>
+          </a:xfrm>
+          <a:prstGeom prst="rect">
+            <a:avLst/>
+          </a:prstGeom>
+          <a:solidFill>
+            <a:srgbClr val="E8ECF0"/>
+          </a:solidFill>
+          <a:ln w="12700">
+            <a:solidFill>
+              <a:srgbClr val="D5D9DD"/>
+            </a:solidFill>
+          </a:ln>
+        </p:spPr>
+        <p:style>
+          <a:lnRef idx="1">
+            <a:schemeClr val="accent1"/>
+          </a:lnRef>
+          <a:fillRef idx="3">
+            <a:schemeClr val="accent1"/>
+          </a:fillRef>
+          <a:effectRef idx="2">
+            <a:schemeClr val="accent1"/>
+          </a:effectRef>
+          <a:fontRef idx="minor">
+            <a:schemeClr val="lt1"/>
+          </a:fontRef>
+        </p:style>
+        <p:txBody>
+          <a:bodyPr rtlCol="0" anchor="ctr"/>
+          <a:lstStyle/>
+          <a:p>
+            <a:pPr algn="ctr"/>
+          </a:p>
+        </p:txBody>
+      </p:sp>
+      <p:sp>
+        <p:nvSpPr>
+          <p:cNvPr id="58" name="TextBox 57"/>
+          <p:cNvSpPr txBox="1"/>
+          <p:nvPr/>
+        </p:nvSpPr>
+        <p:spPr>
+          <a:xfrm>
+            <a:off x="4343400" y="3959352"/>
+            <a:ext cx="2560320" cy="292608"/>
+          </a:xfrm>
+          <a:prstGeom prst="rect">
+            <a:avLst/>
+          </a:prstGeom>
+          <a:noFill/>
+        </p:spPr>
+        <p:txBody>
+          <a:bodyPr wrap="square" anchor="ctr">
+            <a:spAutoFit/>
+          </a:bodyPr>
+          <a:lstStyle/>
+          <a:p>
+            <a:pPr algn="ctr"/>
+            <a:r>
+              <a:rPr sz="1150" b="0" i="0">
+                <a:solidFill>
+                  <a:srgbClr val="2A2A2A"/>
+                </a:solidFill>
+              </a:rPr>
+              <a:t>Yapay zekâ</a:t>
+            </a:r>
+          </a:p>
+        </p:txBody>
+      </p:sp>
+      <p:sp>
+        <p:nvSpPr>
+          <p:cNvPr id="59" name="Rectangle 58"/>
+          <p:cNvSpPr/>
+          <p:nvPr/>
+        </p:nvSpPr>
+        <p:spPr>
+          <a:xfrm>
+            <a:off x="6949440" y="3922776"/>
+            <a:ext cx="1828800" cy="365760"/>
+          </a:xfrm>
+          <a:prstGeom prst="rect">
+            <a:avLst/>
+          </a:prstGeom>
+          <a:solidFill>
+            <a:srgbClr val="E8ECF0"/>
+          </a:solidFill>
+          <a:ln w="12700">
+            <a:solidFill>
+              <a:srgbClr val="D5D9DD"/>
+            </a:solidFill>
+          </a:ln>
+        </p:spPr>
+        <p:style>
+          <a:lnRef idx="1">
+            <a:schemeClr val="accent1"/>
+          </a:lnRef>
+          <a:fillRef idx="3">
+            <a:schemeClr val="accent1"/>
+          </a:fillRef>
+          <a:effectRef idx="2">
+            <a:schemeClr val="accent1"/>
+          </a:effectRef>
+          <a:fontRef idx="minor">
+            <a:schemeClr val="lt1"/>
+          </a:fontRef>
+        </p:style>
+        <p:txBody>
+          <a:bodyPr rtlCol="0" anchor="ctr"/>
+          <a:lstStyle/>
+          <a:p>
+            <a:pPr algn="ctr"/>
+          </a:p>
+        </p:txBody>
+      </p:sp>
+      <p:sp>
+        <p:nvSpPr>
+          <p:cNvPr id="60" name="TextBox 59"/>
+          <p:cNvSpPr txBox="1"/>
+          <p:nvPr/>
+        </p:nvSpPr>
+        <p:spPr>
+          <a:xfrm>
+            <a:off x="6995159" y="3959352"/>
+            <a:ext cx="1737360" cy="292608"/>
+          </a:xfrm>
+          <a:prstGeom prst="rect">
+            <a:avLst/>
+          </a:prstGeom>
+          <a:noFill/>
+        </p:spPr>
+        <p:txBody>
+          <a:bodyPr wrap="square" anchor="ctr">
+            <a:spAutoFit/>
+          </a:bodyPr>
+          <a:lstStyle/>
+          <a:p>
+            <a:pPr algn="ctr"/>
+            <a:r>
+              <a:rPr sz="1150" b="0" i="0">
+                <a:solidFill>
+                  <a:srgbClr val="2A2A2A"/>
+                </a:solidFill>
+              </a:rPr>
+              <a:t>500</a:t>
+            </a:r>
+          </a:p>
+        </p:txBody>
+      </p:sp>
+      <p:sp>
+        <p:nvSpPr>
+          <p:cNvPr id="61" name="Rectangle 60"/>
+          <p:cNvSpPr/>
+          <p:nvPr/>
+        </p:nvSpPr>
+        <p:spPr>
+          <a:xfrm>
+            <a:off x="8778240" y="3922776"/>
+            <a:ext cx="1463040" cy="365760"/>
+          </a:xfrm>
+          <a:prstGeom prst="rect">
+            <a:avLst/>
+          </a:prstGeom>
+          <a:solidFill>
+            <a:srgbClr val="E8ECF0"/>
+          </a:solidFill>
+          <a:ln w="12700">
+            <a:solidFill>
+              <a:srgbClr val="D5D9DD"/>
+            </a:solidFill>
+          </a:ln>
+        </p:spPr>
+        <p:style>
+          <a:lnRef idx="1">
+            <a:schemeClr val="accent1"/>
+          </a:lnRef>
+          <a:fillRef idx="3">
+            <a:schemeClr val="accent1"/>
+          </a:fillRef>
+          <a:effectRef idx="2">
+            <a:schemeClr val="accent1"/>
+          </a:effectRef>
+          <a:fontRef idx="minor">
+            <a:schemeClr val="lt1"/>
+          </a:fontRef>
+        </p:style>
+        <p:txBody>
+          <a:bodyPr rtlCol="0" anchor="ctr"/>
+          <a:lstStyle/>
+          <a:p>
+            <a:pPr algn="ctr"/>
+          </a:p>
+        </p:txBody>
+      </p:sp>
+      <p:sp>
+        <p:nvSpPr>
+          <p:cNvPr id="62" name="TextBox 61"/>
+          <p:cNvSpPr txBox="1"/>
+          <p:nvPr/>
+        </p:nvSpPr>
+        <p:spPr>
+          <a:xfrm>
+            <a:off x="8823960" y="3959352"/>
+            <a:ext cx="1371600" cy="292608"/>
+          </a:xfrm>
+          <a:prstGeom prst="rect">
+            <a:avLst/>
+          </a:prstGeom>
+          <a:noFill/>
+        </p:spPr>
+        <p:txBody>
+          <a:bodyPr wrap="square" anchor="ctr">
+            <a:spAutoFit/>
+          </a:bodyPr>
+          <a:lstStyle/>
+          <a:p>
+            <a:pPr algn="ctr"/>
+            <a:r>
+              <a:rPr sz="1150" b="0" i="0">
+                <a:solidFill>
+                  <a:srgbClr val="2A2A2A"/>
+                </a:solidFill>
+              </a:rPr>
+              <a:t>1</a:t>
+            </a:r>
+          </a:p>
+        </p:txBody>
+      </p:sp>
+      <p:sp>
+        <p:nvSpPr>
+          <p:cNvPr id="63" name="Rectangle 62"/>
+          <p:cNvSpPr/>
+          <p:nvPr/>
+        </p:nvSpPr>
+        <p:spPr>
+          <a:xfrm>
+            <a:off x="365760" y="4315968"/>
+            <a:ext cx="3931920" cy="365760"/>
+          </a:xfrm>
+          <a:prstGeom prst="rect">
+            <a:avLst/>
+          </a:prstGeom>
+          <a:solidFill>
+            <a:srgbClr val="FFFFFF"/>
+          </a:solidFill>
+          <a:ln w="12700">
+            <a:solidFill>
+              <a:srgbClr val="D5D9DD"/>
+            </a:solidFill>
+          </a:ln>
+        </p:spPr>
+        <p:style>
+          <a:lnRef idx="1">
+            <a:schemeClr val="accent1"/>
+          </a:lnRef>
+          <a:fillRef idx="3">
+            <a:schemeClr val="accent1"/>
+          </a:fillRef>
+          <a:effectRef idx="2">
+            <a:schemeClr val="accent1"/>
+          </a:effectRef>
+          <a:fontRef idx="minor">
+            <a:schemeClr val="lt1"/>
+          </a:fontRef>
+        </p:style>
+        <p:txBody>
+          <a:bodyPr rtlCol="0" anchor="ctr"/>
+          <a:lstStyle/>
+          <a:p>
+            <a:pPr algn="ctr"/>
+          </a:p>
+        </p:txBody>
+      </p:sp>
+      <p:sp>
+        <p:nvSpPr>
+          <p:cNvPr id="64" name="TextBox 63"/>
+          <p:cNvSpPr txBox="1"/>
+          <p:nvPr/>
+        </p:nvSpPr>
+        <p:spPr>
+          <a:xfrm>
+            <a:off x="411480" y="4352544"/>
+            <a:ext cx="3840480" cy="292608"/>
+          </a:xfrm>
+          <a:prstGeom prst="rect">
+            <a:avLst/>
+          </a:prstGeom>
+          <a:noFill/>
+        </p:spPr>
+        <p:txBody>
+          <a:bodyPr wrap="square" anchor="ctr">
+            <a:spAutoFit/>
+          </a:bodyPr>
+          <a:lstStyle/>
+          <a:p>
+            <a:pPr algn="ctr"/>
+            <a:r>
+              <a:rPr sz="1150" b="0" i="0">
+                <a:solidFill>
+                  <a:srgbClr val="2A2A2A"/>
+                </a:solidFill>
+              </a:rPr>
+              <a:t>Deepfake seti</a:t>
+            </a:r>
+          </a:p>
+        </p:txBody>
+      </p:sp>
+      <p:sp>
+        <p:nvSpPr>
+          <p:cNvPr id="65" name="Rectangle 64"/>
+          <p:cNvSpPr/>
+          <p:nvPr/>
+        </p:nvSpPr>
+        <p:spPr>
+          <a:xfrm>
+            <a:off x="4297680" y="4315968"/>
+            <a:ext cx="2651760" cy="365760"/>
+          </a:xfrm>
+          <a:prstGeom prst="rect">
+            <a:avLst/>
+          </a:prstGeom>
+          <a:solidFill>
+            <a:srgbClr val="FFFFFF"/>
+          </a:solidFill>
+          <a:ln w="12700">
+            <a:solidFill>
+              <a:srgbClr val="D5D9DD"/>
+            </a:solidFill>
+          </a:ln>
+        </p:spPr>
+        <p:style>
+          <a:lnRef idx="1">
+            <a:schemeClr val="accent1"/>
+          </a:lnRef>
+          <a:fillRef idx="3">
+            <a:schemeClr val="accent1"/>
+          </a:fillRef>
+          <a:effectRef idx="2">
+            <a:schemeClr val="accent1"/>
+          </a:effectRef>
+          <a:fontRef idx="minor">
+            <a:schemeClr val="lt1"/>
+          </a:fontRef>
+        </p:style>
+        <p:txBody>
+          <a:bodyPr rtlCol="0" anchor="ctr"/>
+          <a:lstStyle/>
+          <a:p>
+            <a:pPr algn="ctr"/>
+          </a:p>
+        </p:txBody>
+      </p:sp>
+      <p:sp>
+        <p:nvSpPr>
+          <p:cNvPr id="66" name="TextBox 65"/>
+          <p:cNvSpPr txBox="1"/>
+          <p:nvPr/>
+        </p:nvSpPr>
+        <p:spPr>
+          <a:xfrm>
+            <a:off x="4343400" y="4352544"/>
+            <a:ext cx="2560320" cy="292608"/>
+          </a:xfrm>
+          <a:prstGeom prst="rect">
+            <a:avLst/>
+          </a:prstGeom>
+          <a:noFill/>
+        </p:spPr>
+        <p:txBody>
+          <a:bodyPr wrap="square" anchor="ctr">
+            <a:spAutoFit/>
+          </a:bodyPr>
+          <a:lstStyle/>
+          <a:p>
+            <a:pPr algn="ctr"/>
+            <a:r>
+              <a:rPr sz="1150" b="0" i="0">
+                <a:solidFill>
+                  <a:srgbClr val="2A2A2A"/>
+                </a:solidFill>
+              </a:rPr>
+              <a:t>Yapay zekâ</a:t>
+            </a:r>
+          </a:p>
+        </p:txBody>
+      </p:sp>
+      <p:sp>
+        <p:nvSpPr>
+          <p:cNvPr id="67" name="Rectangle 66"/>
+          <p:cNvSpPr/>
+          <p:nvPr/>
+        </p:nvSpPr>
+        <p:spPr>
+          <a:xfrm>
+            <a:off x="6949440" y="4315968"/>
+            <a:ext cx="1828800" cy="365760"/>
+          </a:xfrm>
+          <a:prstGeom prst="rect">
+            <a:avLst/>
+          </a:prstGeom>
+          <a:solidFill>
+            <a:srgbClr val="FFFFFF"/>
+          </a:solidFill>
+          <a:ln w="12700">
+            <a:solidFill>
+              <a:srgbClr val="D5D9DD"/>
+            </a:solidFill>
+          </a:ln>
+        </p:spPr>
+        <p:style>
+          <a:lnRef idx="1">
+            <a:schemeClr val="accent1"/>
+          </a:lnRef>
+          <a:fillRef idx="3">
+            <a:schemeClr val="accent1"/>
+          </a:fillRef>
+          <a:effectRef idx="2">
+            <a:schemeClr val="accent1"/>
+          </a:effectRef>
+          <a:fontRef idx="minor">
+            <a:schemeClr val="lt1"/>
+          </a:fontRef>
+        </p:style>
+        <p:txBody>
+          <a:bodyPr rtlCol="0" anchor="ctr"/>
+          <a:lstStyle/>
+          <a:p>
+            <a:pPr algn="ctr"/>
+          </a:p>
+        </p:txBody>
+      </p:sp>
+      <p:sp>
+        <p:nvSpPr>
+          <p:cNvPr id="68" name="TextBox 67"/>
+          <p:cNvSpPr txBox="1"/>
+          <p:nvPr/>
+        </p:nvSpPr>
+        <p:spPr>
+          <a:xfrm>
+            <a:off x="6995159" y="4352544"/>
+            <a:ext cx="1737360" cy="292608"/>
+          </a:xfrm>
+          <a:prstGeom prst="rect">
+            <a:avLst/>
+          </a:prstGeom>
+          <a:noFill/>
+        </p:spPr>
+        <p:txBody>
+          <a:bodyPr wrap="square" anchor="ctr">
+            <a:spAutoFit/>
+          </a:bodyPr>
+          <a:lstStyle/>
+          <a:p>
+            <a:pPr algn="ctr"/>
+            <a:r>
+              <a:rPr sz="1150" b="0" i="0">
+                <a:solidFill>
+                  <a:srgbClr val="2A2A2A"/>
+                </a:solidFill>
+              </a:rPr>
+              <a:t>492</a:t>
+            </a:r>
+          </a:p>
+        </p:txBody>
+      </p:sp>
+      <p:sp>
+        <p:nvSpPr>
+          <p:cNvPr id="69" name="Rectangle 68"/>
+          <p:cNvSpPr/>
+          <p:nvPr/>
+        </p:nvSpPr>
+        <p:spPr>
+          <a:xfrm>
+            <a:off x="8778240" y="4315968"/>
+            <a:ext cx="1463040" cy="365760"/>
+          </a:xfrm>
+          <a:prstGeom prst="rect">
+            <a:avLst/>
+          </a:prstGeom>
+          <a:solidFill>
+            <a:srgbClr val="FFFFFF"/>
+          </a:solidFill>
+          <a:ln w="12700">
+            <a:solidFill>
+              <a:srgbClr val="D5D9DD"/>
+            </a:solidFill>
+          </a:ln>
+        </p:spPr>
+        <p:style>
+          <a:lnRef idx="1">
+            <a:schemeClr val="accent1"/>
+          </a:lnRef>
+          <a:fillRef idx="3">
+            <a:schemeClr val="accent1"/>
+          </a:fillRef>
+          <a:effectRef idx="2">
+            <a:schemeClr val="accent1"/>
+          </a:effectRef>
+          <a:fontRef idx="minor">
+            <a:schemeClr val="lt1"/>
+          </a:fontRef>
+        </p:style>
+        <p:txBody>
+          <a:bodyPr rtlCol="0" anchor="ctr"/>
+          <a:lstStyle/>
+          <a:p>
+            <a:pPr algn="ctr"/>
+          </a:p>
+        </p:txBody>
+      </p:sp>
+      <p:sp>
+        <p:nvSpPr>
+          <p:cNvPr id="70" name="TextBox 69"/>
+          <p:cNvSpPr txBox="1"/>
+          <p:nvPr/>
+        </p:nvSpPr>
+        <p:spPr>
+          <a:xfrm>
+            <a:off x="8823960" y="4352544"/>
+            <a:ext cx="1371600" cy="292608"/>
+          </a:xfrm>
+          <a:prstGeom prst="rect">
+            <a:avLst/>
+          </a:prstGeom>
+          <a:noFill/>
+        </p:spPr>
+        <p:txBody>
+          <a:bodyPr wrap="square" anchor="ctr">
+            <a:spAutoFit/>
+          </a:bodyPr>
+          <a:lstStyle/>
+          <a:p>
+            <a:pPr algn="ctr"/>
+            <a:r>
+              <a:rPr sz="1150" b="0" i="0">
+                <a:solidFill>
+                  <a:srgbClr val="2A2A2A"/>
+                </a:solidFill>
+              </a:rPr>
+              <a:t>1</a:t>
+            </a:r>
+          </a:p>
+        </p:txBody>
+      </p:sp>
+      <p:sp>
+        <p:nvSpPr>
+          <p:cNvPr id="71" name="Rectangle 70"/>
+          <p:cNvSpPr/>
+          <p:nvPr/>
+        </p:nvSpPr>
+        <p:spPr>
+          <a:xfrm>
+            <a:off x="365760" y="4709160"/>
+            <a:ext cx="3931920" cy="365760"/>
+          </a:xfrm>
+          <a:prstGeom prst="rect">
+            <a:avLst/>
+          </a:prstGeom>
+          <a:solidFill>
+            <a:srgbClr val="E8ECF0"/>
+          </a:solidFill>
+          <a:ln w="12700">
+            <a:solidFill>
+              <a:srgbClr val="D5D9DD"/>
+            </a:solidFill>
+          </a:ln>
+        </p:spPr>
+        <p:style>
+          <a:lnRef idx="1">
+            <a:schemeClr val="accent1"/>
+          </a:lnRef>
+          <a:fillRef idx="3">
+            <a:schemeClr val="accent1"/>
+          </a:fillRef>
+          <a:effectRef idx="2">
+            <a:schemeClr val="accent1"/>
+          </a:effectRef>
+          <a:fontRef idx="minor">
+            <a:schemeClr val="lt1"/>
+          </a:fontRef>
+        </p:style>
+        <p:txBody>
+          <a:bodyPr rtlCol="0" anchor="ctr"/>
+          <a:lstStyle/>
+          <a:p>
+            <a:pPr algn="ctr"/>
+          </a:p>
+        </p:txBody>
+      </p:sp>
+      <p:sp>
+        <p:nvSpPr>
+          <p:cNvPr id="72" name="TextBox 71"/>
+          <p:cNvSpPr txBox="1"/>
+          <p:nvPr/>
+        </p:nvSpPr>
+        <p:spPr>
+          <a:xfrm>
+            <a:off x="411480" y="4745736"/>
+            <a:ext cx="3840480" cy="292608"/>
+          </a:xfrm>
+          <a:prstGeom prst="rect">
+            <a:avLst/>
+          </a:prstGeom>
+          <a:noFill/>
+        </p:spPr>
+        <p:txBody>
+          <a:bodyPr wrap="square" anchor="ctr">
+            <a:spAutoFit/>
+          </a:bodyPr>
+          <a:lstStyle/>
+          <a:p>
+            <a:pPr algn="ctr"/>
+            <a:r>
+              <a:rPr sz="1150" b="0" i="0">
+                <a:solidFill>
+                  <a:srgbClr val="2A2A2A"/>
+                </a:solidFill>
+              </a:rPr>
+              <a:t>AImE/Mustango/JEN-1</a:t>
+            </a:r>
+          </a:p>
+        </p:txBody>
+      </p:sp>
+      <p:sp>
+        <p:nvSpPr>
+          <p:cNvPr id="73" name="Rectangle 72"/>
+          <p:cNvSpPr/>
+          <p:nvPr/>
+        </p:nvSpPr>
+        <p:spPr>
+          <a:xfrm>
+            <a:off x="4297680" y="4709160"/>
+            <a:ext cx="2651760" cy="365760"/>
+          </a:xfrm>
+          <a:prstGeom prst="rect">
+            <a:avLst/>
+          </a:prstGeom>
+          <a:solidFill>
+            <a:srgbClr val="E8ECF0"/>
+          </a:solidFill>
+          <a:ln w="12700">
+            <a:solidFill>
+              <a:srgbClr val="D5D9DD"/>
+            </a:solidFill>
+          </a:ln>
+        </p:spPr>
+        <p:style>
+          <a:lnRef idx="1">
+            <a:schemeClr val="accent1"/>
+          </a:lnRef>
+          <a:fillRef idx="3">
+            <a:schemeClr val="accent1"/>
+          </a:fillRef>
+          <a:effectRef idx="2">
+            <a:schemeClr val="accent1"/>
+          </a:effectRef>
+          <a:fontRef idx="minor">
+            <a:schemeClr val="lt1"/>
+          </a:fontRef>
+        </p:style>
+        <p:txBody>
+          <a:bodyPr rtlCol="0" anchor="ctr"/>
+          <a:lstStyle/>
+          <a:p>
+            <a:pPr algn="ctr"/>
+          </a:p>
+        </p:txBody>
+      </p:sp>
+      <p:sp>
+        <p:nvSpPr>
+          <p:cNvPr id="74" name="TextBox 73"/>
+          <p:cNvSpPr txBox="1"/>
+          <p:nvPr/>
+        </p:nvSpPr>
+        <p:spPr>
+          <a:xfrm>
+            <a:off x="4343400" y="4745736"/>
+            <a:ext cx="2560320" cy="292608"/>
+          </a:xfrm>
+          <a:prstGeom prst="rect">
+            <a:avLst/>
+          </a:prstGeom>
+          <a:noFill/>
+        </p:spPr>
+        <p:txBody>
+          <a:bodyPr wrap="square" anchor="ctr">
+            <a:spAutoFit/>
+          </a:bodyPr>
+          <a:lstStyle/>
+          <a:p>
+            <a:pPr algn="ctr"/>
+            <a:r>
+              <a:rPr sz="1150" b="0" i="0">
+                <a:solidFill>
+                  <a:srgbClr val="2A2A2A"/>
+                </a:solidFill>
+              </a:rPr>
+              <a:t>Yapay zekâ</a:t>
+            </a:r>
+          </a:p>
+        </p:txBody>
+      </p:sp>
+      <p:sp>
+        <p:nvSpPr>
+          <p:cNvPr id="75" name="Rectangle 74"/>
+          <p:cNvSpPr/>
+          <p:nvPr/>
+        </p:nvSpPr>
+        <p:spPr>
+          <a:xfrm>
+            <a:off x="6949440" y="4709160"/>
+            <a:ext cx="1828800" cy="365760"/>
+          </a:xfrm>
+          <a:prstGeom prst="rect">
+            <a:avLst/>
+          </a:prstGeom>
+          <a:solidFill>
+            <a:srgbClr val="E8ECF0"/>
+          </a:solidFill>
+          <a:ln w="12700">
+            <a:solidFill>
+              <a:srgbClr val="D5D9DD"/>
+            </a:solidFill>
+          </a:ln>
+        </p:spPr>
+        <p:style>
+          <a:lnRef idx="1">
+            <a:schemeClr val="accent1"/>
+          </a:lnRef>
+          <a:fillRef idx="3">
+            <a:schemeClr val="accent1"/>
+          </a:fillRef>
+          <a:effectRef idx="2">
+            <a:schemeClr val="accent1"/>
+          </a:effectRef>
+          <a:fontRef idx="minor">
+            <a:schemeClr val="lt1"/>
+          </a:fontRef>
+        </p:style>
+        <p:txBody>
+          <a:bodyPr rtlCol="0" anchor="ctr"/>
+          <a:lstStyle/>
+          <a:p>
+            <a:pPr algn="ctr"/>
+          </a:p>
+        </p:txBody>
+      </p:sp>
+      <p:sp>
+        <p:nvSpPr>
+          <p:cNvPr id="76" name="TextBox 75"/>
+          <p:cNvSpPr txBox="1"/>
+          <p:nvPr/>
+        </p:nvSpPr>
+        <p:spPr>
+          <a:xfrm>
+            <a:off x="6995159" y="4745736"/>
+            <a:ext cx="1737360" cy="292608"/>
+          </a:xfrm>
+          <a:prstGeom prst="rect">
+            <a:avLst/>
+          </a:prstGeom>
+          <a:noFill/>
+        </p:spPr>
+        <p:txBody>
+          <a:bodyPr wrap="square" anchor="ctr">
+            <a:spAutoFit/>
+          </a:bodyPr>
+          <a:lstStyle/>
+          <a:p>
+            <a:pPr algn="ctr"/>
+            <a:r>
+              <a:rPr sz="1150" b="0" i="0">
+                <a:solidFill>
+                  <a:srgbClr val="2A2A2A"/>
+                </a:solidFill>
+              </a:rPr>
+              <a:t>204</a:t>
+            </a:r>
+          </a:p>
+        </p:txBody>
+      </p:sp>
+      <p:sp>
+        <p:nvSpPr>
+          <p:cNvPr id="77" name="Rectangle 76"/>
+          <p:cNvSpPr/>
+          <p:nvPr/>
+        </p:nvSpPr>
+        <p:spPr>
+          <a:xfrm>
+            <a:off x="8778240" y="4709160"/>
+            <a:ext cx="1463040" cy="365760"/>
+          </a:xfrm>
+          <a:prstGeom prst="rect">
+            <a:avLst/>
+          </a:prstGeom>
+          <a:solidFill>
+            <a:srgbClr val="E8ECF0"/>
+          </a:solidFill>
+          <a:ln w="12700">
+            <a:solidFill>
+              <a:srgbClr val="D5D9DD"/>
+            </a:solidFill>
+          </a:ln>
+        </p:spPr>
+        <p:style>
+          <a:lnRef idx="1">
+            <a:schemeClr val="accent1"/>
+          </a:lnRef>
+          <a:fillRef idx="3">
+            <a:schemeClr val="accent1"/>
+          </a:fillRef>
+          <a:effectRef idx="2">
+            <a:schemeClr val="accent1"/>
+          </a:effectRef>
+          <a:fontRef idx="minor">
+            <a:schemeClr val="lt1"/>
+          </a:fontRef>
+        </p:style>
+        <p:txBody>
+          <a:bodyPr rtlCol="0" anchor="ctr"/>
+          <a:lstStyle/>
+          <a:p>
+            <a:pPr algn="ctr"/>
+          </a:p>
+        </p:txBody>
+      </p:sp>
+      <p:sp>
+        <p:nvSpPr>
+          <p:cNvPr id="78" name="TextBox 77"/>
+          <p:cNvSpPr txBox="1"/>
+          <p:nvPr/>
+        </p:nvSpPr>
+        <p:spPr>
+          <a:xfrm>
+            <a:off x="8823960" y="4745736"/>
+            <a:ext cx="1371600" cy="292608"/>
+          </a:xfrm>
+          <a:prstGeom prst="rect">
+            <a:avLst/>
+          </a:prstGeom>
+          <a:noFill/>
+        </p:spPr>
+        <p:txBody>
+          <a:bodyPr wrap="square" anchor="ctr">
+            <a:spAutoFit/>
+          </a:bodyPr>
+          <a:lstStyle/>
+          <a:p>
+            <a:pPr algn="ctr"/>
+            <a:r>
+              <a:rPr sz="1150" b="0" i="0">
+                <a:solidFill>
+                  <a:srgbClr val="2A2A2A"/>
+                </a:solidFill>
+              </a:rPr>
+              <a:t>1</a:t>
+            </a:r>
+          </a:p>
+        </p:txBody>
+      </p:sp>
+      <p:sp>
+        <p:nvSpPr>
+          <p:cNvPr id="79" name="Rectangle 78"/>
+          <p:cNvSpPr/>
+          <p:nvPr/>
+        </p:nvSpPr>
+        <p:spPr>
+          <a:xfrm>
+            <a:off x="365760" y="5102352"/>
+            <a:ext cx="3931920" cy="365760"/>
+          </a:xfrm>
+          <a:prstGeom prst="rect">
+            <a:avLst/>
+          </a:prstGeom>
+          <a:solidFill>
+            <a:srgbClr val="E9F6EC"/>
+          </a:solidFill>
+          <a:ln w="12700">
+            <a:solidFill>
+              <a:srgbClr val="D5D9DD"/>
+            </a:solidFill>
+          </a:ln>
+        </p:spPr>
+        <p:style>
+          <a:lnRef idx="1">
+            <a:schemeClr val="accent1"/>
+          </a:lnRef>
+          <a:fillRef idx="3">
+            <a:schemeClr val="accent1"/>
+          </a:fillRef>
+          <a:effectRef idx="2">
+            <a:schemeClr val="accent1"/>
+          </a:effectRef>
+          <a:fontRef idx="minor">
+            <a:schemeClr val="lt1"/>
+          </a:fontRef>
+        </p:style>
+        <p:txBody>
+          <a:bodyPr rtlCol="0" anchor="ctr"/>
+          <a:lstStyle/>
+          <a:p>
+            <a:pPr algn="ctr"/>
+          </a:p>
+        </p:txBody>
+      </p:sp>
+      <p:sp>
+        <p:nvSpPr>
+          <p:cNvPr id="80" name="TextBox 79"/>
+          <p:cNvSpPr txBox="1"/>
+          <p:nvPr/>
+        </p:nvSpPr>
+        <p:spPr>
+          <a:xfrm>
+            <a:off x="411480" y="5138928"/>
+            <a:ext cx="3840480" cy="292608"/>
+          </a:xfrm>
+          <a:prstGeom prst="rect">
+            <a:avLst/>
+          </a:prstGeom>
+          <a:noFill/>
+        </p:spPr>
+        <p:txBody>
+          <a:bodyPr wrap="square" anchor="ctr">
+            <a:spAutoFit/>
+          </a:bodyPr>
+          <a:lstStyle/>
+          <a:p>
+            <a:pPr algn="ctr"/>
+            <a:r>
+              <a:rPr sz="1150" b="1" i="0">
+                <a:solidFill>
+                  <a:srgbClr val="1A6B3A"/>
+                </a:solidFill>
+              </a:rPr>
+              <a:t>TOPLAM</a:t>
+            </a:r>
+          </a:p>
+        </p:txBody>
+      </p:sp>
+      <p:sp>
+        <p:nvSpPr>
+          <p:cNvPr id="81" name="Rectangle 80"/>
+          <p:cNvSpPr/>
+          <p:nvPr/>
+        </p:nvSpPr>
+        <p:spPr>
+          <a:xfrm>
+            <a:off x="4297680" y="5102352"/>
+            <a:ext cx="2651760" cy="365760"/>
+          </a:xfrm>
+          <a:prstGeom prst="rect">
+            <a:avLst/>
+          </a:prstGeom>
+          <a:solidFill>
+            <a:srgbClr val="E9F6EC"/>
+          </a:solidFill>
+          <a:ln w="12700">
+            <a:solidFill>
+              <a:srgbClr val="D5D9DD"/>
+            </a:solidFill>
+          </a:ln>
+        </p:spPr>
+        <p:style>
+          <a:lnRef idx="1">
+            <a:schemeClr val="accent1"/>
+          </a:lnRef>
+          <a:fillRef idx="3">
+            <a:schemeClr val="accent1"/>
+          </a:fillRef>
+          <a:effectRef idx="2">
+            <a:schemeClr val="accent1"/>
+          </a:effectRef>
+          <a:fontRef idx="minor">
+            <a:schemeClr val="lt1"/>
+          </a:fontRef>
+        </p:style>
+        <p:txBody>
+          <a:bodyPr rtlCol="0" anchor="ctr"/>
+          <a:lstStyle/>
+          <a:p>
+            <a:pPr algn="ctr"/>
+          </a:p>
+        </p:txBody>
+      </p:sp>
+      <p:sp>
+        <p:nvSpPr>
+          <p:cNvPr id="82" name="TextBox 81"/>
+          <p:cNvSpPr txBox="1"/>
+          <p:nvPr/>
+        </p:nvSpPr>
+        <p:spPr>
+          <a:xfrm>
+            <a:off x="4343400" y="5138928"/>
+            <a:ext cx="2560320" cy="292608"/>
+          </a:xfrm>
+          <a:prstGeom prst="rect">
+            <a:avLst/>
+          </a:prstGeom>
+          <a:noFill/>
+        </p:spPr>
+        <p:txBody>
+          <a:bodyPr wrap="square" anchor="ctr">
+            <a:spAutoFit/>
+          </a:bodyPr>
+          <a:lstStyle/>
+          <a:p>
+            <a:pPr algn="ctr"/>
+            <a:r>
+              <a:rPr sz="1150" b="1" i="0">
+                <a:solidFill>
+                  <a:srgbClr val="1A6B3A"/>
+                </a:solidFill>
+              </a:rPr>
+              <a:t>—</a:t>
+            </a:r>
+          </a:p>
+        </p:txBody>
+      </p:sp>
+      <p:sp>
+        <p:nvSpPr>
+          <p:cNvPr id="83" name="Rectangle 82"/>
+          <p:cNvSpPr/>
+          <p:nvPr/>
+        </p:nvSpPr>
+        <p:spPr>
+          <a:xfrm>
+            <a:off x="6949440" y="5102352"/>
+            <a:ext cx="1828800" cy="365760"/>
+          </a:xfrm>
+          <a:prstGeom prst="rect">
+            <a:avLst/>
+          </a:prstGeom>
+          <a:solidFill>
+            <a:srgbClr val="E9F6EC"/>
+          </a:solidFill>
+          <a:ln w="12700">
+            <a:solidFill>
+              <a:srgbClr val="D5D9DD"/>
+            </a:solidFill>
+          </a:ln>
+        </p:spPr>
+        <p:style>
+          <a:lnRef idx="1">
+            <a:schemeClr val="accent1"/>
+          </a:lnRef>
+          <a:fillRef idx="3">
+            <a:schemeClr val="accent1"/>
+          </a:fillRef>
+          <a:effectRef idx="2">
+            <a:schemeClr val="accent1"/>
+          </a:effectRef>
+          <a:fontRef idx="minor">
+            <a:schemeClr val="lt1"/>
+          </a:fontRef>
+        </p:style>
+        <p:txBody>
+          <a:bodyPr rtlCol="0" anchor="ctr"/>
+          <a:lstStyle/>
+          <a:p>
+            <a:pPr algn="ctr"/>
+          </a:p>
+        </p:txBody>
+      </p:sp>
+      <p:sp>
+        <p:nvSpPr>
+          <p:cNvPr id="84" name="TextBox 83"/>
+          <p:cNvSpPr txBox="1"/>
+          <p:nvPr/>
+        </p:nvSpPr>
+        <p:spPr>
+          <a:xfrm>
+            <a:off x="6995159" y="5138928"/>
+            <a:ext cx="1737360" cy="292608"/>
+          </a:xfrm>
+          <a:prstGeom prst="rect">
+            <a:avLst/>
+          </a:prstGeom>
+          <a:noFill/>
+        </p:spPr>
+        <p:txBody>
+          <a:bodyPr wrap="square" anchor="ctr">
+            <a:spAutoFit/>
+          </a:bodyPr>
+          <a:lstStyle/>
+          <a:p>
+            <a:pPr algn="ctr"/>
+            <a:r>
+              <a:rPr sz="1150" b="1" i="0">
+                <a:solidFill>
+                  <a:srgbClr val="1A6B3A"/>
+                </a:solidFill>
+              </a:rPr>
+              <a:t>5.195</a:t>
+            </a:r>
+          </a:p>
+        </p:txBody>
+      </p:sp>
+      <p:sp>
+        <p:nvSpPr>
+          <p:cNvPr id="85" name="Rectangle 84"/>
+          <p:cNvSpPr/>
+          <p:nvPr/>
+        </p:nvSpPr>
+        <p:spPr>
+          <a:xfrm>
+            <a:off x="8778240" y="5102352"/>
+            <a:ext cx="1463040" cy="365760"/>
+          </a:xfrm>
+          <a:prstGeom prst="rect">
+            <a:avLst/>
+          </a:prstGeom>
+          <a:solidFill>
+            <a:srgbClr val="E9F6EC"/>
+          </a:solidFill>
+          <a:ln w="12700">
+            <a:solidFill>
+              <a:srgbClr val="D5D9DD"/>
+            </a:solidFill>
+          </a:ln>
+        </p:spPr>
+        <p:style>
+          <a:lnRef idx="1">
+            <a:schemeClr val="accent1"/>
+          </a:lnRef>
+          <a:fillRef idx="3">
+            <a:schemeClr val="accent1"/>
+          </a:fillRef>
+          <a:effectRef idx="2">
+            <a:schemeClr val="accent1"/>
+          </a:effectRef>
+          <a:fontRef idx="minor">
+            <a:schemeClr val="lt1"/>
+          </a:fontRef>
+        </p:style>
+        <p:txBody>
+          <a:bodyPr rtlCol="0" anchor="ctr"/>
+          <a:lstStyle/>
+          <a:p>
+            <a:pPr algn="ctr"/>
+          </a:p>
+        </p:txBody>
+      </p:sp>
+      <p:sp>
+        <p:nvSpPr>
+          <p:cNvPr id="86" name="TextBox 85"/>
+          <p:cNvSpPr txBox="1"/>
+          <p:nvPr/>
+        </p:nvSpPr>
+        <p:spPr>
+          <a:xfrm>
+            <a:off x="8823960" y="5138928"/>
+            <a:ext cx="1371600" cy="292608"/>
+          </a:xfrm>
+          <a:prstGeom prst="rect">
+            <a:avLst/>
+          </a:prstGeom>
+          <a:noFill/>
+        </p:spPr>
+        <p:txBody>
+          <a:bodyPr wrap="square" anchor="ctr">
+            <a:spAutoFit/>
+          </a:bodyPr>
+          <a:lstStyle/>
+          <a:p>
+            <a:pPr algn="ctr"/>
+            <a:r>
+              <a:rPr sz="1150" b="1" i="0">
+                <a:solidFill>
+                  <a:srgbClr val="1A6B3A"/>
+                </a:solidFill>
+              </a:rPr>
+              <a:t/>
+            </a:r>
+          </a:p>
+        </p:txBody>
+      </p:sp>
+      <p:sp>
+        <p:nvSpPr>
+          <p:cNvPr id="87" name="Rectangle 86"/>
+          <p:cNvSpPr/>
+          <p:nvPr/>
+        </p:nvSpPr>
+        <p:spPr>
+          <a:xfrm>
+            <a:off x="8229600" y="1554480"/>
+            <a:ext cx="3611880" cy="2103120"/>
+          </a:xfrm>
+          <a:prstGeom prst="rect">
+            <a:avLst/>
+          </a:prstGeom>
+          <a:solidFill>
+            <a:srgbClr val="E0F0F2"/>
+          </a:solidFill>
+          <a:ln>
+            <a:noFill/>
+          </a:ln>
+        </p:spPr>
+        <p:style>
+          <a:lnRef idx="1">
+            <a:schemeClr val="accent1"/>
+          </a:lnRef>
+          <a:fillRef idx="3">
+            <a:schemeClr val="accent1"/>
+          </a:fillRef>
+          <a:effectRef idx="2">
+            <a:schemeClr val="accent1"/>
+          </a:effectRef>
+          <a:fontRef idx="minor">
+            <a:schemeClr val="lt1"/>
+          </a:fontRef>
+        </p:style>
+        <p:txBody>
+          <a:bodyPr rtlCol="0" anchor="ctr"/>
+          <a:lstStyle/>
+          <a:p>
+            <a:pPr algn="ctr"/>
+          </a:p>
+        </p:txBody>
+      </p:sp>
+      <p:sp>
+        <p:nvSpPr>
+          <p:cNvPr id="88" name="Rectangle 87"/>
+          <p:cNvSpPr/>
+          <p:nvPr/>
+        </p:nvSpPr>
+        <p:spPr>
+          <a:xfrm>
+            <a:off x="8229600" y="1554480"/>
+            <a:ext cx="82296" cy="2103120"/>
+          </a:xfrm>
+          <a:prstGeom prst="rect">
+            <a:avLst/>
+          </a:prstGeom>
+          <a:solidFill>
+            <a:srgbClr val="007A87"/>
+          </a:solidFill>
+          <a:ln>
+            <a:noFill/>
+          </a:ln>
+        </p:spPr>
+        <p:style>
+          <a:lnRef idx="1">
+            <a:schemeClr val="accent1"/>
+          </a:lnRef>
+          <a:fillRef idx="3">
+            <a:schemeClr val="accent1"/>
+          </a:fillRef>
+          <a:effectRef idx="2">
+            <a:schemeClr val="accent1"/>
+          </a:effectRef>
+          <a:fontRef idx="minor">
+            <a:schemeClr val="lt1"/>
+          </a:fontRef>
+        </p:style>
+        <p:txBody>
+          <a:bodyPr rtlCol="0" anchor="ctr"/>
+          <a:lstStyle/>
+          <a:p>
+            <a:pPr algn="ctr"/>
+          </a:p>
+        </p:txBody>
+      </p:sp>
+      <p:sp>
+        <p:nvSpPr>
+          <p:cNvPr id="89" name="TextBox 88"/>
+          <p:cNvSpPr txBox="1"/>
+          <p:nvPr/>
+        </p:nvSpPr>
+        <p:spPr>
+          <a:xfrm>
+            <a:off x="8430768" y="1664207"/>
+            <a:ext cx="3291840" cy="365760"/>
+          </a:xfrm>
+          <a:prstGeom prst="rect">
+            <a:avLst/>
+          </a:prstGeom>
+          <a:noFill/>
+        </p:spPr>
+        <p:txBody>
+          <a:bodyPr wrap="square">
+            <a:spAutoFit/>
+          </a:bodyPr>
+          <a:lstStyle/>
+          <a:p>
+            <a:pPr algn="l"/>
+            <a:r>
+              <a:rPr sz="1300" b="1" i="0">
+                <a:solidFill>
+                  <a:srgbClr val="0D2B55"/>
+                </a:solidFill>
+              </a:rPr>
+              <a:t>Sınıf Dengesi</a:t>
+            </a:r>
+          </a:p>
+        </p:txBody>
+      </p:sp>
+      <p:sp>
+        <p:nvSpPr>
+          <p:cNvPr id="90" name="TextBox 89"/>
+          <p:cNvSpPr txBox="1"/>
+          <p:nvPr/>
+        </p:nvSpPr>
+        <p:spPr>
+          <a:xfrm>
+            <a:off x="8430768" y="2057400"/>
+            <a:ext cx="3291840" cy="1508760"/>
+          </a:xfrm>
+          <a:prstGeom prst="rect">
+            <a:avLst/>
+          </a:prstGeom>
+          <a:noFill/>
+        </p:spPr>
+        <p:txBody>
+          <a:bodyPr wrap="square">
+            <a:spAutoFit/>
+          </a:bodyPr>
+          <a:lstStyle/>
+          <a:p>
+            <a:pPr algn="l"/>
+            <a:r>
+              <a:rPr sz="1200" b="0" i="0">
+                <a:solidFill>
+                  <a:srgbClr val="2A2A2A"/>
+                </a:solidFill>
+              </a:rPr>
+              <a:t>İnsan (sınıf 0):  3.113  ·  %59,9
+Yapay zekâ (1):  2.082  ·  %40,1
+Dengesizlik şu yöntemlerle giderildi:
+class_weight='balanced'
+is_unbalance=True</a:t>
+            </a:r>
+          </a:p>
+        </p:txBody>
+      </p:sp>
+      <p:sp>
+        <p:nvSpPr>
+          <p:cNvPr id="91" name="Rectangle 90"/>
+          <p:cNvSpPr/>
+          <p:nvPr/>
+        </p:nvSpPr>
+        <p:spPr>
+          <a:xfrm>
+            <a:off x="8229600" y="3794760"/>
+            <a:ext cx="3611880" cy="2103120"/>
+          </a:xfrm>
+          <a:prstGeom prst="rect">
+            <a:avLst/>
+          </a:prstGeom>
+          <a:solidFill>
+            <a:srgbClr val="E8ECF0"/>
+          </a:solidFill>
+          <a:ln>
+            <a:noFill/>
+          </a:ln>
+        </p:spPr>
+        <p:style>
+          <a:lnRef idx="1">
+            <a:schemeClr val="accent1"/>
+          </a:lnRef>
+          <a:fillRef idx="3">
+            <a:schemeClr val="accent1"/>
+          </a:fillRef>
+          <a:effectRef idx="2">
+            <a:schemeClr val="accent1"/>
+          </a:effectRef>
+          <a:fontRef idx="minor">
+            <a:schemeClr val="lt1"/>
+          </a:fontRef>
+        </p:style>
+        <p:txBody>
+          <a:bodyPr rtlCol="0" anchor="ctr"/>
+          <a:lstStyle/>
+          <a:p>
+            <a:pPr algn="ctr"/>
+          </a:p>
+        </p:txBody>
+      </p:sp>
+      <p:sp>
+        <p:nvSpPr>
+          <p:cNvPr id="92" name="Rectangle 91"/>
+          <p:cNvSpPr/>
+          <p:nvPr/>
+        </p:nvSpPr>
+        <p:spPr>
+          <a:xfrm>
+            <a:off x="8229600" y="3794760"/>
+            <a:ext cx="82296" cy="2103120"/>
+          </a:xfrm>
+          <a:prstGeom prst="rect">
+            <a:avLst/>
+          </a:prstGeom>
+          <a:solidFill>
+            <a:srgbClr val="E0A800"/>
+          </a:solidFill>
+          <a:ln>
+            <a:noFill/>
+          </a:ln>
+        </p:spPr>
+        <p:style>
+          <a:lnRef idx="1">
+            <a:schemeClr val="accent1"/>
+          </a:lnRef>
+          <a:fillRef idx="3">
+            <a:schemeClr val="accent1"/>
+          </a:fillRef>
+          <a:effectRef idx="2">
+            <a:schemeClr val="accent1"/>
+          </a:effectRef>
+          <a:fontRef idx="minor">
+            <a:schemeClr val="lt1"/>
+          </a:fontRef>
+        </p:style>
+        <p:txBody>
+          <a:bodyPr rtlCol="0" anchor="ctr"/>
+          <a:lstStyle/>
+          <a:p>
+            <a:pPr algn="ctr"/>
+          </a:p>
+        </p:txBody>
+      </p:sp>
+      <p:sp>
+        <p:nvSpPr>
+          <p:cNvPr id="93" name="TextBox 92"/>
+          <p:cNvSpPr txBox="1"/>
+          <p:nvPr/>
+        </p:nvSpPr>
+        <p:spPr>
+          <a:xfrm>
+            <a:off x="8430768" y="3904488"/>
+            <a:ext cx="3291840" cy="365760"/>
+          </a:xfrm>
+          <a:prstGeom prst="rect">
+            <a:avLst/>
+          </a:prstGeom>
+          <a:noFill/>
+        </p:spPr>
+        <p:txBody>
+          <a:bodyPr wrap="square">
+            <a:spAutoFit/>
+          </a:bodyPr>
+          <a:lstStyle/>
+          <a:p>
+            <a:pPr algn="l"/>
+            <a:r>
+              <a:rPr sz="1300" b="1" i="0">
+                <a:solidFill>
+                  <a:srgbClr val="0D2B55"/>
+                </a:solidFill>
+              </a:rPr>
+              <a:t>İnsan Kaynakları</a:t>
+            </a:r>
+          </a:p>
+        </p:txBody>
+      </p:sp>
+      <p:sp>
+        <p:nvSpPr>
+          <p:cNvPr id="94" name="TextBox 93"/>
+          <p:cNvSpPr txBox="1"/>
+          <p:nvPr/>
+        </p:nvSpPr>
+        <p:spPr>
+          <a:xfrm>
+            <a:off x="8430768" y="4297680"/>
+            <a:ext cx="3291840" cy="1508760"/>
+          </a:xfrm>
+          <a:prstGeom prst="rect">
+            <a:avLst/>
+          </a:prstGeom>
+          <a:noFill/>
+        </p:spPr>
+        <p:txBody>
+          <a:bodyPr wrap="square">
+            <a:spAutoFit/>
+          </a:bodyPr>
+          <a:lstStyle/>
+          <a:p>
+            <a:pPr algn="l"/>
+            <a:r>
+              <a:rPr sz="1200" b="0" i="0">
+                <a:solidFill>
+                  <a:srgbClr val="2A2A2A"/>
+                </a:solidFill>
+              </a:rPr>
+              <a:t>GTZAN — tür çeşitliliği
+FMA Small — bağımsız sanatçılar
+SleepyJesse — kapak performansı
+YZ kaynakları sekiz farklı üretici sistemden örneklendi.</a:t>
+            </a:r>
+          </a:p>
+        </p:txBody>
+      </p:sp>
+      <p:sp>
+        <p:nvSpPr>
+          <p:cNvPr id="95" name="TextBox 94"/>
+          <p:cNvSpPr txBox="1"/>
+          <p:nvPr/>
+        </p:nvSpPr>
+        <p:spPr>
+          <a:xfrm>
+            <a:off x="365760" y="6510528"/>
+            <a:ext cx="8229600" cy="301752"/>
+          </a:xfrm>
+          <a:prstGeom prst="rect">
+            <a:avLst/>
+          </a:prstGeom>
+          <a:noFill/>
+        </p:spPr>
+        <p:txBody>
+          <a:bodyPr wrap="square">
+            <a:spAutoFit/>
+          </a:bodyPr>
+          <a:lstStyle/>
+          <a:p>
+            <a:pPr algn="l"/>
+            <a:r>
+              <a:rPr sz="900" b="0" i="0">
+                <a:solidFill>
+                  <a:srgbClr val="66707A"/>
+                </a:solidFill>
+              </a:rPr>
+              <a:t>AURIS  ·  Hasan Arthur Altuntaş  ·  BM498 Mezuniyet Tezi</a:t>
+            </a:r>
+          </a:p>
+        </p:txBody>
+      </p:sp>
+      <p:sp>
+        <p:nvSpPr>
+          <p:cNvPr id="96" name="TextBox 95"/>
+          <p:cNvSpPr txBox="1"/>
+          <p:nvPr/>
+        </p:nvSpPr>
+        <p:spPr>
+          <a:xfrm>
+            <a:off x="8595360" y="6510528"/>
+            <a:ext cx="3200400" cy="301752"/>
+          </a:xfrm>
+          <a:prstGeom prst="rect">
+            <a:avLst/>
+          </a:prstGeom>
+          <a:noFill/>
+        </p:spPr>
+        <p:txBody>
+          <a:bodyPr wrap="square">
+            <a:spAutoFit/>
+          </a:bodyPr>
+          <a:lstStyle/>
+          <a:p>
+            <a:pPr algn="r"/>
+            <a:r>
+              <a:rPr sz="900" b="0" i="0">
+                <a:solidFill>
+                  <a:srgbClr val="66707A"/>
+                </a:solidFill>
+              </a:rPr>
+              <a:t>Düzce Üniversitesi · 2025-2026</a:t>
             </a:r>
           </a:p>
         </p:txBody>
@@ -4419,7 +7706,7 @@
         <p:spPr>
           <a:xfrm>
             <a:off x="0" y="0"/>
-            <a:ext cx="12188952" cy="1417320"/>
+            <a:ext cx="12188952" cy="1371600"/>
           </a:xfrm>
           <a:prstGeom prst="rect">
             <a:avLst/>
@@ -4455,14 +7742,57 @@
       </p:sp>
       <p:sp>
         <p:nvSpPr>
-          <p:cNvPr id="3" name="TextBox 2"/>
-          <p:cNvSpPr txBox="1"/>
-          <p:nvPr/>
-        </p:nvSpPr>
-        <p:spPr>
-          <a:xfrm>
-            <a:off x="320040" y="91440"/>
-            <a:ext cx="11521440" cy="822960"/>
+          <p:cNvPr id="3" name="Rectangle 2"/>
+          <p:cNvSpPr/>
+          <p:nvPr/>
+        </p:nvSpPr>
+        <p:spPr>
+          <a:xfrm>
+            <a:off x="0" y="1371600"/>
+            <a:ext cx="12188952" cy="54864"/>
+          </a:xfrm>
+          <a:prstGeom prst="rect">
+            <a:avLst/>
+          </a:prstGeom>
+          <a:solidFill>
+            <a:srgbClr val="E0A800"/>
+          </a:solidFill>
+          <a:ln>
+            <a:noFill/>
+          </a:ln>
+        </p:spPr>
+        <p:style>
+          <a:lnRef idx="1">
+            <a:schemeClr val="accent1"/>
+          </a:lnRef>
+          <a:fillRef idx="3">
+            <a:schemeClr val="accent1"/>
+          </a:fillRef>
+          <a:effectRef idx="2">
+            <a:schemeClr val="accent1"/>
+          </a:effectRef>
+          <a:fontRef idx="minor">
+            <a:schemeClr val="lt1"/>
+          </a:fontRef>
+        </p:style>
+        <p:txBody>
+          <a:bodyPr rtlCol="0" anchor="ctr"/>
+          <a:lstStyle/>
+          <a:p>
+            <a:pPr algn="ctr"/>
+          </a:p>
+        </p:txBody>
+      </p:sp>
+      <p:sp>
+        <p:nvSpPr>
+          <p:cNvPr id="4" name="TextBox 3"/>
+          <p:cNvSpPr txBox="1"/>
+          <p:nvPr/>
+        </p:nvSpPr>
+        <p:spPr>
+          <a:xfrm>
+            <a:off x="365760" y="109728"/>
+            <a:ext cx="11430000" cy="320040"/>
           </a:xfrm>
           <a:prstGeom prst="rect">
             <a:avLst/>
@@ -4477,26 +7807,60 @@
           <a:p>
             <a:pPr algn="l"/>
             <a:r>
-              <a:rPr sz="2500" b="1">
+              <a:rPr sz="1100" b="1" i="0">
+                <a:solidFill>
+                  <a:srgbClr val="E0A800"/>
+                </a:solidFill>
+              </a:rPr>
+              <a:t>ÖZNITELIK MÜHENDISLIĞI</a:t>
+            </a:r>
+          </a:p>
+        </p:txBody>
+      </p:sp>
+      <p:sp>
+        <p:nvSpPr>
+          <p:cNvPr id="5" name="TextBox 4"/>
+          <p:cNvSpPr txBox="1"/>
+          <p:nvPr/>
+        </p:nvSpPr>
+        <p:spPr>
+          <a:xfrm>
+            <a:off x="365760" y="402336"/>
+            <a:ext cx="11430000" cy="640080"/>
+          </a:xfrm>
+          <a:prstGeom prst="rect">
+            <a:avLst/>
+          </a:prstGeom>
+          <a:noFill/>
+        </p:spPr>
+        <p:txBody>
+          <a:bodyPr wrap="square">
+            <a:spAutoFit/>
+          </a:bodyPr>
+          <a:lstStyle/>
+          <a:p>
+            <a:pPr algn="l"/>
+            <a:r>
+              <a:rPr sz="2400" b="1" i="0">
                 <a:solidFill>
                   <a:srgbClr val="FFFFFF"/>
                 </a:solidFill>
               </a:rPr>
-              <a:t>Sınıflandırma Modelleri — 11 Model</a:t>
-            </a:r>
-          </a:p>
-        </p:txBody>
-      </p:sp>
-      <p:sp>
-        <p:nvSpPr>
-          <p:cNvPr id="4" name="TextBox 3"/>
-          <p:cNvSpPr txBox="1"/>
-          <p:nvPr/>
-        </p:nvSpPr>
-        <p:spPr>
-          <a:xfrm>
-            <a:off x="365760" y="1554480"/>
-            <a:ext cx="5303520" cy="4754880"/>
+              <a:t>47 Boyutlu Heterojen Akustik Vektör</a:t>
+            </a:r>
+          </a:p>
+        </p:txBody>
+      </p:sp>
+      <p:sp>
+        <p:nvSpPr>
+          <p:cNvPr id="6" name="TextBox 5"/>
+          <p:cNvSpPr txBox="1"/>
+          <p:nvPr/>
+        </p:nvSpPr>
+        <p:spPr>
+          <a:xfrm>
+            <a:off x="365760" y="987552"/>
+            <a:ext cx="11430000" cy="365760"/>
           </a:xfrm>
           <a:prstGeom prst="rect">
             <a:avLst/>
@@ -4509,137 +7873,227 @@
           </a:bodyPr>
           <a:lstStyle/>
           <a:p>
-            <a:pPr>
-              <a:spcAft>
-                <a:spcPts val="400"/>
-              </a:spcAft>
-            </a:pPr>
-            <a:r>
-              <a:rPr sz="1400">
-                <a:solidFill>
-                  <a:srgbClr val="333333"/>
-                </a:solidFill>
-              </a:rPr>
-              <a:t>Makine Öğrenmesi (7):</a:t>
-            </a:r>
-          </a:p>
-          <a:p>
-            <a:pPr>
-              <a:spcAft>
-                <a:spcPts val="400"/>
-              </a:spcAft>
-            </a:pPr>
-            <a:r>
-              <a:rPr sz="1400">
-                <a:solidFill>
-                  <a:srgbClr val="333333"/>
-                </a:solidFill>
-              </a:rPr>
-              <a:t>  • LightGBM — is_unbalance=True</a:t>
-            </a:r>
-          </a:p>
-          <a:p>
-            <a:pPr>
-              <a:spcAft>
-                <a:spcPts val="400"/>
-              </a:spcAft>
-            </a:pPr>
-            <a:r>
-              <a:rPr sz="1400">
-                <a:solidFill>
-                  <a:srgbClr val="333333"/>
-                </a:solidFill>
-              </a:rPr>
-              <a:t>  • XGBoost — n_estimators=400</a:t>
-            </a:r>
-          </a:p>
-          <a:p>
-            <a:pPr>
-              <a:spcAft>
-                <a:spcPts val="400"/>
-              </a:spcAft>
-            </a:pPr>
-            <a:r>
-              <a:rPr sz="1400">
-                <a:solidFill>
-                  <a:srgbClr val="333333"/>
-                </a:solidFill>
-              </a:rPr>
-              <a:t>  • Gradyan Artırma — max_depth=4</a:t>
-            </a:r>
-          </a:p>
-          <a:p>
-            <a:pPr>
-              <a:spcAft>
-                <a:spcPts val="400"/>
-              </a:spcAft>
-            </a:pPr>
-            <a:r>
-              <a:rPr sz="1400">
-                <a:solidFill>
-                  <a:srgbClr val="333333"/>
-                </a:solidFill>
-              </a:rPr>
-              <a:t>  • Rastgele Orman — n_estimators=500</a:t>
-            </a:r>
-          </a:p>
-          <a:p>
-            <a:pPr>
-              <a:spcAft>
-                <a:spcPts val="400"/>
-              </a:spcAft>
-            </a:pPr>
-            <a:r>
-              <a:rPr sz="1400">
-                <a:solidFill>
-                  <a:srgbClr val="333333"/>
-                </a:solidFill>
-              </a:rPr>
-              <a:t>  • SVM-RBF — C=10, gamma=0,05</a:t>
-            </a:r>
-          </a:p>
-          <a:p>
-            <a:pPr>
-              <a:spcAft>
-                <a:spcPts val="400"/>
-              </a:spcAft>
-            </a:pPr>
-            <a:r>
-              <a:rPr sz="1400">
-                <a:solidFill>
-                  <a:srgbClr val="333333"/>
-                </a:solidFill>
-              </a:rPr>
-              <a:t>  • ÇKA Sinir Ağı — 128-64, relu</a:t>
-            </a:r>
-          </a:p>
-          <a:p>
-            <a:pPr>
-              <a:spcAft>
-                <a:spcPts val="400"/>
-              </a:spcAft>
-            </a:pPr>
-            <a:r>
-              <a:rPr sz="1400">
-                <a:solidFill>
-                  <a:srgbClr val="333333"/>
-                </a:solidFill>
-              </a:rPr>
-              <a:t>  • Lojistik Regresyon — balanced</a:t>
-            </a:r>
-          </a:p>
-        </p:txBody>
-      </p:sp>
-      <p:sp>
-        <p:nvSpPr>
-          <p:cNvPr id="5" name="TextBox 4"/>
-          <p:cNvSpPr txBox="1"/>
-          <p:nvPr/>
-        </p:nvSpPr>
-        <p:spPr>
-          <a:xfrm>
-            <a:off x="5943600" y="1554480"/>
-            <a:ext cx="5852160" cy="4754880"/>
+            <a:pPr algn="l"/>
+            <a:r>
+              <a:rPr sz="1250" b="0" i="0">
+                <a:solidFill>
+                  <a:srgbClr val="AEC6D6"/>
+                </a:solidFill>
+              </a:rPr>
+              <a:t>Beş işlevsel aile — tek temsile aşırı uyumu sınırlamak için</a:t>
+            </a:r>
+          </a:p>
+        </p:txBody>
+      </p:sp>
+      <p:sp>
+        <p:nvSpPr>
+          <p:cNvPr id="7" name="Rectangle 6"/>
+          <p:cNvSpPr/>
+          <p:nvPr/>
+        </p:nvSpPr>
+        <p:spPr>
+          <a:xfrm>
+            <a:off x="365760" y="1600200"/>
+            <a:ext cx="3657600" cy="2103120"/>
+          </a:xfrm>
+          <a:prstGeom prst="rect">
+            <a:avLst/>
+          </a:prstGeom>
+          <a:solidFill>
+            <a:srgbClr val="FFFFFF"/>
+          </a:solidFill>
+          <a:ln w="13970">
+            <a:solidFill>
+              <a:srgbClr val="007A87"/>
+            </a:solidFill>
+          </a:ln>
+        </p:spPr>
+        <p:style>
+          <a:lnRef idx="1">
+            <a:schemeClr val="accent1"/>
+          </a:lnRef>
+          <a:fillRef idx="3">
+            <a:schemeClr val="accent1"/>
+          </a:fillRef>
+          <a:effectRef idx="2">
+            <a:schemeClr val="accent1"/>
+          </a:effectRef>
+          <a:fontRef idx="minor">
+            <a:schemeClr val="lt1"/>
+          </a:fontRef>
+        </p:style>
+        <p:txBody>
+          <a:bodyPr rtlCol="0" anchor="ctr"/>
+          <a:lstStyle/>
+          <a:p>
+            <a:pPr algn="ctr"/>
+          </a:p>
+        </p:txBody>
+      </p:sp>
+      <p:sp>
+        <p:nvSpPr>
+          <p:cNvPr id="8" name="Rectangle 7"/>
+          <p:cNvSpPr/>
+          <p:nvPr/>
+        </p:nvSpPr>
+        <p:spPr>
+          <a:xfrm>
+            <a:off x="365760" y="1600200"/>
+            <a:ext cx="3657600" cy="502920"/>
+          </a:xfrm>
+          <a:prstGeom prst="rect">
+            <a:avLst/>
+          </a:prstGeom>
+          <a:solidFill>
+            <a:srgbClr val="007A87"/>
+          </a:solidFill>
+          <a:ln>
+            <a:noFill/>
+          </a:ln>
+        </p:spPr>
+        <p:style>
+          <a:lnRef idx="1">
+            <a:schemeClr val="accent1"/>
+          </a:lnRef>
+          <a:fillRef idx="3">
+            <a:schemeClr val="accent1"/>
+          </a:fillRef>
+          <a:effectRef idx="2">
+            <a:schemeClr val="accent1"/>
+          </a:effectRef>
+          <a:fontRef idx="minor">
+            <a:schemeClr val="lt1"/>
+          </a:fontRef>
+        </p:style>
+        <p:txBody>
+          <a:bodyPr rtlCol="0" anchor="ctr"/>
+          <a:lstStyle/>
+          <a:p>
+            <a:pPr algn="ctr"/>
+          </a:p>
+        </p:txBody>
+      </p:sp>
+      <p:sp>
+        <p:nvSpPr>
+          <p:cNvPr id="9" name="TextBox 8"/>
+          <p:cNvSpPr txBox="1"/>
+          <p:nvPr/>
+        </p:nvSpPr>
+        <p:spPr>
+          <a:xfrm>
+            <a:off x="475488" y="1655064"/>
+            <a:ext cx="2377440" cy="384048"/>
+          </a:xfrm>
+          <a:prstGeom prst="rect">
+            <a:avLst/>
+          </a:prstGeom>
+          <a:noFill/>
+        </p:spPr>
+        <p:txBody>
+          <a:bodyPr wrap="square" anchor="ctr">
+            <a:spAutoFit/>
+          </a:bodyPr>
+          <a:lstStyle/>
+          <a:p>
+            <a:pPr algn="l"/>
+            <a:r>
+              <a:rPr sz="1400" b="1" i="0">
+                <a:solidFill>
+                  <a:srgbClr val="FFFFFF"/>
+                </a:solidFill>
+              </a:rPr>
+              <a:t>Spektral</a:t>
+            </a:r>
+          </a:p>
+        </p:txBody>
+      </p:sp>
+      <p:sp>
+        <p:nvSpPr>
+          <p:cNvPr id="10" name="Rectangle 9"/>
+          <p:cNvSpPr/>
+          <p:nvPr/>
+        </p:nvSpPr>
+        <p:spPr>
+          <a:xfrm>
+            <a:off x="3063240" y="1691640"/>
+            <a:ext cx="822960" cy="310896"/>
+          </a:xfrm>
+          <a:prstGeom prst="rect">
+            <a:avLst/>
+          </a:prstGeom>
+          <a:solidFill>
+            <a:srgbClr val="E0A800"/>
+          </a:solidFill>
+          <a:ln>
+            <a:noFill/>
+          </a:ln>
+        </p:spPr>
+        <p:style>
+          <a:lnRef idx="1">
+            <a:schemeClr val="accent1"/>
+          </a:lnRef>
+          <a:fillRef idx="3">
+            <a:schemeClr val="accent1"/>
+          </a:fillRef>
+          <a:effectRef idx="2">
+            <a:schemeClr val="accent1"/>
+          </a:effectRef>
+          <a:fontRef idx="minor">
+            <a:schemeClr val="lt1"/>
+          </a:fontRef>
+        </p:style>
+        <p:txBody>
+          <a:bodyPr rtlCol="0" anchor="ctr"/>
+          <a:lstStyle/>
+          <a:p>
+            <a:pPr algn="ctr"/>
+          </a:p>
+        </p:txBody>
+      </p:sp>
+      <p:sp>
+        <p:nvSpPr>
+          <p:cNvPr id="11" name="TextBox 10"/>
+          <p:cNvSpPr txBox="1"/>
+          <p:nvPr/>
+        </p:nvSpPr>
+        <p:spPr>
+          <a:xfrm>
+            <a:off x="3063240" y="1709928"/>
+            <a:ext cx="822960" cy="274320"/>
+          </a:xfrm>
+          <a:prstGeom prst="rect">
+            <a:avLst/>
+          </a:prstGeom>
+          <a:noFill/>
+        </p:spPr>
+        <p:txBody>
+          <a:bodyPr wrap="square" anchor="ctr">
+            <a:spAutoFit/>
+          </a:bodyPr>
+          <a:lstStyle/>
+          <a:p>
+            <a:pPr algn="ctr"/>
+            <a:r>
+              <a:rPr sz="1000" b="1" i="0">
+                <a:solidFill>
+                  <a:srgbClr val="0D2B55"/>
+                </a:solidFill>
+              </a:rPr>
+              <a:t>16 boyut</a:t>
+            </a:r>
+          </a:p>
+        </p:txBody>
+      </p:sp>
+      <p:sp>
+        <p:nvSpPr>
+          <p:cNvPr id="12" name="TextBox 11"/>
+          <p:cNvSpPr txBox="1"/>
+          <p:nvPr/>
+        </p:nvSpPr>
+        <p:spPr>
+          <a:xfrm>
+            <a:off x="475488" y="2194560"/>
+            <a:ext cx="3429000" cy="1005840"/>
           </a:xfrm>
           <a:prstGeom prst="rect">
             <a:avLst/>
@@ -4652,167 +8106,29 @@
           </a:bodyPr>
           <a:lstStyle/>
           <a:p>
-            <a:pPr>
-              <a:spcAft>
-                <a:spcPts val="400"/>
-              </a:spcAft>
-            </a:pPr>
-            <a:r>
-              <a:rPr sz="1400">
-                <a:solidFill>
-                  <a:srgbClr val="333333"/>
-                </a:solidFill>
-              </a:rPr>
-              <a:t>Derin Öğrenme (4):</a:t>
-            </a:r>
-          </a:p>
-          <a:p>
-            <a:pPr>
-              <a:spcAft>
-                <a:spcPts val="400"/>
-              </a:spcAft>
-            </a:pPr>
-            <a:r>
-              <a:rPr sz="1400">
-                <a:solidFill>
-                  <a:srgbClr val="333333"/>
-                </a:solidFill>
-              </a:rPr>
-              <a:t>  • Derin ÇKA — 512-256-128-64, BatchNorm</a:t>
-            </a:r>
-          </a:p>
-          <a:p>
-            <a:pPr>
-              <a:spcAft>
-                <a:spcPts val="400"/>
-              </a:spcAft>
-            </a:pPr>
-            <a:r>
-              <a:rPr sz="1400">
-                <a:solidFill>
-                  <a:srgbClr val="333333"/>
-                </a:solidFill>
-              </a:rPr>
-              <a:t>  • Artık ÇKA — 3 blok, 256-256</a:t>
-            </a:r>
-          </a:p>
-          <a:p>
-            <a:pPr>
-              <a:spcAft>
-                <a:spcPts val="400"/>
-              </a:spcAft>
-            </a:pPr>
-            <a:r>
-              <a:rPr sz="1400">
-                <a:solidFill>
-                  <a:srgbClr val="333333"/>
-                </a:solidFill>
-              </a:rPr>
-              <a:t>  • Dikkat ÇKA — öz-dikkat, 4 baş</a:t>
-            </a:r>
-          </a:p>
-          <a:p>
-            <a:pPr>
-              <a:spcAft>
-                <a:spcPts val="400"/>
-              </a:spcAft>
-            </a:pPr>
-            <a:r>
-              <a:rPr sz="1400">
-                <a:solidFill>
-                  <a:srgbClr val="333333"/>
-                </a:solidFill>
-              </a:rPr>
-              <a:t>  • 1B-ESA — Conv1D + max-pool</a:t>
-            </a:r>
-          </a:p>
-          <a:p>
-            <a:pPr>
-              <a:spcAft>
-                <a:spcPts val="400"/>
-              </a:spcAft>
-            </a:pPr>
-            <a:r>
-              <a:rPr sz="1400">
-                <a:solidFill>
-                  <a:srgbClr val="333333"/>
-                </a:solidFill>
-              </a:rPr>
-              <a:t/>
-            </a:r>
-          </a:p>
-          <a:p>
-            <a:pPr>
-              <a:spcAft>
-                <a:spcPts val="400"/>
-              </a:spcAft>
-            </a:pPr>
-            <a:r>
-              <a:rPr sz="1400">
-                <a:solidFill>
-                  <a:srgbClr val="333333"/>
-                </a:solidFill>
-              </a:rPr>
-              <a:t>Sınıf dengesi:</a:t>
-            </a:r>
-          </a:p>
-          <a:p>
-            <a:pPr>
-              <a:spcAft>
-                <a:spcPts val="400"/>
-              </a:spcAft>
-            </a:pPr>
-            <a:r>
-              <a:rPr sz="1400">
-                <a:solidFill>
-                  <a:srgbClr val="333333"/>
-                </a:solidFill>
-              </a:rPr>
-              <a:t>  %59,9 insan — %40,1 YZ</a:t>
-            </a:r>
-          </a:p>
-          <a:p>
-            <a:pPr>
-              <a:spcAft>
-                <a:spcPts val="400"/>
-              </a:spcAft>
-            </a:pPr>
-            <a:r>
-              <a:rPr sz="1400">
-                <a:solidFill>
-                  <a:srgbClr val="333333"/>
-                </a:solidFill>
-              </a:rPr>
-              <a:t>  class_weight='balanced'</a:t>
-            </a:r>
-          </a:p>
-          <a:p>
-            <a:pPr>
-              <a:spcAft>
-                <a:spcPts val="400"/>
-              </a:spcAft>
-            </a:pPr>
-            <a:r>
-              <a:rPr sz="1400">
-                <a:solidFill>
-                  <a:srgbClr val="333333"/>
-                </a:solidFill>
-              </a:rPr>
-              <a:t>  is_unbalance=True (ağaç modelleri)</a:t>
-            </a:r>
-          </a:p>
-        </p:txBody>
-      </p:sp>
-      <p:sp>
-        <p:nvSpPr>
-          <p:cNvPr id="6" name="TextBox 5"/>
-          <p:cNvSpPr txBox="1"/>
-          <p:nvPr/>
-        </p:nvSpPr>
-        <p:spPr>
-          <a:xfrm>
-            <a:off x="0" y="6510528"/>
-            <a:ext cx="12188952" cy="301752"/>
+            <a:pPr algn="l"/>
+            <a:r>
+              <a:rPr sz="1100" b="0" i="0">
+                <a:solidFill>
+                  <a:srgbClr val="2A2A2A"/>
+                </a:solidFill>
+              </a:rPr>
+              <a:t>MFCC, mel-spektrogram, spectral centroid,
+bandwidth, rolloff, flatness ve delta istatistikleri</a:t>
+            </a:r>
+          </a:p>
+        </p:txBody>
+      </p:sp>
+      <p:sp>
+        <p:nvSpPr>
+          <p:cNvPr id="13" name="TextBox 12"/>
+          <p:cNvSpPr txBox="1"/>
+          <p:nvPr/>
+        </p:nvSpPr>
+        <p:spPr>
+          <a:xfrm>
+            <a:off x="475488" y="3291840"/>
+            <a:ext cx="3429000" cy="365760"/>
           </a:xfrm>
           <a:prstGeom prst="rect">
             <a:avLst/>
@@ -4825,14 +8141,1333 @@
           </a:bodyPr>
           <a:lstStyle/>
           <a:p>
-            <a:pPr algn="ctr"/>
-            <a:r>
-              <a:rPr sz="900" b="0">
-                <a:solidFill>
-                  <a:srgbClr val="8899AA"/>
-                </a:solidFill>
-              </a:rPr>
-              <a:t>Hasan Arthur Altuntaş  |  BM498  |  Düzce Üniversitesi  |  2025-2026</a:t>
+            <a:pPr algn="l"/>
+            <a:r>
+              <a:rPr sz="1050" b="0" i="1">
+                <a:solidFill>
+                  <a:srgbClr val="007A87"/>
+                </a:solidFill>
+              </a:rPr>
+              <a:t>▸ Frekans içeriği ve tını</a:t>
+            </a:r>
+          </a:p>
+        </p:txBody>
+      </p:sp>
+      <p:sp>
+        <p:nvSpPr>
+          <p:cNvPr id="14" name="Rectangle 13"/>
+          <p:cNvSpPr/>
+          <p:nvPr/>
+        </p:nvSpPr>
+        <p:spPr>
+          <a:xfrm>
+            <a:off x="4251960" y="1600200"/>
+            <a:ext cx="3657600" cy="2103120"/>
+          </a:xfrm>
+          <a:prstGeom prst="rect">
+            <a:avLst/>
+          </a:prstGeom>
+          <a:solidFill>
+            <a:srgbClr val="FFFFFF"/>
+          </a:solidFill>
+          <a:ln w="13970">
+            <a:solidFill>
+              <a:srgbClr val="007A87"/>
+            </a:solidFill>
+          </a:ln>
+        </p:spPr>
+        <p:style>
+          <a:lnRef idx="1">
+            <a:schemeClr val="accent1"/>
+          </a:lnRef>
+          <a:fillRef idx="3">
+            <a:schemeClr val="accent1"/>
+          </a:fillRef>
+          <a:effectRef idx="2">
+            <a:schemeClr val="accent1"/>
+          </a:effectRef>
+          <a:fontRef idx="minor">
+            <a:schemeClr val="lt1"/>
+          </a:fontRef>
+        </p:style>
+        <p:txBody>
+          <a:bodyPr rtlCol="0" anchor="ctr"/>
+          <a:lstStyle/>
+          <a:p>
+            <a:pPr algn="ctr"/>
+          </a:p>
+        </p:txBody>
+      </p:sp>
+      <p:sp>
+        <p:nvSpPr>
+          <p:cNvPr id="15" name="Rectangle 14"/>
+          <p:cNvSpPr/>
+          <p:nvPr/>
+        </p:nvSpPr>
+        <p:spPr>
+          <a:xfrm>
+            <a:off x="4251960" y="1600200"/>
+            <a:ext cx="3657600" cy="502920"/>
+          </a:xfrm>
+          <a:prstGeom prst="rect">
+            <a:avLst/>
+          </a:prstGeom>
+          <a:solidFill>
+            <a:srgbClr val="007A87"/>
+          </a:solidFill>
+          <a:ln>
+            <a:noFill/>
+          </a:ln>
+        </p:spPr>
+        <p:style>
+          <a:lnRef idx="1">
+            <a:schemeClr val="accent1"/>
+          </a:lnRef>
+          <a:fillRef idx="3">
+            <a:schemeClr val="accent1"/>
+          </a:fillRef>
+          <a:effectRef idx="2">
+            <a:schemeClr val="accent1"/>
+          </a:effectRef>
+          <a:fontRef idx="minor">
+            <a:schemeClr val="lt1"/>
+          </a:fontRef>
+        </p:style>
+        <p:txBody>
+          <a:bodyPr rtlCol="0" anchor="ctr"/>
+          <a:lstStyle/>
+          <a:p>
+            <a:pPr algn="ctr"/>
+          </a:p>
+        </p:txBody>
+      </p:sp>
+      <p:sp>
+        <p:nvSpPr>
+          <p:cNvPr id="16" name="TextBox 15"/>
+          <p:cNvSpPr txBox="1"/>
+          <p:nvPr/>
+        </p:nvSpPr>
+        <p:spPr>
+          <a:xfrm>
+            <a:off x="4361688" y="1655064"/>
+            <a:ext cx="2377440" cy="384048"/>
+          </a:xfrm>
+          <a:prstGeom prst="rect">
+            <a:avLst/>
+          </a:prstGeom>
+          <a:noFill/>
+        </p:spPr>
+        <p:txBody>
+          <a:bodyPr wrap="square" anchor="ctr">
+            <a:spAutoFit/>
+          </a:bodyPr>
+          <a:lstStyle/>
+          <a:p>
+            <a:pPr algn="l"/>
+            <a:r>
+              <a:rPr sz="1400" b="1" i="0">
+                <a:solidFill>
+                  <a:srgbClr val="FFFFFF"/>
+                </a:solidFill>
+              </a:rPr>
+              <a:t>Zamansal</a:t>
+            </a:r>
+          </a:p>
+        </p:txBody>
+      </p:sp>
+      <p:sp>
+        <p:nvSpPr>
+          <p:cNvPr id="17" name="Rectangle 16"/>
+          <p:cNvSpPr/>
+          <p:nvPr/>
+        </p:nvSpPr>
+        <p:spPr>
+          <a:xfrm>
+            <a:off x="6949440" y="1691640"/>
+            <a:ext cx="822960" cy="310896"/>
+          </a:xfrm>
+          <a:prstGeom prst="rect">
+            <a:avLst/>
+          </a:prstGeom>
+          <a:solidFill>
+            <a:srgbClr val="E0A800"/>
+          </a:solidFill>
+          <a:ln>
+            <a:noFill/>
+          </a:ln>
+        </p:spPr>
+        <p:style>
+          <a:lnRef idx="1">
+            <a:schemeClr val="accent1"/>
+          </a:lnRef>
+          <a:fillRef idx="3">
+            <a:schemeClr val="accent1"/>
+          </a:fillRef>
+          <a:effectRef idx="2">
+            <a:schemeClr val="accent1"/>
+          </a:effectRef>
+          <a:fontRef idx="minor">
+            <a:schemeClr val="lt1"/>
+          </a:fontRef>
+        </p:style>
+        <p:txBody>
+          <a:bodyPr rtlCol="0" anchor="ctr"/>
+          <a:lstStyle/>
+          <a:p>
+            <a:pPr algn="ctr"/>
+          </a:p>
+        </p:txBody>
+      </p:sp>
+      <p:sp>
+        <p:nvSpPr>
+          <p:cNvPr id="18" name="TextBox 17"/>
+          <p:cNvSpPr txBox="1"/>
+          <p:nvPr/>
+        </p:nvSpPr>
+        <p:spPr>
+          <a:xfrm>
+            <a:off x="6949440" y="1709928"/>
+            <a:ext cx="822960" cy="274320"/>
+          </a:xfrm>
+          <a:prstGeom prst="rect">
+            <a:avLst/>
+          </a:prstGeom>
+          <a:noFill/>
+        </p:spPr>
+        <p:txBody>
+          <a:bodyPr wrap="square" anchor="ctr">
+            <a:spAutoFit/>
+          </a:bodyPr>
+          <a:lstStyle/>
+          <a:p>
+            <a:pPr algn="ctr"/>
+            <a:r>
+              <a:rPr sz="1000" b="1" i="0">
+                <a:solidFill>
+                  <a:srgbClr val="0D2B55"/>
+                </a:solidFill>
+              </a:rPr>
+              <a:t>10 boyut</a:t>
+            </a:r>
+          </a:p>
+        </p:txBody>
+      </p:sp>
+      <p:sp>
+        <p:nvSpPr>
+          <p:cNvPr id="19" name="TextBox 18"/>
+          <p:cNvSpPr txBox="1"/>
+          <p:nvPr/>
+        </p:nvSpPr>
+        <p:spPr>
+          <a:xfrm>
+            <a:off x="4361688" y="2194560"/>
+            <a:ext cx="3429000" cy="1005840"/>
+          </a:xfrm>
+          <a:prstGeom prst="rect">
+            <a:avLst/>
+          </a:prstGeom>
+          <a:noFill/>
+        </p:spPr>
+        <p:txBody>
+          <a:bodyPr wrap="square">
+            <a:spAutoFit/>
+          </a:bodyPr>
+          <a:lstStyle/>
+          <a:p>
+            <a:pPr algn="l"/>
+            <a:r>
+              <a:rPr sz="1100" b="0" i="0">
+                <a:solidFill>
+                  <a:srgbClr val="2A2A2A"/>
+                </a:solidFill>
+              </a:rPr>
+              <a:t>RMS enerjisi, sıfır geçiş hızı,
+dinamik aralık türevleri</a:t>
+            </a:r>
+          </a:p>
+        </p:txBody>
+      </p:sp>
+      <p:sp>
+        <p:nvSpPr>
+          <p:cNvPr id="20" name="TextBox 19"/>
+          <p:cNvSpPr txBox="1"/>
+          <p:nvPr/>
+        </p:nvSpPr>
+        <p:spPr>
+          <a:xfrm>
+            <a:off x="4361688" y="3291840"/>
+            <a:ext cx="3429000" cy="365760"/>
+          </a:xfrm>
+          <a:prstGeom prst="rect">
+            <a:avLst/>
+          </a:prstGeom>
+          <a:noFill/>
+        </p:spPr>
+        <p:txBody>
+          <a:bodyPr wrap="square">
+            <a:spAutoFit/>
+          </a:bodyPr>
+          <a:lstStyle/>
+          <a:p>
+            <a:pPr algn="l"/>
+            <a:r>
+              <a:rPr sz="1050" b="0" i="1">
+                <a:solidFill>
+                  <a:srgbClr val="007A87"/>
+                </a:solidFill>
+              </a:rPr>
+              <a:t>▸ Enerji ve zaman yapısı</a:t>
+            </a:r>
+          </a:p>
+        </p:txBody>
+      </p:sp>
+      <p:sp>
+        <p:nvSpPr>
+          <p:cNvPr id="21" name="Rectangle 20"/>
+          <p:cNvSpPr/>
+          <p:nvPr/>
+        </p:nvSpPr>
+        <p:spPr>
+          <a:xfrm>
+            <a:off x="8138160" y="1600200"/>
+            <a:ext cx="3657600" cy="2103120"/>
+          </a:xfrm>
+          <a:prstGeom prst="rect">
+            <a:avLst/>
+          </a:prstGeom>
+          <a:solidFill>
+            <a:srgbClr val="FFFFFF"/>
+          </a:solidFill>
+          <a:ln w="13970">
+            <a:solidFill>
+              <a:srgbClr val="007A87"/>
+            </a:solidFill>
+          </a:ln>
+        </p:spPr>
+        <p:style>
+          <a:lnRef idx="1">
+            <a:schemeClr val="accent1"/>
+          </a:lnRef>
+          <a:fillRef idx="3">
+            <a:schemeClr val="accent1"/>
+          </a:fillRef>
+          <a:effectRef idx="2">
+            <a:schemeClr val="accent1"/>
+          </a:effectRef>
+          <a:fontRef idx="minor">
+            <a:schemeClr val="lt1"/>
+          </a:fontRef>
+        </p:style>
+        <p:txBody>
+          <a:bodyPr rtlCol="0" anchor="ctr"/>
+          <a:lstStyle/>
+          <a:p>
+            <a:pPr algn="ctr"/>
+          </a:p>
+        </p:txBody>
+      </p:sp>
+      <p:sp>
+        <p:nvSpPr>
+          <p:cNvPr id="22" name="Rectangle 21"/>
+          <p:cNvSpPr/>
+          <p:nvPr/>
+        </p:nvSpPr>
+        <p:spPr>
+          <a:xfrm>
+            <a:off x="8138160" y="1600200"/>
+            <a:ext cx="3657600" cy="502920"/>
+          </a:xfrm>
+          <a:prstGeom prst="rect">
+            <a:avLst/>
+          </a:prstGeom>
+          <a:solidFill>
+            <a:srgbClr val="007A87"/>
+          </a:solidFill>
+          <a:ln>
+            <a:noFill/>
+          </a:ln>
+        </p:spPr>
+        <p:style>
+          <a:lnRef idx="1">
+            <a:schemeClr val="accent1"/>
+          </a:lnRef>
+          <a:fillRef idx="3">
+            <a:schemeClr val="accent1"/>
+          </a:fillRef>
+          <a:effectRef idx="2">
+            <a:schemeClr val="accent1"/>
+          </a:effectRef>
+          <a:fontRef idx="minor">
+            <a:schemeClr val="lt1"/>
+          </a:fontRef>
+        </p:style>
+        <p:txBody>
+          <a:bodyPr rtlCol="0" anchor="ctr"/>
+          <a:lstStyle/>
+          <a:p>
+            <a:pPr algn="ctr"/>
+          </a:p>
+        </p:txBody>
+      </p:sp>
+      <p:sp>
+        <p:nvSpPr>
+          <p:cNvPr id="23" name="TextBox 22"/>
+          <p:cNvSpPr txBox="1"/>
+          <p:nvPr/>
+        </p:nvSpPr>
+        <p:spPr>
+          <a:xfrm>
+            <a:off x="8247888" y="1655064"/>
+            <a:ext cx="2377440" cy="384048"/>
+          </a:xfrm>
+          <a:prstGeom prst="rect">
+            <a:avLst/>
+          </a:prstGeom>
+          <a:noFill/>
+        </p:spPr>
+        <p:txBody>
+          <a:bodyPr wrap="square" anchor="ctr">
+            <a:spAutoFit/>
+          </a:bodyPr>
+          <a:lstStyle/>
+          <a:p>
+            <a:pPr algn="l"/>
+            <a:r>
+              <a:rPr sz="1400" b="1" i="0">
+                <a:solidFill>
+                  <a:srgbClr val="FFFFFF"/>
+                </a:solidFill>
+              </a:rPr>
+              <a:t>Ritmik</a:t>
+            </a:r>
+          </a:p>
+        </p:txBody>
+      </p:sp>
+      <p:sp>
+        <p:nvSpPr>
+          <p:cNvPr id="24" name="Rectangle 23"/>
+          <p:cNvSpPr/>
+          <p:nvPr/>
+        </p:nvSpPr>
+        <p:spPr>
+          <a:xfrm>
+            <a:off x="10835640" y="1691640"/>
+            <a:ext cx="822960" cy="310896"/>
+          </a:xfrm>
+          <a:prstGeom prst="rect">
+            <a:avLst/>
+          </a:prstGeom>
+          <a:solidFill>
+            <a:srgbClr val="E0A800"/>
+          </a:solidFill>
+          <a:ln>
+            <a:noFill/>
+          </a:ln>
+        </p:spPr>
+        <p:style>
+          <a:lnRef idx="1">
+            <a:schemeClr val="accent1"/>
+          </a:lnRef>
+          <a:fillRef idx="3">
+            <a:schemeClr val="accent1"/>
+          </a:fillRef>
+          <a:effectRef idx="2">
+            <a:schemeClr val="accent1"/>
+          </a:effectRef>
+          <a:fontRef idx="minor">
+            <a:schemeClr val="lt1"/>
+          </a:fontRef>
+        </p:style>
+        <p:txBody>
+          <a:bodyPr rtlCol="0" anchor="ctr"/>
+          <a:lstStyle/>
+          <a:p>
+            <a:pPr algn="ctr"/>
+          </a:p>
+        </p:txBody>
+      </p:sp>
+      <p:sp>
+        <p:nvSpPr>
+          <p:cNvPr id="25" name="TextBox 24"/>
+          <p:cNvSpPr txBox="1"/>
+          <p:nvPr/>
+        </p:nvSpPr>
+        <p:spPr>
+          <a:xfrm>
+            <a:off x="10835640" y="1709928"/>
+            <a:ext cx="822960" cy="274320"/>
+          </a:xfrm>
+          <a:prstGeom prst="rect">
+            <a:avLst/>
+          </a:prstGeom>
+          <a:noFill/>
+        </p:spPr>
+        <p:txBody>
+          <a:bodyPr wrap="square" anchor="ctr">
+            <a:spAutoFit/>
+          </a:bodyPr>
+          <a:lstStyle/>
+          <a:p>
+            <a:pPr algn="ctr"/>
+            <a:r>
+              <a:rPr sz="1000" b="1" i="0">
+                <a:solidFill>
+                  <a:srgbClr val="0D2B55"/>
+                </a:solidFill>
+              </a:rPr>
+              <a:t>9 boyut</a:t>
+            </a:r>
+          </a:p>
+        </p:txBody>
+      </p:sp>
+      <p:sp>
+        <p:nvSpPr>
+          <p:cNvPr id="26" name="TextBox 25"/>
+          <p:cNvSpPr txBox="1"/>
+          <p:nvPr/>
+        </p:nvSpPr>
+        <p:spPr>
+          <a:xfrm>
+            <a:off x="8247888" y="2194560"/>
+            <a:ext cx="3429000" cy="1005840"/>
+          </a:xfrm>
+          <a:prstGeom prst="rect">
+            <a:avLst/>
+          </a:prstGeom>
+          <a:noFill/>
+        </p:spPr>
+        <p:txBody>
+          <a:bodyPr wrap="square">
+            <a:spAutoFit/>
+          </a:bodyPr>
+          <a:lstStyle/>
+          <a:p>
+            <a:pPr algn="l"/>
+            <a:r>
+              <a:rPr sz="1100" b="0" i="0">
+                <a:solidFill>
+                  <a:srgbClr val="2A2A2A"/>
+                </a:solidFill>
+              </a:rPr>
+              <a:t>Tempo, beat sayısı,
+onset gücü istatistikleri</a:t>
+            </a:r>
+          </a:p>
+        </p:txBody>
+      </p:sp>
+      <p:sp>
+        <p:nvSpPr>
+          <p:cNvPr id="27" name="TextBox 26"/>
+          <p:cNvSpPr txBox="1"/>
+          <p:nvPr/>
+        </p:nvSpPr>
+        <p:spPr>
+          <a:xfrm>
+            <a:off x="8247888" y="3291840"/>
+            <a:ext cx="3429000" cy="365760"/>
+          </a:xfrm>
+          <a:prstGeom prst="rect">
+            <a:avLst/>
+          </a:prstGeom>
+          <a:noFill/>
+        </p:spPr>
+        <p:txBody>
+          <a:bodyPr wrap="square">
+            <a:spAutoFit/>
+          </a:bodyPr>
+          <a:lstStyle/>
+          <a:p>
+            <a:pPr algn="l"/>
+            <a:r>
+              <a:rPr sz="1050" b="0" i="1">
+                <a:solidFill>
+                  <a:srgbClr val="007A87"/>
+                </a:solidFill>
+              </a:rPr>
+              <a:t>▸ Ritim ve vuruş düzeni</a:t>
+            </a:r>
+          </a:p>
+        </p:txBody>
+      </p:sp>
+      <p:sp>
+        <p:nvSpPr>
+          <p:cNvPr id="28" name="Rectangle 27"/>
+          <p:cNvSpPr/>
+          <p:nvPr/>
+        </p:nvSpPr>
+        <p:spPr>
+          <a:xfrm>
+            <a:off x="365760" y="3886200"/>
+            <a:ext cx="3657600" cy="2103120"/>
+          </a:xfrm>
+          <a:prstGeom prst="rect">
+            <a:avLst/>
+          </a:prstGeom>
+          <a:solidFill>
+            <a:srgbClr val="FFFFFF"/>
+          </a:solidFill>
+          <a:ln w="13970">
+            <a:solidFill>
+              <a:srgbClr val="007A87"/>
+            </a:solidFill>
+          </a:ln>
+        </p:spPr>
+        <p:style>
+          <a:lnRef idx="1">
+            <a:schemeClr val="accent1"/>
+          </a:lnRef>
+          <a:fillRef idx="3">
+            <a:schemeClr val="accent1"/>
+          </a:fillRef>
+          <a:effectRef idx="2">
+            <a:schemeClr val="accent1"/>
+          </a:effectRef>
+          <a:fontRef idx="minor">
+            <a:schemeClr val="lt1"/>
+          </a:fontRef>
+        </p:style>
+        <p:txBody>
+          <a:bodyPr rtlCol="0" anchor="ctr"/>
+          <a:lstStyle/>
+          <a:p>
+            <a:pPr algn="ctr"/>
+          </a:p>
+        </p:txBody>
+      </p:sp>
+      <p:sp>
+        <p:nvSpPr>
+          <p:cNvPr id="29" name="Rectangle 28"/>
+          <p:cNvSpPr/>
+          <p:nvPr/>
+        </p:nvSpPr>
+        <p:spPr>
+          <a:xfrm>
+            <a:off x="365760" y="3886200"/>
+            <a:ext cx="3657600" cy="502920"/>
+          </a:xfrm>
+          <a:prstGeom prst="rect">
+            <a:avLst/>
+          </a:prstGeom>
+          <a:solidFill>
+            <a:srgbClr val="007A87"/>
+          </a:solidFill>
+          <a:ln>
+            <a:noFill/>
+          </a:ln>
+        </p:spPr>
+        <p:style>
+          <a:lnRef idx="1">
+            <a:schemeClr val="accent1"/>
+          </a:lnRef>
+          <a:fillRef idx="3">
+            <a:schemeClr val="accent1"/>
+          </a:fillRef>
+          <a:effectRef idx="2">
+            <a:schemeClr val="accent1"/>
+          </a:effectRef>
+          <a:fontRef idx="minor">
+            <a:schemeClr val="lt1"/>
+          </a:fontRef>
+        </p:style>
+        <p:txBody>
+          <a:bodyPr rtlCol="0" anchor="ctr"/>
+          <a:lstStyle/>
+          <a:p>
+            <a:pPr algn="ctr"/>
+          </a:p>
+        </p:txBody>
+      </p:sp>
+      <p:sp>
+        <p:nvSpPr>
+          <p:cNvPr id="30" name="TextBox 29"/>
+          <p:cNvSpPr txBox="1"/>
+          <p:nvPr/>
+        </p:nvSpPr>
+        <p:spPr>
+          <a:xfrm>
+            <a:off x="475488" y="3941063"/>
+            <a:ext cx="2377440" cy="384048"/>
+          </a:xfrm>
+          <a:prstGeom prst="rect">
+            <a:avLst/>
+          </a:prstGeom>
+          <a:noFill/>
+        </p:spPr>
+        <p:txBody>
+          <a:bodyPr wrap="square" anchor="ctr">
+            <a:spAutoFit/>
+          </a:bodyPr>
+          <a:lstStyle/>
+          <a:p>
+            <a:pPr algn="l"/>
+            <a:r>
+              <a:rPr sz="1400" b="1" i="0">
+                <a:solidFill>
+                  <a:srgbClr val="FFFFFF"/>
+                </a:solidFill>
+              </a:rPr>
+              <a:t>Harmonik</a:t>
+            </a:r>
+          </a:p>
+        </p:txBody>
+      </p:sp>
+      <p:sp>
+        <p:nvSpPr>
+          <p:cNvPr id="31" name="Rectangle 30"/>
+          <p:cNvSpPr/>
+          <p:nvPr/>
+        </p:nvSpPr>
+        <p:spPr>
+          <a:xfrm>
+            <a:off x="3063240" y="3977639"/>
+            <a:ext cx="822960" cy="310896"/>
+          </a:xfrm>
+          <a:prstGeom prst="rect">
+            <a:avLst/>
+          </a:prstGeom>
+          <a:solidFill>
+            <a:srgbClr val="E0A800"/>
+          </a:solidFill>
+          <a:ln>
+            <a:noFill/>
+          </a:ln>
+        </p:spPr>
+        <p:style>
+          <a:lnRef idx="1">
+            <a:schemeClr val="accent1"/>
+          </a:lnRef>
+          <a:fillRef idx="3">
+            <a:schemeClr val="accent1"/>
+          </a:fillRef>
+          <a:effectRef idx="2">
+            <a:schemeClr val="accent1"/>
+          </a:effectRef>
+          <a:fontRef idx="minor">
+            <a:schemeClr val="lt1"/>
+          </a:fontRef>
+        </p:style>
+        <p:txBody>
+          <a:bodyPr rtlCol="0" anchor="ctr"/>
+          <a:lstStyle/>
+          <a:p>
+            <a:pPr algn="ctr"/>
+          </a:p>
+        </p:txBody>
+      </p:sp>
+      <p:sp>
+        <p:nvSpPr>
+          <p:cNvPr id="32" name="TextBox 31"/>
+          <p:cNvSpPr txBox="1"/>
+          <p:nvPr/>
+        </p:nvSpPr>
+        <p:spPr>
+          <a:xfrm>
+            <a:off x="3063240" y="3995927"/>
+            <a:ext cx="822960" cy="274320"/>
+          </a:xfrm>
+          <a:prstGeom prst="rect">
+            <a:avLst/>
+          </a:prstGeom>
+          <a:noFill/>
+        </p:spPr>
+        <p:txBody>
+          <a:bodyPr wrap="square" anchor="ctr">
+            <a:spAutoFit/>
+          </a:bodyPr>
+          <a:lstStyle/>
+          <a:p>
+            <a:pPr algn="ctr"/>
+            <a:r>
+              <a:rPr sz="1000" b="1" i="0">
+                <a:solidFill>
+                  <a:srgbClr val="0D2B55"/>
+                </a:solidFill>
+              </a:rPr>
+              <a:t>8 boyut</a:t>
+            </a:r>
+          </a:p>
+        </p:txBody>
+      </p:sp>
+      <p:sp>
+        <p:nvSpPr>
+          <p:cNvPr id="33" name="TextBox 32"/>
+          <p:cNvSpPr txBox="1"/>
+          <p:nvPr/>
+        </p:nvSpPr>
+        <p:spPr>
+          <a:xfrm>
+            <a:off x="475488" y="4480560"/>
+            <a:ext cx="3429000" cy="1005840"/>
+          </a:xfrm>
+          <a:prstGeom prst="rect">
+            <a:avLst/>
+          </a:prstGeom>
+          <a:noFill/>
+        </p:spPr>
+        <p:txBody>
+          <a:bodyPr wrap="square">
+            <a:spAutoFit/>
+          </a:bodyPr>
+          <a:lstStyle/>
+          <a:p>
+            <a:pPr algn="l"/>
+            <a:r>
+              <a:rPr sz="1100" b="0" i="0">
+                <a:solidFill>
+                  <a:srgbClr val="2A2A2A"/>
+                </a:solidFill>
+              </a:rPr>
+              <a:t>Chroma vektörü, tonnetz,
+harmonik-algısal ayrıştırma</a:t>
+            </a:r>
+          </a:p>
+        </p:txBody>
+      </p:sp>
+      <p:sp>
+        <p:nvSpPr>
+          <p:cNvPr id="34" name="TextBox 33"/>
+          <p:cNvSpPr txBox="1"/>
+          <p:nvPr/>
+        </p:nvSpPr>
+        <p:spPr>
+          <a:xfrm>
+            <a:off x="475488" y="5577840"/>
+            <a:ext cx="3429000" cy="365760"/>
+          </a:xfrm>
+          <a:prstGeom prst="rect">
+            <a:avLst/>
+          </a:prstGeom>
+          <a:noFill/>
+        </p:spPr>
+        <p:txBody>
+          <a:bodyPr wrap="square">
+            <a:spAutoFit/>
+          </a:bodyPr>
+          <a:lstStyle/>
+          <a:p>
+            <a:pPr algn="l"/>
+            <a:r>
+              <a:rPr sz="1050" b="0" i="1">
+                <a:solidFill>
+                  <a:srgbClr val="007A87"/>
+                </a:solidFill>
+              </a:rPr>
+              <a:t>▸ Perde ve akor yapısı</a:t>
+            </a:r>
+          </a:p>
+        </p:txBody>
+      </p:sp>
+      <p:sp>
+        <p:nvSpPr>
+          <p:cNvPr id="35" name="Rectangle 34"/>
+          <p:cNvSpPr/>
+          <p:nvPr/>
+        </p:nvSpPr>
+        <p:spPr>
+          <a:xfrm>
+            <a:off x="4251960" y="3886200"/>
+            <a:ext cx="3657600" cy="2103120"/>
+          </a:xfrm>
+          <a:prstGeom prst="rect">
+            <a:avLst/>
+          </a:prstGeom>
+          <a:solidFill>
+            <a:srgbClr val="FFFFFF"/>
+          </a:solidFill>
+          <a:ln w="13970">
+            <a:solidFill>
+              <a:srgbClr val="007A87"/>
+            </a:solidFill>
+          </a:ln>
+        </p:spPr>
+        <p:style>
+          <a:lnRef idx="1">
+            <a:schemeClr val="accent1"/>
+          </a:lnRef>
+          <a:fillRef idx="3">
+            <a:schemeClr val="accent1"/>
+          </a:fillRef>
+          <a:effectRef idx="2">
+            <a:schemeClr val="accent1"/>
+          </a:effectRef>
+          <a:fontRef idx="minor">
+            <a:schemeClr val="lt1"/>
+          </a:fontRef>
+        </p:style>
+        <p:txBody>
+          <a:bodyPr rtlCol="0" anchor="ctr"/>
+          <a:lstStyle/>
+          <a:p>
+            <a:pPr algn="ctr"/>
+          </a:p>
+        </p:txBody>
+      </p:sp>
+      <p:sp>
+        <p:nvSpPr>
+          <p:cNvPr id="36" name="Rectangle 35"/>
+          <p:cNvSpPr/>
+          <p:nvPr/>
+        </p:nvSpPr>
+        <p:spPr>
+          <a:xfrm>
+            <a:off x="4251960" y="3886200"/>
+            <a:ext cx="3657600" cy="502920"/>
+          </a:xfrm>
+          <a:prstGeom prst="rect">
+            <a:avLst/>
+          </a:prstGeom>
+          <a:solidFill>
+            <a:srgbClr val="007A87"/>
+          </a:solidFill>
+          <a:ln>
+            <a:noFill/>
+          </a:ln>
+        </p:spPr>
+        <p:style>
+          <a:lnRef idx="1">
+            <a:schemeClr val="accent1"/>
+          </a:lnRef>
+          <a:fillRef idx="3">
+            <a:schemeClr val="accent1"/>
+          </a:fillRef>
+          <a:effectRef idx="2">
+            <a:schemeClr val="accent1"/>
+          </a:effectRef>
+          <a:fontRef idx="minor">
+            <a:schemeClr val="lt1"/>
+          </a:fontRef>
+        </p:style>
+        <p:txBody>
+          <a:bodyPr rtlCol="0" anchor="ctr"/>
+          <a:lstStyle/>
+          <a:p>
+            <a:pPr algn="ctr"/>
+          </a:p>
+        </p:txBody>
+      </p:sp>
+      <p:sp>
+        <p:nvSpPr>
+          <p:cNvPr id="37" name="TextBox 36"/>
+          <p:cNvSpPr txBox="1"/>
+          <p:nvPr/>
+        </p:nvSpPr>
+        <p:spPr>
+          <a:xfrm>
+            <a:off x="4361688" y="3941063"/>
+            <a:ext cx="2377440" cy="384048"/>
+          </a:xfrm>
+          <a:prstGeom prst="rect">
+            <a:avLst/>
+          </a:prstGeom>
+          <a:noFill/>
+        </p:spPr>
+        <p:txBody>
+          <a:bodyPr wrap="square" anchor="ctr">
+            <a:spAutoFit/>
+          </a:bodyPr>
+          <a:lstStyle/>
+          <a:p>
+            <a:pPr algn="l"/>
+            <a:r>
+              <a:rPr sz="1400" b="1" i="0">
+                <a:solidFill>
+                  <a:srgbClr val="FFFFFF"/>
+                </a:solidFill>
+              </a:rPr>
+              <a:t>Vokal</a:t>
+            </a:r>
+          </a:p>
+        </p:txBody>
+      </p:sp>
+      <p:sp>
+        <p:nvSpPr>
+          <p:cNvPr id="38" name="Rectangle 37"/>
+          <p:cNvSpPr/>
+          <p:nvPr/>
+        </p:nvSpPr>
+        <p:spPr>
+          <a:xfrm>
+            <a:off x="6949440" y="3977639"/>
+            <a:ext cx="822960" cy="310896"/>
+          </a:xfrm>
+          <a:prstGeom prst="rect">
+            <a:avLst/>
+          </a:prstGeom>
+          <a:solidFill>
+            <a:srgbClr val="E0A800"/>
+          </a:solidFill>
+          <a:ln>
+            <a:noFill/>
+          </a:ln>
+        </p:spPr>
+        <p:style>
+          <a:lnRef idx="1">
+            <a:schemeClr val="accent1"/>
+          </a:lnRef>
+          <a:fillRef idx="3">
+            <a:schemeClr val="accent1"/>
+          </a:fillRef>
+          <a:effectRef idx="2">
+            <a:schemeClr val="accent1"/>
+          </a:effectRef>
+          <a:fontRef idx="minor">
+            <a:schemeClr val="lt1"/>
+          </a:fontRef>
+        </p:style>
+        <p:txBody>
+          <a:bodyPr rtlCol="0" anchor="ctr"/>
+          <a:lstStyle/>
+          <a:p>
+            <a:pPr algn="ctr"/>
+          </a:p>
+        </p:txBody>
+      </p:sp>
+      <p:sp>
+        <p:nvSpPr>
+          <p:cNvPr id="39" name="TextBox 38"/>
+          <p:cNvSpPr txBox="1"/>
+          <p:nvPr/>
+        </p:nvSpPr>
+        <p:spPr>
+          <a:xfrm>
+            <a:off x="6949440" y="3995927"/>
+            <a:ext cx="822960" cy="274320"/>
+          </a:xfrm>
+          <a:prstGeom prst="rect">
+            <a:avLst/>
+          </a:prstGeom>
+          <a:noFill/>
+        </p:spPr>
+        <p:txBody>
+          <a:bodyPr wrap="square" anchor="ctr">
+            <a:spAutoFit/>
+          </a:bodyPr>
+          <a:lstStyle/>
+          <a:p>
+            <a:pPr algn="ctr"/>
+            <a:r>
+              <a:rPr sz="1000" b="1" i="0">
+                <a:solidFill>
+                  <a:srgbClr val="0D2B55"/>
+                </a:solidFill>
+              </a:rPr>
+              <a:t>4 boyut</a:t>
+            </a:r>
+          </a:p>
+        </p:txBody>
+      </p:sp>
+      <p:sp>
+        <p:nvSpPr>
+          <p:cNvPr id="40" name="TextBox 39"/>
+          <p:cNvSpPr txBox="1"/>
+          <p:nvPr/>
+        </p:nvSpPr>
+        <p:spPr>
+          <a:xfrm>
+            <a:off x="4361688" y="4480560"/>
+            <a:ext cx="3429000" cy="1005840"/>
+          </a:xfrm>
+          <a:prstGeom prst="rect">
+            <a:avLst/>
+          </a:prstGeom>
+          <a:noFill/>
+        </p:spPr>
+        <p:txBody>
+          <a:bodyPr wrap="square">
+            <a:spAutoFit/>
+          </a:bodyPr>
+          <a:lstStyle/>
+          <a:p>
+            <a:pPr algn="l"/>
+            <a:r>
+              <a:rPr sz="1100" b="0" i="0">
+                <a:solidFill>
+                  <a:srgbClr val="2A2A2A"/>
+                </a:solidFill>
+              </a:rPr>
+              <a:t>Temel frekans, vibrato,
+formant tutarlılığı</a:t>
+            </a:r>
+          </a:p>
+        </p:txBody>
+      </p:sp>
+      <p:sp>
+        <p:nvSpPr>
+          <p:cNvPr id="41" name="TextBox 40"/>
+          <p:cNvSpPr txBox="1"/>
+          <p:nvPr/>
+        </p:nvSpPr>
+        <p:spPr>
+          <a:xfrm>
+            <a:off x="4361688" y="5577840"/>
+            <a:ext cx="3429000" cy="365760"/>
+          </a:xfrm>
+          <a:prstGeom prst="rect">
+            <a:avLst/>
+          </a:prstGeom>
+          <a:noFill/>
+        </p:spPr>
+        <p:txBody>
+          <a:bodyPr wrap="square">
+            <a:spAutoFit/>
+          </a:bodyPr>
+          <a:lstStyle/>
+          <a:p>
+            <a:pPr algn="l"/>
+            <a:r>
+              <a:rPr sz="1050" b="0" i="1">
+                <a:solidFill>
+                  <a:srgbClr val="007A87"/>
+                </a:solidFill>
+              </a:rPr>
+              <a:t>▸ Şarkı sesi davranışı</a:t>
+            </a:r>
+          </a:p>
+        </p:txBody>
+      </p:sp>
+      <p:sp>
+        <p:nvSpPr>
+          <p:cNvPr id="42" name="Rectangle 41"/>
+          <p:cNvSpPr/>
+          <p:nvPr/>
+        </p:nvSpPr>
+        <p:spPr>
+          <a:xfrm>
+            <a:off x="7909560" y="3886200"/>
+            <a:ext cx="3886200" cy="2103120"/>
+          </a:xfrm>
+          <a:prstGeom prst="rect">
+            <a:avLst/>
+          </a:prstGeom>
+          <a:solidFill>
+            <a:srgbClr val="0D2B55"/>
+          </a:solidFill>
+          <a:ln>
+            <a:noFill/>
+          </a:ln>
+        </p:spPr>
+        <p:style>
+          <a:lnRef idx="1">
+            <a:schemeClr val="accent1"/>
+          </a:lnRef>
+          <a:fillRef idx="3">
+            <a:schemeClr val="accent1"/>
+          </a:fillRef>
+          <a:effectRef idx="2">
+            <a:schemeClr val="accent1"/>
+          </a:effectRef>
+          <a:fontRef idx="minor">
+            <a:schemeClr val="lt1"/>
+          </a:fontRef>
+        </p:style>
+        <p:txBody>
+          <a:bodyPr rtlCol="0" anchor="ctr"/>
+          <a:lstStyle/>
+          <a:p>
+            <a:pPr algn="ctr"/>
+          </a:p>
+        </p:txBody>
+      </p:sp>
+      <p:sp>
+        <p:nvSpPr>
+          <p:cNvPr id="43" name="TextBox 42"/>
+          <p:cNvSpPr txBox="1"/>
+          <p:nvPr/>
+        </p:nvSpPr>
+        <p:spPr>
+          <a:xfrm>
+            <a:off x="8001000" y="4023360"/>
+            <a:ext cx="3703320" cy="457200"/>
+          </a:xfrm>
+          <a:prstGeom prst="rect">
+            <a:avLst/>
+          </a:prstGeom>
+          <a:noFill/>
+        </p:spPr>
+        <p:txBody>
+          <a:bodyPr wrap="square">
+            <a:spAutoFit/>
+          </a:bodyPr>
+          <a:lstStyle/>
+          <a:p>
+            <a:pPr algn="ctr"/>
+            <a:r>
+              <a:rPr sz="1400" b="0" i="0">
+                <a:solidFill>
+                  <a:srgbClr val="FFFFFF"/>
+                </a:solidFill>
+              </a:rPr>
+              <a:t>Toplam</a:t>
+            </a:r>
+          </a:p>
+        </p:txBody>
+      </p:sp>
+      <p:sp>
+        <p:nvSpPr>
+          <p:cNvPr id="44" name="TextBox 43"/>
+          <p:cNvSpPr txBox="1"/>
+          <p:nvPr/>
+        </p:nvSpPr>
+        <p:spPr>
+          <a:xfrm>
+            <a:off x="8001000" y="4389120"/>
+            <a:ext cx="3703320" cy="777240"/>
+          </a:xfrm>
+          <a:prstGeom prst="rect">
+            <a:avLst/>
+          </a:prstGeom>
+          <a:noFill/>
+        </p:spPr>
+        <p:txBody>
+          <a:bodyPr wrap="square">
+            <a:spAutoFit/>
+          </a:bodyPr>
+          <a:lstStyle/>
+          <a:p>
+            <a:pPr algn="ctr"/>
+            <a:r>
+              <a:rPr sz="3400" b="1" i="0">
+                <a:solidFill>
+                  <a:srgbClr val="E0A800"/>
+                </a:solidFill>
+              </a:rPr>
+              <a:t>47 boyut</a:t>
+            </a:r>
+          </a:p>
+        </p:txBody>
+      </p:sp>
+      <p:sp>
+        <p:nvSpPr>
+          <p:cNvPr id="45" name="TextBox 44"/>
+          <p:cNvSpPr txBox="1"/>
+          <p:nvPr/>
+        </p:nvSpPr>
+        <p:spPr>
+          <a:xfrm>
+            <a:off x="8001000" y="5212080"/>
+            <a:ext cx="3703320" cy="457200"/>
+          </a:xfrm>
+          <a:prstGeom prst="rect">
+            <a:avLst/>
+          </a:prstGeom>
+          <a:noFill/>
+        </p:spPr>
+        <p:txBody>
+          <a:bodyPr wrap="square">
+            <a:spAutoFit/>
+          </a:bodyPr>
+          <a:lstStyle/>
+          <a:p>
+            <a:pPr algn="ctr"/>
+            <a:r>
+              <a:rPr sz="1400" b="0" i="0">
+                <a:solidFill>
+                  <a:srgbClr val="AEC6D6"/>
+                </a:solidFill>
+              </a:rPr>
+              <a:t>16 + 10 + 9 + 8 + 4</a:t>
+            </a:r>
+          </a:p>
+        </p:txBody>
+      </p:sp>
+      <p:sp>
+        <p:nvSpPr>
+          <p:cNvPr id="46" name="TextBox 45"/>
+          <p:cNvSpPr txBox="1"/>
+          <p:nvPr/>
+        </p:nvSpPr>
+        <p:spPr>
+          <a:xfrm>
+            <a:off x="8001000" y="5623560"/>
+            <a:ext cx="3703320" cy="320040"/>
+          </a:xfrm>
+          <a:prstGeom prst="rect">
+            <a:avLst/>
+          </a:prstGeom>
+          <a:noFill/>
+        </p:spPr>
+        <p:txBody>
+          <a:bodyPr wrap="square">
+            <a:spAutoFit/>
+          </a:bodyPr>
+          <a:lstStyle/>
+          <a:p>
+            <a:pPr algn="ctr"/>
+            <a:r>
+              <a:rPr sz="1000" b="0" i="1">
+                <a:solidFill>
+                  <a:srgbClr val="88A8C0"/>
+                </a:solidFill>
+              </a:rPr>
+              <a:t>librosa ile çıkarıldı</a:t>
+            </a:r>
+          </a:p>
+        </p:txBody>
+      </p:sp>
+      <p:sp>
+        <p:nvSpPr>
+          <p:cNvPr id="47" name="TextBox 46"/>
+          <p:cNvSpPr txBox="1"/>
+          <p:nvPr/>
+        </p:nvSpPr>
+        <p:spPr>
+          <a:xfrm>
+            <a:off x="365760" y="6510528"/>
+            <a:ext cx="8229600" cy="301752"/>
+          </a:xfrm>
+          <a:prstGeom prst="rect">
+            <a:avLst/>
+          </a:prstGeom>
+          <a:noFill/>
+        </p:spPr>
+        <p:txBody>
+          <a:bodyPr wrap="square">
+            <a:spAutoFit/>
+          </a:bodyPr>
+          <a:lstStyle/>
+          <a:p>
+            <a:pPr algn="l"/>
+            <a:r>
+              <a:rPr sz="900" b="0" i="0">
+                <a:solidFill>
+                  <a:srgbClr val="66707A"/>
+                </a:solidFill>
+              </a:rPr>
+              <a:t>AURIS  ·  Hasan Arthur Altuntaş  ·  BM498 Mezuniyet Tezi</a:t>
+            </a:r>
+          </a:p>
+        </p:txBody>
+      </p:sp>
+      <p:sp>
+        <p:nvSpPr>
+          <p:cNvPr id="48" name="TextBox 47"/>
+          <p:cNvSpPr txBox="1"/>
+          <p:nvPr/>
+        </p:nvSpPr>
+        <p:spPr>
+          <a:xfrm>
+            <a:off x="8595360" y="6510528"/>
+            <a:ext cx="3200400" cy="301752"/>
+          </a:xfrm>
+          <a:prstGeom prst="rect">
+            <a:avLst/>
+          </a:prstGeom>
+          <a:noFill/>
+        </p:spPr>
+        <p:txBody>
+          <a:bodyPr wrap="square">
+            <a:spAutoFit/>
+          </a:bodyPr>
+          <a:lstStyle/>
+          <a:p>
+            <a:pPr algn="r"/>
+            <a:r>
+              <a:rPr sz="900" b="0" i="0">
+                <a:solidFill>
+                  <a:srgbClr val="66707A"/>
+                </a:solidFill>
+              </a:rPr>
+              <a:t>Düzce Üniversitesi · 2025-2026</a:t>
             </a:r>
           </a:p>
         </p:txBody>
@@ -4872,7 +9507,7 @@
         <p:spPr>
           <a:xfrm>
             <a:off x="0" y="0"/>
-            <a:ext cx="12188952" cy="457200"/>
+            <a:ext cx="12188952" cy="1371600"/>
           </a:xfrm>
           <a:prstGeom prst="rect">
             <a:avLst/>
@@ -4908,59 +9543,23 @@
       </p:sp>
       <p:sp>
         <p:nvSpPr>
-          <p:cNvPr id="3" name="TextBox 2"/>
-          <p:cNvSpPr txBox="1"/>
-          <p:nvPr/>
-        </p:nvSpPr>
-        <p:spPr>
-          <a:xfrm>
-            <a:off x="320040" y="64008"/>
-            <a:ext cx="11521440" cy="347472"/>
-          </a:xfrm>
-          <a:prstGeom prst="rect">
-            <a:avLst/>
-          </a:prstGeom>
-          <a:noFill/>
-        </p:spPr>
-        <p:txBody>
-          <a:bodyPr wrap="square">
-            <a:spAutoFit/>
-          </a:bodyPr>
-          <a:lstStyle/>
-          <a:p>
-            <a:pPr algn="l"/>
-            <a:r>
-              <a:rPr sz="1100" b="0">
-                <a:solidFill>
-                  <a:srgbClr val="FFFFFF"/>
-                </a:solidFill>
-              </a:rPr>
-              <a:t>BM498 — 03: Tasarım ve Geliştirme Sunumu</a:t>
-            </a:r>
-          </a:p>
-        </p:txBody>
-      </p:sp>
-      <p:sp>
-        <p:nvSpPr>
-          <p:cNvPr id="4" name="Rectangle 3"/>
+          <p:cNvPr id="3" name="Rectangle 2"/>
           <p:cNvSpPr/>
           <p:nvPr/>
         </p:nvSpPr>
         <p:spPr>
           <a:xfrm>
-            <a:off x="2286000" y="1005840"/>
-            <a:ext cx="7589520" cy="5394960"/>
+            <a:off x="0" y="1371600"/>
+            <a:ext cx="12188952" cy="54864"/>
           </a:xfrm>
           <a:prstGeom prst="rect">
             <a:avLst/>
           </a:prstGeom>
           <a:solidFill>
-            <a:srgbClr val="FFFFFF"/>
+            <a:srgbClr val="E0A800"/>
           </a:solidFill>
           <a:ln>
-            <a:solidFill>
-              <a:srgbClr val="007A87"/>
-            </a:solidFill>
+            <a:noFill/>
           </a:ln>
         </p:spPr>
         <p:style>
@@ -4987,14 +9586,48 @@
       </p:sp>
       <p:sp>
         <p:nvSpPr>
+          <p:cNvPr id="4" name="TextBox 3"/>
+          <p:cNvSpPr txBox="1"/>
+          <p:nvPr/>
+        </p:nvSpPr>
+        <p:spPr>
+          <a:xfrm>
+            <a:off x="365760" y="109728"/>
+            <a:ext cx="11430000" cy="320040"/>
+          </a:xfrm>
+          <a:prstGeom prst="rect">
+            <a:avLst/>
+          </a:prstGeom>
+          <a:noFill/>
+        </p:spPr>
+        <p:txBody>
+          <a:bodyPr wrap="square">
+            <a:spAutoFit/>
+          </a:bodyPr>
+          <a:lstStyle/>
+          <a:p>
+            <a:pPr algn="l"/>
+            <a:r>
+              <a:rPr sz="1100" b="1" i="0">
+                <a:solidFill>
+                  <a:srgbClr val="E0A800"/>
+                </a:solidFill>
+              </a:rPr>
+              <a:t>ÖZNITELIK ANALIZI</a:t>
+            </a:r>
+          </a:p>
+        </p:txBody>
+      </p:sp>
+      <p:sp>
+        <p:nvSpPr>
           <p:cNvPr id="5" name="TextBox 4"/>
           <p:cNvSpPr txBox="1"/>
           <p:nvPr/>
         </p:nvSpPr>
         <p:spPr>
           <a:xfrm>
-            <a:off x="2377440" y="1115568"/>
-            <a:ext cx="7406640" cy="548640"/>
+            <a:off x="365760" y="402336"/>
+            <a:ext cx="11430000" cy="640080"/>
           </a:xfrm>
           <a:prstGeom prst="rect">
             <a:avLst/>
@@ -5007,32 +9640,2170 @@
           </a:bodyPr>
           <a:lstStyle/>
           <a:p>
-            <a:pPr algn="ctr"/>
-            <a:r>
-              <a:rPr sz="1700" b="1">
+            <a:pPr algn="l"/>
+            <a:r>
+              <a:rPr sz="2400" b="1" i="0">
+                <a:solidFill>
+                  <a:srgbClr val="FFFFFF"/>
+                </a:solidFill>
+              </a:rPr>
+              <a:t>YZ ve İnsan Müziğinin Dağılım Farkları</a:t>
+            </a:r>
+          </a:p>
+        </p:txBody>
+      </p:sp>
+      <p:pic>
+        <p:nvPicPr>
+          <p:cNvPr id="6" name="Picture 5" descr="feature_distribution_ai_vs_human.png"/>
+          <p:cNvPicPr>
+            <a:picLocks noChangeAspect="1"/>
+          </p:cNvPicPr>
+          <p:nvPr/>
+        </p:nvPicPr>
+        <p:blipFill>
+          <a:blip r:embed="rId2"/>
+          <a:stretch>
+            <a:fillRect/>
+          </a:stretch>
+        </p:blipFill>
+        <p:spPr>
+          <a:xfrm>
+            <a:off x="365760" y="1600200"/>
+            <a:ext cx="7589520" cy="4434840"/>
+          </a:xfrm>
+          <a:prstGeom prst="rect">
+            <a:avLst/>
+          </a:prstGeom>
+        </p:spPr>
+      </p:pic>
+      <p:sp>
+        <p:nvSpPr>
+          <p:cNvPr id="7" name="TextBox 6"/>
+          <p:cNvSpPr txBox="1"/>
+          <p:nvPr/>
+        </p:nvSpPr>
+        <p:spPr>
+          <a:xfrm>
+            <a:off x="365760" y="6071616"/>
+            <a:ext cx="7589520" cy="292608"/>
+          </a:xfrm>
+          <a:prstGeom prst="rect">
+            <a:avLst/>
+          </a:prstGeom>
+          <a:noFill/>
+        </p:spPr>
+        <p:txBody>
+          <a:bodyPr wrap="square">
+            <a:spAutoFit/>
+          </a:bodyPr>
+          <a:lstStyle/>
+          <a:p>
+            <a:pPr algn="ctr"/>
+            <a:r>
+              <a:rPr sz="1000" b="0" i="1">
+                <a:solidFill>
+                  <a:srgbClr val="66707A"/>
+                </a:solidFill>
+              </a:rPr>
+              <a:t>Şekil 2: İlk sekiz özniteliğin sınıf bazlı dağılımları</a:t>
+            </a:r>
+          </a:p>
+        </p:txBody>
+      </p:sp>
+      <p:sp>
+        <p:nvSpPr>
+          <p:cNvPr id="8" name="Rectangle 7"/>
+          <p:cNvSpPr/>
+          <p:nvPr/>
+        </p:nvSpPr>
+        <p:spPr>
+          <a:xfrm>
+            <a:off x="8138160" y="1600200"/>
+            <a:ext cx="3703320" cy="4434840"/>
+          </a:xfrm>
+          <a:prstGeom prst="rect">
+            <a:avLst/>
+          </a:prstGeom>
+          <a:solidFill>
+            <a:srgbClr val="E0F0F2"/>
+          </a:solidFill>
+          <a:ln>
+            <a:noFill/>
+          </a:ln>
+        </p:spPr>
+        <p:style>
+          <a:lnRef idx="1">
+            <a:schemeClr val="accent1"/>
+          </a:lnRef>
+          <a:fillRef idx="3">
+            <a:schemeClr val="accent1"/>
+          </a:fillRef>
+          <a:effectRef idx="2">
+            <a:schemeClr val="accent1"/>
+          </a:effectRef>
+          <a:fontRef idx="minor">
+            <a:schemeClr val="lt1"/>
+          </a:fontRef>
+        </p:style>
+        <p:txBody>
+          <a:bodyPr rtlCol="0" anchor="ctr"/>
+          <a:lstStyle/>
+          <a:p>
+            <a:pPr algn="ctr"/>
+          </a:p>
+        </p:txBody>
+      </p:sp>
+      <p:sp>
+        <p:nvSpPr>
+          <p:cNvPr id="9" name="Rectangle 8"/>
+          <p:cNvSpPr/>
+          <p:nvPr/>
+        </p:nvSpPr>
+        <p:spPr>
+          <a:xfrm>
+            <a:off x="8138160" y="1600200"/>
+            <a:ext cx="82296" cy="4434840"/>
+          </a:xfrm>
+          <a:prstGeom prst="rect">
+            <a:avLst/>
+          </a:prstGeom>
+          <a:solidFill>
+            <a:srgbClr val="007A87"/>
+          </a:solidFill>
+          <a:ln>
+            <a:noFill/>
+          </a:ln>
+        </p:spPr>
+        <p:style>
+          <a:lnRef idx="1">
+            <a:schemeClr val="accent1"/>
+          </a:lnRef>
+          <a:fillRef idx="3">
+            <a:schemeClr val="accent1"/>
+          </a:fillRef>
+          <a:effectRef idx="2">
+            <a:schemeClr val="accent1"/>
+          </a:effectRef>
+          <a:fontRef idx="minor">
+            <a:schemeClr val="lt1"/>
+          </a:fontRef>
+        </p:style>
+        <p:txBody>
+          <a:bodyPr rtlCol="0" anchor="ctr"/>
+          <a:lstStyle/>
+          <a:p>
+            <a:pPr algn="ctr"/>
+          </a:p>
+        </p:txBody>
+      </p:sp>
+      <p:sp>
+        <p:nvSpPr>
+          <p:cNvPr id="10" name="TextBox 9"/>
+          <p:cNvSpPr txBox="1"/>
+          <p:nvPr/>
+        </p:nvSpPr>
+        <p:spPr>
+          <a:xfrm>
+            <a:off x="8339328" y="1709928"/>
+            <a:ext cx="3383279" cy="365760"/>
+          </a:xfrm>
+          <a:prstGeom prst="rect">
+            <a:avLst/>
+          </a:prstGeom>
+          <a:noFill/>
+        </p:spPr>
+        <p:txBody>
+          <a:bodyPr wrap="square">
+            <a:spAutoFit/>
+          </a:bodyPr>
+          <a:lstStyle/>
+          <a:p>
+            <a:pPr algn="l"/>
+            <a:r>
+              <a:rPr sz="1300" b="1" i="0">
                 <a:solidFill>
                   <a:srgbClr val="0D2B55"/>
                 </a:solidFill>
               </a:rPr>
-              <a:t>ÖĞRENCİ İMZA SAYFASI</a:t>
-            </a:r>
-          </a:p>
-        </p:txBody>
-      </p:sp>
-      <p:sp>
-        <p:nvSpPr>
-          <p:cNvPr id="6" name="Rectangle 5"/>
+              <a:t>Yorum</a:t>
+            </a:r>
+          </a:p>
+        </p:txBody>
+      </p:sp>
+      <p:sp>
+        <p:nvSpPr>
+          <p:cNvPr id="11" name="TextBox 10"/>
+          <p:cNvSpPr txBox="1"/>
+          <p:nvPr/>
+        </p:nvSpPr>
+        <p:spPr>
+          <a:xfrm>
+            <a:off x="8339328" y="2103120"/>
+            <a:ext cx="3383279" cy="3840479"/>
+          </a:xfrm>
+          <a:prstGeom prst="rect">
+            <a:avLst/>
+          </a:prstGeom>
+          <a:noFill/>
+        </p:spPr>
+        <p:txBody>
+          <a:bodyPr wrap="square">
+            <a:spAutoFit/>
+          </a:bodyPr>
+          <a:lstStyle/>
+          <a:p>
+            <a:pPr algn="l"/>
+            <a:r>
+              <a:rPr sz="1200" b="0" i="0">
+                <a:solidFill>
+                  <a:srgbClr val="2A2A2A"/>
+                </a:solidFill>
+              </a:rPr>
+              <a:t>YZ üretimi parçalar belirli özniteliklerde insan kayıtlarından sistematik biçimde ayrışıyor.
+Özellikle spectral_flatness değerleri YZ müziğinde daha düzenli ve yüksek — bu, üretim sistemlerinin algısal kaliteyi optimize ederken daha 'düz' bir spektrum bırakmasından kaynaklanıyor.
+Bu görsel ayrım, sonradan SHAP analiziyle de doğrulanan en güçlü ayırt edici özelliğin temelini oluşturuyor.</a:t>
+            </a:r>
+          </a:p>
+        </p:txBody>
+      </p:sp>
+      <p:sp>
+        <p:nvSpPr>
+          <p:cNvPr id="12" name="TextBox 11"/>
+          <p:cNvSpPr txBox="1"/>
+          <p:nvPr/>
+        </p:nvSpPr>
+        <p:spPr>
+          <a:xfrm>
+            <a:off x="365760" y="6510528"/>
+            <a:ext cx="8229600" cy="301752"/>
+          </a:xfrm>
+          <a:prstGeom prst="rect">
+            <a:avLst/>
+          </a:prstGeom>
+          <a:noFill/>
+        </p:spPr>
+        <p:txBody>
+          <a:bodyPr wrap="square">
+            <a:spAutoFit/>
+          </a:bodyPr>
+          <a:lstStyle/>
+          <a:p>
+            <a:pPr algn="l"/>
+            <a:r>
+              <a:rPr sz="900" b="0" i="0">
+                <a:solidFill>
+                  <a:srgbClr val="66707A"/>
+                </a:solidFill>
+              </a:rPr>
+              <a:t>AURIS  ·  Hasan Arthur Altuntaş  ·  BM498 Mezuniyet Tezi</a:t>
+            </a:r>
+          </a:p>
+        </p:txBody>
+      </p:sp>
+      <p:sp>
+        <p:nvSpPr>
+          <p:cNvPr id="13" name="TextBox 12"/>
+          <p:cNvSpPr txBox="1"/>
+          <p:nvPr/>
+        </p:nvSpPr>
+        <p:spPr>
+          <a:xfrm>
+            <a:off x="8595360" y="6510528"/>
+            <a:ext cx="3200400" cy="301752"/>
+          </a:xfrm>
+          <a:prstGeom prst="rect">
+            <a:avLst/>
+          </a:prstGeom>
+          <a:noFill/>
+        </p:spPr>
+        <p:txBody>
+          <a:bodyPr wrap="square">
+            <a:spAutoFit/>
+          </a:bodyPr>
+          <a:lstStyle/>
+          <a:p>
+            <a:pPr algn="r"/>
+            <a:r>
+              <a:rPr sz="900" b="0" i="0">
+                <a:solidFill>
+                  <a:srgbClr val="66707A"/>
+                </a:solidFill>
+              </a:rPr>
+              <a:t>Düzce Üniversitesi · 2025-2026</a:t>
+            </a:r>
+          </a:p>
+        </p:txBody>
+      </p:sp>
+    </p:spTree>
+  </p:cSld>
+  <p:clrMapOvr>
+    <a:masterClrMapping/>
+  </p:clrMapOvr>
+</p:sld>
+</file>
+
+<file path=ppt/slides/slide6.xml><?xml version="1.0" encoding="utf-8"?>
+<p:sld xmlns:a="http://schemas.openxmlformats.org/drawingml/2006/main" xmlns:p="http://schemas.openxmlformats.org/presentationml/2006/main" xmlns:r="http://schemas.openxmlformats.org/officeDocument/2006/relationships">
+  <p:cSld>
+    <p:bg>
+      <p:bgPr>
+        <a:solidFill>
+          <a:srgbClr val="F4F6F8"/>
+        </a:solidFill>
+        <a:effectLst/>
+      </p:bgPr>
+    </p:bg>
+    <p:spTree>
+      <p:nvGrpSpPr>
+        <p:cNvPr id="1" name=""/>
+        <p:cNvGrpSpPr/>
+        <p:nvPr/>
+      </p:nvGrpSpPr>
+      <p:grpSpPr/>
+      <p:sp>
+        <p:nvSpPr>
+          <p:cNvPr id="2" name="Rectangle 1"/>
           <p:cNvSpPr/>
           <p:nvPr/>
         </p:nvSpPr>
         <p:spPr>
           <a:xfrm>
-            <a:off x="2377440" y="1691640"/>
-            <a:ext cx="7406640" cy="0"/>
-          </a:xfrm>
-          <a:prstGeom prst="rect">
-            <a:avLst/>
-          </a:prstGeom>
+            <a:off x="0" y="0"/>
+            <a:ext cx="12188952" cy="1371600"/>
+          </a:xfrm>
+          <a:prstGeom prst="rect">
+            <a:avLst/>
+          </a:prstGeom>
+          <a:solidFill>
+            <a:srgbClr val="0D2B55"/>
+          </a:solidFill>
+          <a:ln>
+            <a:noFill/>
+          </a:ln>
+        </p:spPr>
+        <p:style>
+          <a:lnRef idx="1">
+            <a:schemeClr val="accent1"/>
+          </a:lnRef>
+          <a:fillRef idx="3">
+            <a:schemeClr val="accent1"/>
+          </a:fillRef>
+          <a:effectRef idx="2">
+            <a:schemeClr val="accent1"/>
+          </a:effectRef>
+          <a:fontRef idx="minor">
+            <a:schemeClr val="lt1"/>
+          </a:fontRef>
+        </p:style>
+        <p:txBody>
+          <a:bodyPr rtlCol="0" anchor="ctr"/>
+          <a:lstStyle/>
+          <a:p>
+            <a:pPr algn="ctr"/>
+          </a:p>
+        </p:txBody>
+      </p:sp>
+      <p:sp>
+        <p:nvSpPr>
+          <p:cNvPr id="3" name="Rectangle 2"/>
+          <p:cNvSpPr/>
+          <p:nvPr/>
+        </p:nvSpPr>
+        <p:spPr>
+          <a:xfrm>
+            <a:off x="0" y="1371600"/>
+            <a:ext cx="12188952" cy="54864"/>
+          </a:xfrm>
+          <a:prstGeom prst="rect">
+            <a:avLst/>
+          </a:prstGeom>
+          <a:solidFill>
+            <a:srgbClr val="E0A800"/>
+          </a:solidFill>
+          <a:ln>
+            <a:noFill/>
+          </a:ln>
+        </p:spPr>
+        <p:style>
+          <a:lnRef idx="1">
+            <a:schemeClr val="accent1"/>
+          </a:lnRef>
+          <a:fillRef idx="3">
+            <a:schemeClr val="accent1"/>
+          </a:fillRef>
+          <a:effectRef idx="2">
+            <a:schemeClr val="accent1"/>
+          </a:effectRef>
+          <a:fontRef idx="minor">
+            <a:schemeClr val="lt1"/>
+          </a:fontRef>
+        </p:style>
+        <p:txBody>
+          <a:bodyPr rtlCol="0" anchor="ctr"/>
+          <a:lstStyle/>
+          <a:p>
+            <a:pPr algn="ctr"/>
+          </a:p>
+        </p:txBody>
+      </p:sp>
+      <p:sp>
+        <p:nvSpPr>
+          <p:cNvPr id="4" name="TextBox 3"/>
+          <p:cNvSpPr txBox="1"/>
+          <p:nvPr/>
+        </p:nvSpPr>
+        <p:spPr>
+          <a:xfrm>
+            <a:off x="365760" y="109728"/>
+            <a:ext cx="11430000" cy="320040"/>
+          </a:xfrm>
+          <a:prstGeom prst="rect">
+            <a:avLst/>
+          </a:prstGeom>
+          <a:noFill/>
+        </p:spPr>
+        <p:txBody>
+          <a:bodyPr wrap="square">
+            <a:spAutoFit/>
+          </a:bodyPr>
+          <a:lstStyle/>
+          <a:p>
+            <a:pPr algn="l"/>
+            <a:r>
+              <a:rPr sz="1100" b="1" i="0">
+                <a:solidFill>
+                  <a:srgbClr val="E0A800"/>
+                </a:solidFill>
+              </a:rPr>
+              <a:t>MODELLEME</a:t>
+            </a:r>
+          </a:p>
+        </p:txBody>
+      </p:sp>
+      <p:sp>
+        <p:nvSpPr>
+          <p:cNvPr id="5" name="TextBox 4"/>
+          <p:cNvSpPr txBox="1"/>
+          <p:nvPr/>
+        </p:nvSpPr>
+        <p:spPr>
+          <a:xfrm>
+            <a:off x="365760" y="402336"/>
+            <a:ext cx="11430000" cy="640080"/>
+          </a:xfrm>
+          <a:prstGeom prst="rect">
+            <a:avLst/>
+          </a:prstGeom>
+          <a:noFill/>
+        </p:spPr>
+        <p:txBody>
+          <a:bodyPr wrap="square">
+            <a:spAutoFit/>
+          </a:bodyPr>
+          <a:lstStyle/>
+          <a:p>
+            <a:pPr algn="l"/>
+            <a:r>
+              <a:rPr sz="2400" b="1" i="0">
+                <a:solidFill>
+                  <a:srgbClr val="FFFFFF"/>
+                </a:solidFill>
+              </a:rPr>
+              <a:t>On Bir Sınıflandırma Modeli</a:t>
+            </a:r>
+          </a:p>
+        </p:txBody>
+      </p:sp>
+      <p:sp>
+        <p:nvSpPr>
+          <p:cNvPr id="6" name="TextBox 5"/>
+          <p:cNvSpPr txBox="1"/>
+          <p:nvPr/>
+        </p:nvSpPr>
+        <p:spPr>
+          <a:xfrm>
+            <a:off x="365760" y="987552"/>
+            <a:ext cx="11430000" cy="365760"/>
+          </a:xfrm>
+          <a:prstGeom prst="rect">
+            <a:avLst/>
+          </a:prstGeom>
+          <a:noFill/>
+        </p:spPr>
+        <p:txBody>
+          <a:bodyPr wrap="square">
+            <a:spAutoFit/>
+          </a:bodyPr>
+          <a:lstStyle/>
+          <a:p>
+            <a:pPr algn="l"/>
+            <a:r>
+              <a:rPr sz="1250" b="0" i="0">
+                <a:solidFill>
+                  <a:srgbClr val="AEC6D6"/>
+                </a:solidFill>
+              </a:rPr>
+              <a:t>Ortak 5-katlı çapraz doğrulama protokolü</a:t>
+            </a:r>
+          </a:p>
+        </p:txBody>
+      </p:sp>
+      <p:sp>
+        <p:nvSpPr>
+          <p:cNvPr id="7" name="TextBox 6"/>
+          <p:cNvSpPr txBox="1"/>
+          <p:nvPr/>
+        </p:nvSpPr>
+        <p:spPr>
+          <a:xfrm>
+            <a:off x="365760" y="1508760"/>
+            <a:ext cx="5669280" cy="384048"/>
+          </a:xfrm>
+          <a:prstGeom prst="rect">
+            <a:avLst/>
+          </a:prstGeom>
+          <a:noFill/>
+        </p:spPr>
+        <p:txBody>
+          <a:bodyPr wrap="square">
+            <a:spAutoFit/>
+          </a:bodyPr>
+          <a:lstStyle/>
+          <a:p>
+            <a:pPr algn="l"/>
+            <a:r>
+              <a:rPr sz="1300" b="1" i="0">
+                <a:solidFill>
+                  <a:srgbClr val="0D2B55"/>
+                </a:solidFill>
+              </a:rPr>
+              <a:t>Makine Öğrenmesi (7) — scikit-learn</a:t>
+            </a:r>
+          </a:p>
+        </p:txBody>
+      </p:sp>
+      <p:sp>
+        <p:nvSpPr>
+          <p:cNvPr id="8" name="Rectangle 7"/>
+          <p:cNvSpPr/>
+          <p:nvPr/>
+        </p:nvSpPr>
+        <p:spPr>
+          <a:xfrm>
+            <a:off x="365760" y="1965960"/>
+            <a:ext cx="5669280" cy="512064"/>
+          </a:xfrm>
+          <a:prstGeom prst="rect">
+            <a:avLst/>
+          </a:prstGeom>
+          <a:solidFill>
+            <a:srgbClr val="FFFFFF"/>
+          </a:solidFill>
+          <a:ln w="10160">
+            <a:solidFill>
+              <a:srgbClr val="007A87"/>
+            </a:solidFill>
+          </a:ln>
+        </p:spPr>
+        <p:style>
+          <a:lnRef idx="1">
+            <a:schemeClr val="accent1"/>
+          </a:lnRef>
+          <a:fillRef idx="3">
+            <a:schemeClr val="accent1"/>
+          </a:fillRef>
+          <a:effectRef idx="2">
+            <a:schemeClr val="accent1"/>
+          </a:effectRef>
+          <a:fontRef idx="minor">
+            <a:schemeClr val="lt1"/>
+          </a:fontRef>
+        </p:style>
+        <p:txBody>
+          <a:bodyPr rtlCol="0" anchor="ctr"/>
+          <a:lstStyle/>
+          <a:p>
+            <a:pPr algn="ctr"/>
+          </a:p>
+        </p:txBody>
+      </p:sp>
+      <p:sp>
+        <p:nvSpPr>
+          <p:cNvPr id="9" name="TextBox 8"/>
+          <p:cNvSpPr txBox="1"/>
+          <p:nvPr/>
+        </p:nvSpPr>
+        <p:spPr>
+          <a:xfrm>
+            <a:off x="457200" y="2002536"/>
+            <a:ext cx="2011680" cy="438912"/>
+          </a:xfrm>
+          <a:prstGeom prst="rect">
+            <a:avLst/>
+          </a:prstGeom>
+          <a:noFill/>
+        </p:spPr>
+        <p:txBody>
+          <a:bodyPr wrap="square" anchor="ctr">
+            <a:spAutoFit/>
+          </a:bodyPr>
+          <a:lstStyle/>
+          <a:p>
+            <a:pPr algn="l"/>
+            <a:r>
+              <a:rPr sz="1150" b="1" i="0">
+                <a:solidFill>
+                  <a:srgbClr val="007A87"/>
+                </a:solidFill>
+              </a:rPr>
+              <a:t>LightGBM</a:t>
+            </a:r>
+          </a:p>
+        </p:txBody>
+      </p:sp>
+      <p:sp>
+        <p:nvSpPr>
+          <p:cNvPr id="10" name="TextBox 9"/>
+          <p:cNvSpPr txBox="1"/>
+          <p:nvPr/>
+        </p:nvSpPr>
+        <p:spPr>
+          <a:xfrm>
+            <a:off x="2514600" y="2002536"/>
+            <a:ext cx="3429000" cy="438912"/>
+          </a:xfrm>
+          <a:prstGeom prst="rect">
+            <a:avLst/>
+          </a:prstGeom>
+          <a:noFill/>
+        </p:spPr>
+        <p:txBody>
+          <a:bodyPr wrap="square" anchor="ctr">
+            <a:spAutoFit/>
+          </a:bodyPr>
+          <a:lstStyle/>
+          <a:p>
+            <a:pPr algn="l"/>
+            <a:r>
+              <a:rPr sz="1000" b="0" i="0">
+                <a:solidFill>
+                  <a:srgbClr val="2A2A2A"/>
+                </a:solidFill>
+              </a:rPr>
+              <a:t>n_estimators=300, num_leaves=31, lr=0,05</a:t>
+            </a:r>
+          </a:p>
+        </p:txBody>
+      </p:sp>
+      <p:sp>
+        <p:nvSpPr>
+          <p:cNvPr id="11" name="Rectangle 10"/>
+          <p:cNvSpPr/>
+          <p:nvPr/>
+        </p:nvSpPr>
+        <p:spPr>
+          <a:xfrm>
+            <a:off x="365760" y="2551176"/>
+            <a:ext cx="5669280" cy="512064"/>
+          </a:xfrm>
+          <a:prstGeom prst="rect">
+            <a:avLst/>
+          </a:prstGeom>
+          <a:solidFill>
+            <a:srgbClr val="FFFFFF"/>
+          </a:solidFill>
+          <a:ln w="10160">
+            <a:solidFill>
+              <a:srgbClr val="007A87"/>
+            </a:solidFill>
+          </a:ln>
+        </p:spPr>
+        <p:style>
+          <a:lnRef idx="1">
+            <a:schemeClr val="accent1"/>
+          </a:lnRef>
+          <a:fillRef idx="3">
+            <a:schemeClr val="accent1"/>
+          </a:fillRef>
+          <a:effectRef idx="2">
+            <a:schemeClr val="accent1"/>
+          </a:effectRef>
+          <a:fontRef idx="minor">
+            <a:schemeClr val="lt1"/>
+          </a:fontRef>
+        </p:style>
+        <p:txBody>
+          <a:bodyPr rtlCol="0" anchor="ctr"/>
+          <a:lstStyle/>
+          <a:p>
+            <a:pPr algn="ctr"/>
+          </a:p>
+        </p:txBody>
+      </p:sp>
+      <p:sp>
+        <p:nvSpPr>
+          <p:cNvPr id="12" name="TextBox 11"/>
+          <p:cNvSpPr txBox="1"/>
+          <p:nvPr/>
+        </p:nvSpPr>
+        <p:spPr>
+          <a:xfrm>
+            <a:off x="457200" y="2587752"/>
+            <a:ext cx="2011680" cy="438912"/>
+          </a:xfrm>
+          <a:prstGeom prst="rect">
+            <a:avLst/>
+          </a:prstGeom>
+          <a:noFill/>
+        </p:spPr>
+        <p:txBody>
+          <a:bodyPr wrap="square" anchor="ctr">
+            <a:spAutoFit/>
+          </a:bodyPr>
+          <a:lstStyle/>
+          <a:p>
+            <a:pPr algn="l"/>
+            <a:r>
+              <a:rPr sz="1150" b="1" i="0">
+                <a:solidFill>
+                  <a:srgbClr val="007A87"/>
+                </a:solidFill>
+              </a:rPr>
+              <a:t>XGBoost</a:t>
+            </a:r>
+          </a:p>
+        </p:txBody>
+      </p:sp>
+      <p:sp>
+        <p:nvSpPr>
+          <p:cNvPr id="13" name="TextBox 12"/>
+          <p:cNvSpPr txBox="1"/>
+          <p:nvPr/>
+        </p:nvSpPr>
+        <p:spPr>
+          <a:xfrm>
+            <a:off x="2514600" y="2587752"/>
+            <a:ext cx="3429000" cy="438912"/>
+          </a:xfrm>
+          <a:prstGeom prst="rect">
+            <a:avLst/>
+          </a:prstGeom>
+          <a:noFill/>
+        </p:spPr>
+        <p:txBody>
+          <a:bodyPr wrap="square" anchor="ctr">
+            <a:spAutoFit/>
+          </a:bodyPr>
+          <a:lstStyle/>
+          <a:p>
+            <a:pPr algn="l"/>
+            <a:r>
+              <a:rPr sz="1000" b="0" i="0">
+                <a:solidFill>
+                  <a:srgbClr val="2A2A2A"/>
+                </a:solidFill>
+              </a:rPr>
+              <a:t>n_estimators=240, max_depth=5, lr=0,06</a:t>
+            </a:r>
+          </a:p>
+        </p:txBody>
+      </p:sp>
+      <p:sp>
+        <p:nvSpPr>
+          <p:cNvPr id="14" name="Rectangle 13"/>
+          <p:cNvSpPr/>
+          <p:nvPr/>
+        </p:nvSpPr>
+        <p:spPr>
+          <a:xfrm>
+            <a:off x="365760" y="3136391"/>
+            <a:ext cx="5669280" cy="512064"/>
+          </a:xfrm>
+          <a:prstGeom prst="rect">
+            <a:avLst/>
+          </a:prstGeom>
+          <a:solidFill>
+            <a:srgbClr val="FFFFFF"/>
+          </a:solidFill>
+          <a:ln w="10160">
+            <a:solidFill>
+              <a:srgbClr val="007A87"/>
+            </a:solidFill>
+          </a:ln>
+        </p:spPr>
+        <p:style>
+          <a:lnRef idx="1">
+            <a:schemeClr val="accent1"/>
+          </a:lnRef>
+          <a:fillRef idx="3">
+            <a:schemeClr val="accent1"/>
+          </a:fillRef>
+          <a:effectRef idx="2">
+            <a:schemeClr val="accent1"/>
+          </a:effectRef>
+          <a:fontRef idx="minor">
+            <a:schemeClr val="lt1"/>
+          </a:fontRef>
+        </p:style>
+        <p:txBody>
+          <a:bodyPr rtlCol="0" anchor="ctr"/>
+          <a:lstStyle/>
+          <a:p>
+            <a:pPr algn="ctr"/>
+          </a:p>
+        </p:txBody>
+      </p:sp>
+      <p:sp>
+        <p:nvSpPr>
+          <p:cNvPr id="15" name="TextBox 14"/>
+          <p:cNvSpPr txBox="1"/>
+          <p:nvPr/>
+        </p:nvSpPr>
+        <p:spPr>
+          <a:xfrm>
+            <a:off x="457200" y="3172968"/>
+            <a:ext cx="2011680" cy="438912"/>
+          </a:xfrm>
+          <a:prstGeom prst="rect">
+            <a:avLst/>
+          </a:prstGeom>
+          <a:noFill/>
+        </p:spPr>
+        <p:txBody>
+          <a:bodyPr wrap="square" anchor="ctr">
+            <a:spAutoFit/>
+          </a:bodyPr>
+          <a:lstStyle/>
+          <a:p>
+            <a:pPr algn="l"/>
+            <a:r>
+              <a:rPr sz="1150" b="1" i="0">
+                <a:solidFill>
+                  <a:srgbClr val="007A87"/>
+                </a:solidFill>
+              </a:rPr>
+              <a:t>Gradyan Artırma</a:t>
+            </a:r>
+          </a:p>
+        </p:txBody>
+      </p:sp>
+      <p:sp>
+        <p:nvSpPr>
+          <p:cNvPr id="16" name="TextBox 15"/>
+          <p:cNvSpPr txBox="1"/>
+          <p:nvPr/>
+        </p:nvSpPr>
+        <p:spPr>
+          <a:xfrm>
+            <a:off x="2514600" y="3172968"/>
+            <a:ext cx="3429000" cy="438912"/>
+          </a:xfrm>
+          <a:prstGeom prst="rect">
+            <a:avLst/>
+          </a:prstGeom>
+          <a:noFill/>
+        </p:spPr>
+        <p:txBody>
+          <a:bodyPr wrap="square" anchor="ctr">
+            <a:spAutoFit/>
+          </a:bodyPr>
+          <a:lstStyle/>
+          <a:p>
+            <a:pPr algn="l"/>
+            <a:r>
+              <a:rPr sz="1000" b="0" i="0">
+                <a:solidFill>
+                  <a:srgbClr val="2A2A2A"/>
+                </a:solidFill>
+              </a:rPr>
+              <a:t>n_estimators=180, max_depth=4</a:t>
+            </a:r>
+          </a:p>
+        </p:txBody>
+      </p:sp>
+      <p:sp>
+        <p:nvSpPr>
+          <p:cNvPr id="17" name="Rectangle 16"/>
+          <p:cNvSpPr/>
+          <p:nvPr/>
+        </p:nvSpPr>
+        <p:spPr>
+          <a:xfrm>
+            <a:off x="365760" y="3721608"/>
+            <a:ext cx="5669280" cy="512064"/>
+          </a:xfrm>
+          <a:prstGeom prst="rect">
+            <a:avLst/>
+          </a:prstGeom>
+          <a:solidFill>
+            <a:srgbClr val="FFFFFF"/>
+          </a:solidFill>
+          <a:ln w="10160">
+            <a:solidFill>
+              <a:srgbClr val="007A87"/>
+            </a:solidFill>
+          </a:ln>
+        </p:spPr>
+        <p:style>
+          <a:lnRef idx="1">
+            <a:schemeClr val="accent1"/>
+          </a:lnRef>
+          <a:fillRef idx="3">
+            <a:schemeClr val="accent1"/>
+          </a:fillRef>
+          <a:effectRef idx="2">
+            <a:schemeClr val="accent1"/>
+          </a:effectRef>
+          <a:fontRef idx="minor">
+            <a:schemeClr val="lt1"/>
+          </a:fontRef>
+        </p:style>
+        <p:txBody>
+          <a:bodyPr rtlCol="0" anchor="ctr"/>
+          <a:lstStyle/>
+          <a:p>
+            <a:pPr algn="ctr"/>
+          </a:p>
+        </p:txBody>
+      </p:sp>
+      <p:sp>
+        <p:nvSpPr>
+          <p:cNvPr id="18" name="TextBox 17"/>
+          <p:cNvSpPr txBox="1"/>
+          <p:nvPr/>
+        </p:nvSpPr>
+        <p:spPr>
+          <a:xfrm>
+            <a:off x="457200" y="3758184"/>
+            <a:ext cx="2011680" cy="438912"/>
+          </a:xfrm>
+          <a:prstGeom prst="rect">
+            <a:avLst/>
+          </a:prstGeom>
+          <a:noFill/>
+        </p:spPr>
+        <p:txBody>
+          <a:bodyPr wrap="square" anchor="ctr">
+            <a:spAutoFit/>
+          </a:bodyPr>
+          <a:lstStyle/>
+          <a:p>
+            <a:pPr algn="l"/>
+            <a:r>
+              <a:rPr sz="1150" b="1" i="0">
+                <a:solidFill>
+                  <a:srgbClr val="007A87"/>
+                </a:solidFill>
+              </a:rPr>
+              <a:t>Rastgele Orman</a:t>
+            </a:r>
+          </a:p>
+        </p:txBody>
+      </p:sp>
+      <p:sp>
+        <p:nvSpPr>
+          <p:cNvPr id="19" name="TextBox 18"/>
+          <p:cNvSpPr txBox="1"/>
+          <p:nvPr/>
+        </p:nvSpPr>
+        <p:spPr>
+          <a:xfrm>
+            <a:off x="2514600" y="3758184"/>
+            <a:ext cx="3429000" cy="438912"/>
+          </a:xfrm>
+          <a:prstGeom prst="rect">
+            <a:avLst/>
+          </a:prstGeom>
+          <a:noFill/>
+        </p:spPr>
+        <p:txBody>
+          <a:bodyPr wrap="square" anchor="ctr">
+            <a:spAutoFit/>
+          </a:bodyPr>
+          <a:lstStyle/>
+          <a:p>
+            <a:pPr algn="l"/>
+            <a:r>
+              <a:rPr sz="1000" b="0" i="0">
+                <a:solidFill>
+                  <a:srgbClr val="2A2A2A"/>
+                </a:solidFill>
+              </a:rPr>
+              <a:t>n_estimators=500, max_features=log2</a:t>
+            </a:r>
+          </a:p>
+        </p:txBody>
+      </p:sp>
+      <p:sp>
+        <p:nvSpPr>
+          <p:cNvPr id="20" name="Rectangle 19"/>
+          <p:cNvSpPr/>
+          <p:nvPr/>
+        </p:nvSpPr>
+        <p:spPr>
+          <a:xfrm>
+            <a:off x="365760" y="4306824"/>
+            <a:ext cx="5669280" cy="512064"/>
+          </a:xfrm>
+          <a:prstGeom prst="rect">
+            <a:avLst/>
+          </a:prstGeom>
+          <a:solidFill>
+            <a:srgbClr val="FFFFFF"/>
+          </a:solidFill>
+          <a:ln w="10160">
+            <a:solidFill>
+              <a:srgbClr val="007A87"/>
+            </a:solidFill>
+          </a:ln>
+        </p:spPr>
+        <p:style>
+          <a:lnRef idx="1">
+            <a:schemeClr val="accent1"/>
+          </a:lnRef>
+          <a:fillRef idx="3">
+            <a:schemeClr val="accent1"/>
+          </a:fillRef>
+          <a:effectRef idx="2">
+            <a:schemeClr val="accent1"/>
+          </a:effectRef>
+          <a:fontRef idx="minor">
+            <a:schemeClr val="lt1"/>
+          </a:fontRef>
+        </p:style>
+        <p:txBody>
+          <a:bodyPr rtlCol="0" anchor="ctr"/>
+          <a:lstStyle/>
+          <a:p>
+            <a:pPr algn="ctr"/>
+          </a:p>
+        </p:txBody>
+      </p:sp>
+      <p:sp>
+        <p:nvSpPr>
+          <p:cNvPr id="21" name="TextBox 20"/>
+          <p:cNvSpPr txBox="1"/>
+          <p:nvPr/>
+        </p:nvSpPr>
+        <p:spPr>
+          <a:xfrm>
+            <a:off x="457200" y="4343400"/>
+            <a:ext cx="2011680" cy="438912"/>
+          </a:xfrm>
+          <a:prstGeom prst="rect">
+            <a:avLst/>
+          </a:prstGeom>
+          <a:noFill/>
+        </p:spPr>
+        <p:txBody>
+          <a:bodyPr wrap="square" anchor="ctr">
+            <a:spAutoFit/>
+          </a:bodyPr>
+          <a:lstStyle/>
+          <a:p>
+            <a:pPr algn="l"/>
+            <a:r>
+              <a:rPr sz="1150" b="1" i="0">
+                <a:solidFill>
+                  <a:srgbClr val="007A87"/>
+                </a:solidFill>
+              </a:rPr>
+              <a:t>SVM-RBF</a:t>
+            </a:r>
+          </a:p>
+        </p:txBody>
+      </p:sp>
+      <p:sp>
+        <p:nvSpPr>
+          <p:cNvPr id="22" name="TextBox 21"/>
+          <p:cNvSpPr txBox="1"/>
+          <p:nvPr/>
+        </p:nvSpPr>
+        <p:spPr>
+          <a:xfrm>
+            <a:off x="2514600" y="4343400"/>
+            <a:ext cx="3429000" cy="438912"/>
+          </a:xfrm>
+          <a:prstGeom prst="rect">
+            <a:avLst/>
+          </a:prstGeom>
+          <a:noFill/>
+        </p:spPr>
+        <p:txBody>
+          <a:bodyPr wrap="square" anchor="ctr">
+            <a:spAutoFit/>
+          </a:bodyPr>
+          <a:lstStyle/>
+          <a:p>
+            <a:pPr algn="l"/>
+            <a:r>
+              <a:rPr sz="1000" b="0" i="0">
+                <a:solidFill>
+                  <a:srgbClr val="2A2A2A"/>
+                </a:solidFill>
+              </a:rPr>
+              <a:t>C=10, gamma=0,05, balanced</a:t>
+            </a:r>
+          </a:p>
+        </p:txBody>
+      </p:sp>
+      <p:sp>
+        <p:nvSpPr>
+          <p:cNvPr id="23" name="Rectangle 22"/>
+          <p:cNvSpPr/>
+          <p:nvPr/>
+        </p:nvSpPr>
+        <p:spPr>
+          <a:xfrm>
+            <a:off x="365760" y="4892040"/>
+            <a:ext cx="5669280" cy="512064"/>
+          </a:xfrm>
+          <a:prstGeom prst="rect">
+            <a:avLst/>
+          </a:prstGeom>
+          <a:solidFill>
+            <a:srgbClr val="FFFFFF"/>
+          </a:solidFill>
+          <a:ln w="10160">
+            <a:solidFill>
+              <a:srgbClr val="007A87"/>
+            </a:solidFill>
+          </a:ln>
+        </p:spPr>
+        <p:style>
+          <a:lnRef idx="1">
+            <a:schemeClr val="accent1"/>
+          </a:lnRef>
+          <a:fillRef idx="3">
+            <a:schemeClr val="accent1"/>
+          </a:fillRef>
+          <a:effectRef idx="2">
+            <a:schemeClr val="accent1"/>
+          </a:effectRef>
+          <a:fontRef idx="minor">
+            <a:schemeClr val="lt1"/>
+          </a:fontRef>
+        </p:style>
+        <p:txBody>
+          <a:bodyPr rtlCol="0" anchor="ctr"/>
+          <a:lstStyle/>
+          <a:p>
+            <a:pPr algn="ctr"/>
+          </a:p>
+        </p:txBody>
+      </p:sp>
+      <p:sp>
+        <p:nvSpPr>
+          <p:cNvPr id="24" name="TextBox 23"/>
+          <p:cNvSpPr txBox="1"/>
+          <p:nvPr/>
+        </p:nvSpPr>
+        <p:spPr>
+          <a:xfrm>
+            <a:off x="457200" y="4928616"/>
+            <a:ext cx="2011680" cy="438912"/>
+          </a:xfrm>
+          <a:prstGeom prst="rect">
+            <a:avLst/>
+          </a:prstGeom>
+          <a:noFill/>
+        </p:spPr>
+        <p:txBody>
+          <a:bodyPr wrap="square" anchor="ctr">
+            <a:spAutoFit/>
+          </a:bodyPr>
+          <a:lstStyle/>
+          <a:p>
+            <a:pPr algn="l"/>
+            <a:r>
+              <a:rPr sz="1150" b="1" i="0">
+                <a:solidFill>
+                  <a:srgbClr val="007A87"/>
+                </a:solidFill>
+              </a:rPr>
+              <a:t>ÇKA Sinir Ağı</a:t>
+            </a:r>
+          </a:p>
+        </p:txBody>
+      </p:sp>
+      <p:sp>
+        <p:nvSpPr>
+          <p:cNvPr id="25" name="TextBox 24"/>
+          <p:cNvSpPr txBox="1"/>
+          <p:nvPr/>
+        </p:nvSpPr>
+        <p:spPr>
+          <a:xfrm>
+            <a:off x="2514600" y="4928616"/>
+            <a:ext cx="3429000" cy="438912"/>
+          </a:xfrm>
+          <a:prstGeom prst="rect">
+            <a:avLst/>
+          </a:prstGeom>
+          <a:noFill/>
+        </p:spPr>
+        <p:txBody>
+          <a:bodyPr wrap="square" anchor="ctr">
+            <a:spAutoFit/>
+          </a:bodyPr>
+          <a:lstStyle/>
+          <a:p>
+            <a:pPr algn="l"/>
+            <a:r>
+              <a:rPr sz="1000" b="0" i="0">
+                <a:solidFill>
+                  <a:srgbClr val="2A2A2A"/>
+                </a:solidFill>
+              </a:rPr>
+              <a:t>192-96-32, alpha=0,001</a:t>
+            </a:r>
+          </a:p>
+        </p:txBody>
+      </p:sp>
+      <p:sp>
+        <p:nvSpPr>
+          <p:cNvPr id="26" name="Rectangle 25"/>
+          <p:cNvSpPr/>
+          <p:nvPr/>
+        </p:nvSpPr>
+        <p:spPr>
+          <a:xfrm>
+            <a:off x="365760" y="5477256"/>
+            <a:ext cx="5669280" cy="512064"/>
+          </a:xfrm>
+          <a:prstGeom prst="rect">
+            <a:avLst/>
+          </a:prstGeom>
+          <a:solidFill>
+            <a:srgbClr val="FFFFFF"/>
+          </a:solidFill>
+          <a:ln w="10160">
+            <a:solidFill>
+              <a:srgbClr val="007A87"/>
+            </a:solidFill>
+          </a:ln>
+        </p:spPr>
+        <p:style>
+          <a:lnRef idx="1">
+            <a:schemeClr val="accent1"/>
+          </a:lnRef>
+          <a:fillRef idx="3">
+            <a:schemeClr val="accent1"/>
+          </a:fillRef>
+          <a:effectRef idx="2">
+            <a:schemeClr val="accent1"/>
+          </a:effectRef>
+          <a:fontRef idx="minor">
+            <a:schemeClr val="lt1"/>
+          </a:fontRef>
+        </p:style>
+        <p:txBody>
+          <a:bodyPr rtlCol="0" anchor="ctr"/>
+          <a:lstStyle/>
+          <a:p>
+            <a:pPr algn="ctr"/>
+          </a:p>
+        </p:txBody>
+      </p:sp>
+      <p:sp>
+        <p:nvSpPr>
+          <p:cNvPr id="27" name="TextBox 26"/>
+          <p:cNvSpPr txBox="1"/>
+          <p:nvPr/>
+        </p:nvSpPr>
+        <p:spPr>
+          <a:xfrm>
+            <a:off x="457200" y="5513832"/>
+            <a:ext cx="2011680" cy="438912"/>
+          </a:xfrm>
+          <a:prstGeom prst="rect">
+            <a:avLst/>
+          </a:prstGeom>
+          <a:noFill/>
+        </p:spPr>
+        <p:txBody>
+          <a:bodyPr wrap="square" anchor="ctr">
+            <a:spAutoFit/>
+          </a:bodyPr>
+          <a:lstStyle/>
+          <a:p>
+            <a:pPr algn="l"/>
+            <a:r>
+              <a:rPr sz="1150" b="1" i="0">
+                <a:solidFill>
+                  <a:srgbClr val="007A87"/>
+                </a:solidFill>
+              </a:rPr>
+              <a:t>Lojistik Regresyon</a:t>
+            </a:r>
+          </a:p>
+        </p:txBody>
+      </p:sp>
+      <p:sp>
+        <p:nvSpPr>
+          <p:cNvPr id="28" name="TextBox 27"/>
+          <p:cNvSpPr txBox="1"/>
+          <p:nvPr/>
+        </p:nvSpPr>
+        <p:spPr>
+          <a:xfrm>
+            <a:off x="2514600" y="5513832"/>
+            <a:ext cx="3429000" cy="438912"/>
+          </a:xfrm>
+          <a:prstGeom prst="rect">
+            <a:avLst/>
+          </a:prstGeom>
+          <a:noFill/>
+        </p:spPr>
+        <p:txBody>
+          <a:bodyPr wrap="square" anchor="ctr">
+            <a:spAutoFit/>
+          </a:bodyPr>
+          <a:lstStyle/>
+          <a:p>
+            <a:pPr algn="l"/>
+            <a:r>
+              <a:rPr sz="1000" b="0" i="0">
+                <a:solidFill>
+                  <a:srgbClr val="2A2A2A"/>
+                </a:solidFill>
+              </a:rPr>
+              <a:t>C=2,0, max_iter=2500</a:t>
+            </a:r>
+          </a:p>
+        </p:txBody>
+      </p:sp>
+      <p:sp>
+        <p:nvSpPr>
+          <p:cNvPr id="29" name="TextBox 28"/>
+          <p:cNvSpPr txBox="1"/>
+          <p:nvPr/>
+        </p:nvSpPr>
+        <p:spPr>
+          <a:xfrm>
+            <a:off x="6263640" y="1508760"/>
+            <a:ext cx="5486400" cy="384048"/>
+          </a:xfrm>
+          <a:prstGeom prst="rect">
+            <a:avLst/>
+          </a:prstGeom>
+          <a:noFill/>
+        </p:spPr>
+        <p:txBody>
+          <a:bodyPr wrap="square">
+            <a:spAutoFit/>
+          </a:bodyPr>
+          <a:lstStyle/>
+          <a:p>
+            <a:pPr algn="l"/>
+            <a:r>
+              <a:rPr sz="1300" b="1" i="0">
+                <a:solidFill>
+                  <a:srgbClr val="0D2B55"/>
+                </a:solidFill>
+              </a:rPr>
+              <a:t>Derin Öğrenme (4) — PyTorch / Adam</a:t>
+            </a:r>
+          </a:p>
+        </p:txBody>
+      </p:sp>
+      <p:sp>
+        <p:nvSpPr>
+          <p:cNvPr id="30" name="Rectangle 29"/>
+          <p:cNvSpPr/>
+          <p:nvPr/>
+        </p:nvSpPr>
+        <p:spPr>
+          <a:xfrm>
+            <a:off x="6263640" y="1965960"/>
+            <a:ext cx="5486400" cy="512064"/>
+          </a:xfrm>
+          <a:prstGeom prst="rect">
+            <a:avLst/>
+          </a:prstGeom>
+          <a:solidFill>
+            <a:srgbClr val="FFFFFF"/>
+          </a:solidFill>
+          <a:ln w="10160">
+            <a:solidFill>
+              <a:srgbClr val="E0A800"/>
+            </a:solidFill>
+          </a:ln>
+        </p:spPr>
+        <p:style>
+          <a:lnRef idx="1">
+            <a:schemeClr val="accent1"/>
+          </a:lnRef>
+          <a:fillRef idx="3">
+            <a:schemeClr val="accent1"/>
+          </a:fillRef>
+          <a:effectRef idx="2">
+            <a:schemeClr val="accent1"/>
+          </a:effectRef>
+          <a:fontRef idx="minor">
+            <a:schemeClr val="lt1"/>
+          </a:fontRef>
+        </p:style>
+        <p:txBody>
+          <a:bodyPr rtlCol="0" anchor="ctr"/>
+          <a:lstStyle/>
+          <a:p>
+            <a:pPr algn="ctr"/>
+          </a:p>
+        </p:txBody>
+      </p:sp>
+      <p:sp>
+        <p:nvSpPr>
+          <p:cNvPr id="31" name="TextBox 30"/>
+          <p:cNvSpPr txBox="1"/>
+          <p:nvPr/>
+        </p:nvSpPr>
+        <p:spPr>
+          <a:xfrm>
+            <a:off x="6355080" y="2002536"/>
+            <a:ext cx="2011680" cy="438912"/>
+          </a:xfrm>
+          <a:prstGeom prst="rect">
+            <a:avLst/>
+          </a:prstGeom>
+          <a:noFill/>
+        </p:spPr>
+        <p:txBody>
+          <a:bodyPr wrap="square" anchor="ctr">
+            <a:spAutoFit/>
+          </a:bodyPr>
+          <a:lstStyle/>
+          <a:p>
+            <a:pPr algn="l"/>
+            <a:r>
+              <a:rPr sz="1150" b="1" i="0">
+                <a:solidFill>
+                  <a:srgbClr val="9A7300"/>
+                </a:solidFill>
+              </a:rPr>
+              <a:t>Derin ÇKA</a:t>
+            </a:r>
+          </a:p>
+        </p:txBody>
+      </p:sp>
+      <p:sp>
+        <p:nvSpPr>
+          <p:cNvPr id="32" name="TextBox 31"/>
+          <p:cNvSpPr txBox="1"/>
+          <p:nvPr/>
+        </p:nvSpPr>
+        <p:spPr>
+          <a:xfrm>
+            <a:off x="8412480" y="2002536"/>
+            <a:ext cx="3246120" cy="438912"/>
+          </a:xfrm>
+          <a:prstGeom prst="rect">
+            <a:avLst/>
+          </a:prstGeom>
+          <a:noFill/>
+        </p:spPr>
+        <p:txBody>
+          <a:bodyPr wrap="square" anchor="ctr">
+            <a:spAutoFit/>
+          </a:bodyPr>
+          <a:lstStyle/>
+          <a:p>
+            <a:pPr algn="l"/>
+            <a:r>
+              <a:rPr sz="1000" b="0" i="0">
+                <a:solidFill>
+                  <a:srgbClr val="2A2A2A"/>
+                </a:solidFill>
+              </a:rPr>
+              <a:t>512-256-128-64, BatchNorm, dropout</a:t>
+            </a:r>
+          </a:p>
+        </p:txBody>
+      </p:sp>
+      <p:sp>
+        <p:nvSpPr>
+          <p:cNvPr id="33" name="Rectangle 32"/>
+          <p:cNvSpPr/>
+          <p:nvPr/>
+        </p:nvSpPr>
+        <p:spPr>
+          <a:xfrm>
+            <a:off x="6263640" y="2551176"/>
+            <a:ext cx="5486400" cy="512064"/>
+          </a:xfrm>
+          <a:prstGeom prst="rect">
+            <a:avLst/>
+          </a:prstGeom>
+          <a:solidFill>
+            <a:srgbClr val="FFFFFF"/>
+          </a:solidFill>
+          <a:ln w="10160">
+            <a:solidFill>
+              <a:srgbClr val="E0A800"/>
+            </a:solidFill>
+          </a:ln>
+        </p:spPr>
+        <p:style>
+          <a:lnRef idx="1">
+            <a:schemeClr val="accent1"/>
+          </a:lnRef>
+          <a:fillRef idx="3">
+            <a:schemeClr val="accent1"/>
+          </a:fillRef>
+          <a:effectRef idx="2">
+            <a:schemeClr val="accent1"/>
+          </a:effectRef>
+          <a:fontRef idx="minor">
+            <a:schemeClr val="lt1"/>
+          </a:fontRef>
+        </p:style>
+        <p:txBody>
+          <a:bodyPr rtlCol="0" anchor="ctr"/>
+          <a:lstStyle/>
+          <a:p>
+            <a:pPr algn="ctr"/>
+          </a:p>
+        </p:txBody>
+      </p:sp>
+      <p:sp>
+        <p:nvSpPr>
+          <p:cNvPr id="34" name="TextBox 33"/>
+          <p:cNvSpPr txBox="1"/>
+          <p:nvPr/>
+        </p:nvSpPr>
+        <p:spPr>
+          <a:xfrm>
+            <a:off x="6355080" y="2587752"/>
+            <a:ext cx="2011680" cy="438912"/>
+          </a:xfrm>
+          <a:prstGeom prst="rect">
+            <a:avLst/>
+          </a:prstGeom>
+          <a:noFill/>
+        </p:spPr>
+        <p:txBody>
+          <a:bodyPr wrap="square" anchor="ctr">
+            <a:spAutoFit/>
+          </a:bodyPr>
+          <a:lstStyle/>
+          <a:p>
+            <a:pPr algn="l"/>
+            <a:r>
+              <a:rPr sz="1150" b="1" i="0">
+                <a:solidFill>
+                  <a:srgbClr val="9A7300"/>
+                </a:solidFill>
+              </a:rPr>
+              <a:t>Artık ÇKA</a:t>
+            </a:r>
+          </a:p>
+        </p:txBody>
+      </p:sp>
+      <p:sp>
+        <p:nvSpPr>
+          <p:cNvPr id="35" name="TextBox 34"/>
+          <p:cNvSpPr txBox="1"/>
+          <p:nvPr/>
+        </p:nvSpPr>
+        <p:spPr>
+          <a:xfrm>
+            <a:off x="8412480" y="2587752"/>
+            <a:ext cx="3246120" cy="438912"/>
+          </a:xfrm>
+          <a:prstGeom prst="rect">
+            <a:avLst/>
+          </a:prstGeom>
+          <a:noFill/>
+        </p:spPr>
+        <p:txBody>
+          <a:bodyPr wrap="square" anchor="ctr">
+            <a:spAutoFit/>
+          </a:bodyPr>
+          <a:lstStyle/>
+          <a:p>
+            <a:pPr algn="l"/>
+            <a:r>
+              <a:rPr sz="1000" b="0" i="0">
+                <a:solidFill>
+                  <a:srgbClr val="2A2A2A"/>
+                </a:solidFill>
+              </a:rPr>
+              <a:t>3 artık blok, 256-256 boyut</a:t>
+            </a:r>
+          </a:p>
+        </p:txBody>
+      </p:sp>
+      <p:sp>
+        <p:nvSpPr>
+          <p:cNvPr id="36" name="Rectangle 35"/>
+          <p:cNvSpPr/>
+          <p:nvPr/>
+        </p:nvSpPr>
+        <p:spPr>
+          <a:xfrm>
+            <a:off x="6263640" y="3136391"/>
+            <a:ext cx="5486400" cy="512064"/>
+          </a:xfrm>
+          <a:prstGeom prst="rect">
+            <a:avLst/>
+          </a:prstGeom>
+          <a:solidFill>
+            <a:srgbClr val="FFFFFF"/>
+          </a:solidFill>
+          <a:ln w="10160">
+            <a:solidFill>
+              <a:srgbClr val="E0A800"/>
+            </a:solidFill>
+          </a:ln>
+        </p:spPr>
+        <p:style>
+          <a:lnRef idx="1">
+            <a:schemeClr val="accent1"/>
+          </a:lnRef>
+          <a:fillRef idx="3">
+            <a:schemeClr val="accent1"/>
+          </a:fillRef>
+          <a:effectRef idx="2">
+            <a:schemeClr val="accent1"/>
+          </a:effectRef>
+          <a:fontRef idx="minor">
+            <a:schemeClr val="lt1"/>
+          </a:fontRef>
+        </p:style>
+        <p:txBody>
+          <a:bodyPr rtlCol="0" anchor="ctr"/>
+          <a:lstStyle/>
+          <a:p>
+            <a:pPr algn="ctr"/>
+          </a:p>
+        </p:txBody>
+      </p:sp>
+      <p:sp>
+        <p:nvSpPr>
+          <p:cNvPr id="37" name="TextBox 36"/>
+          <p:cNvSpPr txBox="1"/>
+          <p:nvPr/>
+        </p:nvSpPr>
+        <p:spPr>
+          <a:xfrm>
+            <a:off x="6355080" y="3172968"/>
+            <a:ext cx="2011680" cy="438912"/>
+          </a:xfrm>
+          <a:prstGeom prst="rect">
+            <a:avLst/>
+          </a:prstGeom>
+          <a:noFill/>
+        </p:spPr>
+        <p:txBody>
+          <a:bodyPr wrap="square" anchor="ctr">
+            <a:spAutoFit/>
+          </a:bodyPr>
+          <a:lstStyle/>
+          <a:p>
+            <a:pPr algn="l"/>
+            <a:r>
+              <a:rPr sz="1150" b="1" i="0">
+                <a:solidFill>
+                  <a:srgbClr val="9A7300"/>
+                </a:solidFill>
+              </a:rPr>
+              <a:t>Dikkat ÇKA</a:t>
+            </a:r>
+          </a:p>
+        </p:txBody>
+      </p:sp>
+      <p:sp>
+        <p:nvSpPr>
+          <p:cNvPr id="38" name="TextBox 37"/>
+          <p:cNvSpPr txBox="1"/>
+          <p:nvPr/>
+        </p:nvSpPr>
+        <p:spPr>
+          <a:xfrm>
+            <a:off x="8412480" y="3172968"/>
+            <a:ext cx="3246120" cy="438912"/>
+          </a:xfrm>
+          <a:prstGeom prst="rect">
+            <a:avLst/>
+          </a:prstGeom>
+          <a:noFill/>
+        </p:spPr>
+        <p:txBody>
+          <a:bodyPr wrap="square" anchor="ctr">
+            <a:spAutoFit/>
+          </a:bodyPr>
+          <a:lstStyle/>
+          <a:p>
+            <a:pPr algn="l"/>
+            <a:r>
+              <a:rPr sz="1000" b="0" i="0">
+                <a:solidFill>
+                  <a:srgbClr val="2A2A2A"/>
+                </a:solidFill>
+              </a:rPr>
+              <a:t>Öz-dikkat mekanizması, 4 baş</a:t>
+            </a:r>
+          </a:p>
+        </p:txBody>
+      </p:sp>
+      <p:sp>
+        <p:nvSpPr>
+          <p:cNvPr id="39" name="Rectangle 38"/>
+          <p:cNvSpPr/>
+          <p:nvPr/>
+        </p:nvSpPr>
+        <p:spPr>
+          <a:xfrm>
+            <a:off x="6263640" y="3721608"/>
+            <a:ext cx="5486400" cy="512064"/>
+          </a:xfrm>
+          <a:prstGeom prst="rect">
+            <a:avLst/>
+          </a:prstGeom>
+          <a:solidFill>
+            <a:srgbClr val="FFFFFF"/>
+          </a:solidFill>
+          <a:ln w="10160">
+            <a:solidFill>
+              <a:srgbClr val="E0A800"/>
+            </a:solidFill>
+          </a:ln>
+        </p:spPr>
+        <p:style>
+          <a:lnRef idx="1">
+            <a:schemeClr val="accent1"/>
+          </a:lnRef>
+          <a:fillRef idx="3">
+            <a:schemeClr val="accent1"/>
+          </a:fillRef>
+          <a:effectRef idx="2">
+            <a:schemeClr val="accent1"/>
+          </a:effectRef>
+          <a:fontRef idx="minor">
+            <a:schemeClr val="lt1"/>
+          </a:fontRef>
+        </p:style>
+        <p:txBody>
+          <a:bodyPr rtlCol="0" anchor="ctr"/>
+          <a:lstStyle/>
+          <a:p>
+            <a:pPr algn="ctr"/>
+          </a:p>
+        </p:txBody>
+      </p:sp>
+      <p:sp>
+        <p:nvSpPr>
+          <p:cNvPr id="40" name="TextBox 39"/>
+          <p:cNvSpPr txBox="1"/>
+          <p:nvPr/>
+        </p:nvSpPr>
+        <p:spPr>
+          <a:xfrm>
+            <a:off x="6355080" y="3758184"/>
+            <a:ext cx="2011680" cy="438912"/>
+          </a:xfrm>
+          <a:prstGeom prst="rect">
+            <a:avLst/>
+          </a:prstGeom>
+          <a:noFill/>
+        </p:spPr>
+        <p:txBody>
+          <a:bodyPr wrap="square" anchor="ctr">
+            <a:spAutoFit/>
+          </a:bodyPr>
+          <a:lstStyle/>
+          <a:p>
+            <a:pPr algn="l"/>
+            <a:r>
+              <a:rPr sz="1150" b="1" i="0">
+                <a:solidFill>
+                  <a:srgbClr val="9A7300"/>
+                </a:solidFill>
+              </a:rPr>
+              <a:t>1B-ESA</a:t>
+            </a:r>
+          </a:p>
+        </p:txBody>
+      </p:sp>
+      <p:sp>
+        <p:nvSpPr>
+          <p:cNvPr id="41" name="TextBox 40"/>
+          <p:cNvSpPr txBox="1"/>
+          <p:nvPr/>
+        </p:nvSpPr>
+        <p:spPr>
+          <a:xfrm>
+            <a:off x="8412480" y="3758184"/>
+            <a:ext cx="3246120" cy="438912"/>
+          </a:xfrm>
+          <a:prstGeom prst="rect">
+            <a:avLst/>
+          </a:prstGeom>
+          <a:noFill/>
+        </p:spPr>
+        <p:txBody>
+          <a:bodyPr wrap="square" anchor="ctr">
+            <a:spAutoFit/>
+          </a:bodyPr>
+          <a:lstStyle/>
+          <a:p>
+            <a:pPr algn="l"/>
+            <a:r>
+              <a:rPr sz="1000" b="0" i="0">
+                <a:solidFill>
+                  <a:srgbClr val="2A2A2A"/>
+                </a:solidFill>
+              </a:rPr>
+              <a:t>Conv1D + max-pooling katmanları</a:t>
+            </a:r>
+          </a:p>
+        </p:txBody>
+      </p:sp>
+      <p:sp>
+        <p:nvSpPr>
+          <p:cNvPr id="42" name="Rectangle 41"/>
+          <p:cNvSpPr/>
+          <p:nvPr/>
+        </p:nvSpPr>
+        <p:spPr>
+          <a:xfrm>
+            <a:off x="6263640" y="4434840"/>
+            <a:ext cx="5486400" cy="1600200"/>
+          </a:xfrm>
+          <a:prstGeom prst="rect">
+            <a:avLst/>
+          </a:prstGeom>
+          <a:solidFill>
+            <a:srgbClr val="E8ECF0"/>
+          </a:solidFill>
+          <a:ln>
+            <a:noFill/>
+          </a:ln>
+        </p:spPr>
+        <p:style>
+          <a:lnRef idx="1">
+            <a:schemeClr val="accent1"/>
+          </a:lnRef>
+          <a:fillRef idx="3">
+            <a:schemeClr val="accent1"/>
+          </a:fillRef>
+          <a:effectRef idx="2">
+            <a:schemeClr val="accent1"/>
+          </a:effectRef>
+          <a:fontRef idx="minor">
+            <a:schemeClr val="lt1"/>
+          </a:fontRef>
+        </p:style>
+        <p:txBody>
+          <a:bodyPr rtlCol="0" anchor="ctr"/>
+          <a:lstStyle/>
+          <a:p>
+            <a:pPr algn="ctr"/>
+          </a:p>
+        </p:txBody>
+      </p:sp>
+      <p:sp>
+        <p:nvSpPr>
+          <p:cNvPr id="43" name="Rectangle 42"/>
+          <p:cNvSpPr/>
+          <p:nvPr/>
+        </p:nvSpPr>
+        <p:spPr>
+          <a:xfrm>
+            <a:off x="6263640" y="4434840"/>
+            <a:ext cx="82296" cy="1600200"/>
+          </a:xfrm>
+          <a:prstGeom prst="rect">
+            <a:avLst/>
+          </a:prstGeom>
+          <a:solidFill>
+            <a:srgbClr val="0D2B55"/>
+          </a:solidFill>
+          <a:ln>
+            <a:noFill/>
+          </a:ln>
+        </p:spPr>
+        <p:style>
+          <a:lnRef idx="1">
+            <a:schemeClr val="accent1"/>
+          </a:lnRef>
+          <a:fillRef idx="3">
+            <a:schemeClr val="accent1"/>
+          </a:fillRef>
+          <a:effectRef idx="2">
+            <a:schemeClr val="accent1"/>
+          </a:effectRef>
+          <a:fontRef idx="minor">
+            <a:schemeClr val="lt1"/>
+          </a:fontRef>
+        </p:style>
+        <p:txBody>
+          <a:bodyPr rtlCol="0" anchor="ctr"/>
+          <a:lstStyle/>
+          <a:p>
+            <a:pPr algn="ctr"/>
+          </a:p>
+        </p:txBody>
+      </p:sp>
+      <p:sp>
+        <p:nvSpPr>
+          <p:cNvPr id="44" name="TextBox 43"/>
+          <p:cNvSpPr txBox="1"/>
+          <p:nvPr/>
+        </p:nvSpPr>
+        <p:spPr>
+          <a:xfrm>
+            <a:off x="6464807" y="4544568"/>
+            <a:ext cx="5166360" cy="365760"/>
+          </a:xfrm>
+          <a:prstGeom prst="rect">
+            <a:avLst/>
+          </a:prstGeom>
+          <a:noFill/>
+        </p:spPr>
+        <p:txBody>
+          <a:bodyPr wrap="square">
+            <a:spAutoFit/>
+          </a:bodyPr>
+          <a:lstStyle/>
+          <a:p>
+            <a:pPr algn="l"/>
+            <a:r>
+              <a:rPr sz="1300" b="1" i="0">
+                <a:solidFill>
+                  <a:srgbClr val="0D2B55"/>
+                </a:solidFill>
+              </a:rPr>
+              <a:t>Eğitim Protokolü</a:t>
+            </a:r>
+          </a:p>
+        </p:txBody>
+      </p:sp>
+      <p:sp>
+        <p:nvSpPr>
+          <p:cNvPr id="45" name="TextBox 44"/>
+          <p:cNvSpPr txBox="1"/>
+          <p:nvPr/>
+        </p:nvSpPr>
+        <p:spPr>
+          <a:xfrm>
+            <a:off x="6464807" y="4937759"/>
+            <a:ext cx="5166360" cy="1005840"/>
+          </a:xfrm>
+          <a:prstGeom prst="rect">
+            <a:avLst/>
+          </a:prstGeom>
+          <a:noFill/>
+        </p:spPr>
+        <p:txBody>
+          <a:bodyPr wrap="square">
+            <a:spAutoFit/>
+          </a:bodyPr>
+          <a:lstStyle/>
+          <a:p>
+            <a:pPr algn="l"/>
+            <a:r>
+              <a:rPr sz="1200" b="0" i="0">
+                <a:solidFill>
+                  <a:srgbClr val="2A2A2A"/>
+                </a:solidFill>
+              </a:rPr>
+              <a:t>•  Stratifiye 5-katlı çapraz doğrulama (sınıf oranı korunur)
+•  StandardScaler her katta yalnız eğitim verisine fit edilir
+•  Veri sızıntısı önlemi: duration_sec ve sample_rate dışlandı
+•  Dengesizlik: class_weight + is_unbalance</a:t>
+            </a:r>
+          </a:p>
+        </p:txBody>
+      </p:sp>
+      <p:sp>
+        <p:nvSpPr>
+          <p:cNvPr id="46" name="TextBox 45"/>
+          <p:cNvSpPr txBox="1"/>
+          <p:nvPr/>
+        </p:nvSpPr>
+        <p:spPr>
+          <a:xfrm>
+            <a:off x="365760" y="6510528"/>
+            <a:ext cx="8229600" cy="301752"/>
+          </a:xfrm>
+          <a:prstGeom prst="rect">
+            <a:avLst/>
+          </a:prstGeom>
+          <a:noFill/>
+        </p:spPr>
+        <p:txBody>
+          <a:bodyPr wrap="square">
+            <a:spAutoFit/>
+          </a:bodyPr>
+          <a:lstStyle/>
+          <a:p>
+            <a:pPr algn="l"/>
+            <a:r>
+              <a:rPr sz="900" b="0" i="0">
+                <a:solidFill>
+                  <a:srgbClr val="66707A"/>
+                </a:solidFill>
+              </a:rPr>
+              <a:t>AURIS  ·  Hasan Arthur Altuntaş  ·  BM498 Mezuniyet Tezi</a:t>
+            </a:r>
+          </a:p>
+        </p:txBody>
+      </p:sp>
+      <p:sp>
+        <p:nvSpPr>
+          <p:cNvPr id="47" name="TextBox 46"/>
+          <p:cNvSpPr txBox="1"/>
+          <p:nvPr/>
+        </p:nvSpPr>
+        <p:spPr>
+          <a:xfrm>
+            <a:off x="8595360" y="6510528"/>
+            <a:ext cx="3200400" cy="301752"/>
+          </a:xfrm>
+          <a:prstGeom prst="rect">
+            <a:avLst/>
+          </a:prstGeom>
+          <a:noFill/>
+        </p:spPr>
+        <p:txBody>
+          <a:bodyPr wrap="square">
+            <a:spAutoFit/>
+          </a:bodyPr>
+          <a:lstStyle/>
+          <a:p>
+            <a:pPr algn="r"/>
+            <a:r>
+              <a:rPr sz="900" b="0" i="0">
+                <a:solidFill>
+                  <a:srgbClr val="66707A"/>
+                </a:solidFill>
+              </a:rPr>
+              <a:t>Düzce Üniversitesi · 2025-2026</a:t>
+            </a:r>
+          </a:p>
+        </p:txBody>
+      </p:sp>
+    </p:spTree>
+  </p:cSld>
+  <p:clrMapOvr>
+    <a:masterClrMapping/>
+  </p:clrMapOvr>
+</p:sld>
+</file>
+
+<file path=ppt/slides/slide7.xml><?xml version="1.0" encoding="utf-8"?>
+<p:sld xmlns:a="http://schemas.openxmlformats.org/drawingml/2006/main" xmlns:p="http://schemas.openxmlformats.org/presentationml/2006/main" xmlns:r="http://schemas.openxmlformats.org/officeDocument/2006/relationships">
+  <p:cSld>
+    <p:bg>
+      <p:bgPr>
+        <a:solidFill>
+          <a:srgbClr val="F4F6F8"/>
+        </a:solidFill>
+        <a:effectLst/>
+      </p:bgPr>
+    </p:bg>
+    <p:spTree>
+      <p:nvGrpSpPr>
+        <p:cNvPr id="1" name=""/>
+        <p:cNvGrpSpPr/>
+        <p:nvPr/>
+      </p:nvGrpSpPr>
+      <p:grpSpPr/>
+      <p:sp>
+        <p:nvSpPr>
+          <p:cNvPr id="2" name="Rectangle 1"/>
+          <p:cNvSpPr/>
+          <p:nvPr/>
+        </p:nvSpPr>
+        <p:spPr>
+          <a:xfrm>
+            <a:off x="0" y="0"/>
+            <a:ext cx="12188952" cy="457200"/>
+          </a:xfrm>
+          <a:prstGeom prst="rect">
+            <a:avLst/>
+          </a:prstGeom>
+          <a:solidFill>
+            <a:srgbClr val="0D2B55"/>
+          </a:solidFill>
+          <a:ln>
+            <a:noFill/>
+          </a:ln>
+        </p:spPr>
+        <p:style>
+          <a:lnRef idx="1">
+            <a:schemeClr val="accent1"/>
+          </a:lnRef>
+          <a:fillRef idx="3">
+            <a:schemeClr val="accent1"/>
+          </a:fillRef>
+          <a:effectRef idx="2">
+            <a:schemeClr val="accent1"/>
+          </a:effectRef>
+          <a:fontRef idx="minor">
+            <a:schemeClr val="lt1"/>
+          </a:fontRef>
+        </p:style>
+        <p:txBody>
+          <a:bodyPr rtlCol="0" anchor="ctr"/>
+          <a:lstStyle/>
+          <a:p>
+            <a:pPr algn="ctr"/>
+          </a:p>
+        </p:txBody>
+      </p:sp>
+      <p:sp>
+        <p:nvSpPr>
+          <p:cNvPr id="3" name="TextBox 2"/>
+          <p:cNvSpPr txBox="1"/>
+          <p:nvPr/>
+        </p:nvSpPr>
+        <p:spPr>
+          <a:xfrm>
+            <a:off x="320040" y="64008"/>
+            <a:ext cx="11521440" cy="347472"/>
+          </a:xfrm>
+          <a:prstGeom prst="rect">
+            <a:avLst/>
+          </a:prstGeom>
+          <a:noFill/>
+        </p:spPr>
+        <p:txBody>
+          <a:bodyPr wrap="square">
+            <a:spAutoFit/>
+          </a:bodyPr>
+          <a:lstStyle/>
+          <a:p>
+            <a:pPr algn="l"/>
+            <a:r>
+              <a:rPr sz="1100" b="0" i="0">
+                <a:solidFill>
+                  <a:srgbClr val="FFFFFF"/>
+                </a:solidFill>
+              </a:rPr>
+              <a:t>BM498 — 03: Tasarım ve Geliştirme Sunumu</a:t>
+            </a:r>
+          </a:p>
+        </p:txBody>
+      </p:sp>
+      <p:sp>
+        <p:nvSpPr>
+          <p:cNvPr id="4" name="Rectangle 3"/>
+          <p:cNvSpPr/>
+          <p:nvPr/>
+        </p:nvSpPr>
+        <p:spPr>
+          <a:xfrm>
+            <a:off x="2286000" y="960120"/>
+            <a:ext cx="7589520" cy="5440680"/>
+          </a:xfrm>
+          <a:prstGeom prst="rect">
+            <a:avLst/>
+          </a:prstGeom>
+          <a:solidFill>
+            <a:srgbClr val="FFFFFF"/>
+          </a:solidFill>
           <a:ln w="19050">
             <a:solidFill>
               <a:srgbClr val="007A87"/>
@@ -5063,13 +11834,89 @@
       </p:sp>
       <p:sp>
         <p:nvSpPr>
+          <p:cNvPr id="5" name="TextBox 4"/>
+          <p:cNvSpPr txBox="1"/>
+          <p:nvPr/>
+        </p:nvSpPr>
+        <p:spPr>
+          <a:xfrm>
+            <a:off x="2377440" y="1078992"/>
+            <a:ext cx="7406640" cy="502920"/>
+          </a:xfrm>
+          <a:prstGeom prst="rect">
+            <a:avLst/>
+          </a:prstGeom>
+          <a:noFill/>
+        </p:spPr>
+        <p:txBody>
+          <a:bodyPr wrap="square">
+            <a:spAutoFit/>
+          </a:bodyPr>
+          <a:lstStyle/>
+          <a:p>
+            <a:pPr algn="ctr"/>
+            <a:r>
+              <a:rPr sz="1700" b="1" i="0">
+                <a:solidFill>
+                  <a:srgbClr val="0D2B55"/>
+                </a:solidFill>
+              </a:rPr>
+              <a:t>ÖĞRENCİ İMZA SAYFASI</a:t>
+            </a:r>
+          </a:p>
+        </p:txBody>
+      </p:sp>
+      <p:sp>
+        <p:nvSpPr>
+          <p:cNvPr id="6" name="Rectangle 5"/>
+          <p:cNvSpPr/>
+          <p:nvPr/>
+        </p:nvSpPr>
+        <p:spPr>
+          <a:xfrm>
+            <a:off x="2377440" y="1627632"/>
+            <a:ext cx="7406640" cy="0"/>
+          </a:xfrm>
+          <a:prstGeom prst="rect">
+            <a:avLst/>
+          </a:prstGeom>
+          <a:ln w="19050">
+            <a:solidFill>
+              <a:srgbClr val="007A87"/>
+            </a:solidFill>
+          </a:ln>
+        </p:spPr>
+        <p:style>
+          <a:lnRef idx="1">
+            <a:schemeClr val="accent1"/>
+          </a:lnRef>
+          <a:fillRef idx="3">
+            <a:schemeClr val="accent1"/>
+          </a:fillRef>
+          <a:effectRef idx="2">
+            <a:schemeClr val="accent1"/>
+          </a:effectRef>
+          <a:fontRef idx="minor">
+            <a:schemeClr val="lt1"/>
+          </a:fontRef>
+        </p:style>
+        <p:txBody>
+          <a:bodyPr rtlCol="0" anchor="ctr"/>
+          <a:lstStyle/>
+          <a:p>
+            <a:pPr algn="ctr"/>
+          </a:p>
+        </p:txBody>
+      </p:sp>
+      <p:sp>
+        <p:nvSpPr>
           <p:cNvPr id="7" name="TextBox 6"/>
           <p:cNvSpPr txBox="1"/>
           <p:nvPr/>
         </p:nvSpPr>
         <p:spPr>
           <a:xfrm>
-            <a:off x="2468880" y="1874519"/>
+            <a:off x="2468880" y="1810512"/>
             <a:ext cx="2834640" cy="320040"/>
           </a:xfrm>
           <a:prstGeom prst="rect">
@@ -5085,7 +11932,7 @@
           <a:p>
             <a:pPr algn="l"/>
             <a:r>
-              <a:rPr sz="1200" b="1">
+              <a:rPr sz="1200" b="1" i="0">
                 <a:solidFill>
                   <a:srgbClr val="0D2B55"/>
                 </a:solidFill>
@@ -5103,7 +11950,7 @@
         </p:nvSpPr>
         <p:spPr>
           <a:xfrm>
-            <a:off x="5394960" y="1874519"/>
+            <a:off x="5394960" y="1810512"/>
             <a:ext cx="4297680" cy="320040"/>
           </a:xfrm>
           <a:prstGeom prst="rect">
@@ -5119,9 +11966,9 @@
           <a:p>
             <a:pPr algn="l"/>
             <a:r>
-              <a:rPr sz="1200" b="0">
-                <a:solidFill>
-                  <a:srgbClr val="333333"/>
+              <a:rPr sz="1200" b="0" i="0">
+                <a:solidFill>
+                  <a:srgbClr val="2A2A2A"/>
                 </a:solidFill>
               </a:rPr>
               <a:t>Hasan Arthur Altuntaş</a:t>
@@ -5137,7 +11984,7 @@
         </p:nvSpPr>
         <p:spPr>
           <a:xfrm>
-            <a:off x="5349240" y="2212848"/>
+            <a:off x="5349240" y="2148840"/>
             <a:ext cx="4343400" cy="0"/>
           </a:xfrm>
           <a:prstGeom prst="rect">
@@ -5179,7 +12026,7 @@
         </p:nvSpPr>
         <p:spPr>
           <a:xfrm>
-            <a:off x="2468880" y="2423160"/>
+            <a:off x="2468880" y="2377440"/>
             <a:ext cx="2834640" cy="320040"/>
           </a:xfrm>
           <a:prstGeom prst="rect">
@@ -5195,7 +12042,7 @@
           <a:p>
             <a:pPr algn="l"/>
             <a:r>
-              <a:rPr sz="1200" b="1">
+              <a:rPr sz="1200" b="1" i="0">
                 <a:solidFill>
                   <a:srgbClr val="0D2B55"/>
                 </a:solidFill>
@@ -5213,7 +12060,7 @@
         </p:nvSpPr>
         <p:spPr>
           <a:xfrm>
-            <a:off x="5394960" y="2423160"/>
+            <a:off x="5394960" y="2377440"/>
             <a:ext cx="4297680" cy="320040"/>
           </a:xfrm>
           <a:prstGeom prst="rect">
@@ -5229,9 +12076,9 @@
           <a:p>
             <a:pPr algn="l"/>
             <a:r>
-              <a:rPr sz="1200" b="0">
-                <a:solidFill>
-                  <a:srgbClr val="333333"/>
+              <a:rPr sz="1200" b="0" i="0">
+                <a:solidFill>
+                  <a:srgbClr val="2A2A2A"/>
                 </a:solidFill>
               </a:rPr>
               <a:t/>
@@ -5247,7 +12094,7 @@
         </p:nvSpPr>
         <p:spPr>
           <a:xfrm>
-            <a:off x="5349240" y="2761488"/>
+            <a:off x="5349240" y="2715768"/>
             <a:ext cx="4343400" cy="0"/>
           </a:xfrm>
           <a:prstGeom prst="rect">
@@ -5289,7 +12136,7 @@
         </p:nvSpPr>
         <p:spPr>
           <a:xfrm>
-            <a:off x="2468880" y="2971800"/>
+            <a:off x="2468880" y="2944368"/>
             <a:ext cx="2834640" cy="320040"/>
           </a:xfrm>
           <a:prstGeom prst="rect">
@@ -5305,7 +12152,7 @@
           <a:p>
             <a:pPr algn="l"/>
             <a:r>
-              <a:rPr sz="1200" b="1">
+              <a:rPr sz="1200" b="1" i="0">
                 <a:solidFill>
                   <a:srgbClr val="0D2B55"/>
                 </a:solidFill>
@@ -5323,7 +12170,7 @@
         </p:nvSpPr>
         <p:spPr>
           <a:xfrm>
-            <a:off x="5394960" y="2971800"/>
+            <a:off x="5394960" y="2944368"/>
             <a:ext cx="4297680" cy="320040"/>
           </a:xfrm>
           <a:prstGeom prst="rect">
@@ -5339,9 +12186,9 @@
           <a:p>
             <a:pPr algn="l"/>
             <a:r>
-              <a:rPr sz="1200" b="0">
-                <a:solidFill>
-                  <a:srgbClr val="333333"/>
+              <a:rPr sz="1200" b="0" i="0">
+                <a:solidFill>
+                  <a:srgbClr val="2A2A2A"/>
                 </a:solidFill>
               </a:rPr>
               <a:t>Bilgisayar Mühendisliği</a:t>
@@ -5357,7 +12204,7 @@
         </p:nvSpPr>
         <p:spPr>
           <a:xfrm>
-            <a:off x="5349240" y="3310128"/>
+            <a:off x="5349240" y="3282696"/>
             <a:ext cx="4343400" cy="0"/>
           </a:xfrm>
           <a:prstGeom prst="rect">
@@ -5399,7 +12246,7 @@
         </p:nvSpPr>
         <p:spPr>
           <a:xfrm>
-            <a:off x="2468880" y="3520439"/>
+            <a:off x="2468880" y="3511296"/>
             <a:ext cx="2834640" cy="320040"/>
           </a:xfrm>
           <a:prstGeom prst="rect">
@@ -5415,7 +12262,7 @@
           <a:p>
             <a:pPr algn="l"/>
             <a:r>
-              <a:rPr sz="1200" b="1">
+              <a:rPr sz="1200" b="1" i="0">
                 <a:solidFill>
                   <a:srgbClr val="0D2B55"/>
                 </a:solidFill>
@@ -5433,7 +12280,7 @@
         </p:nvSpPr>
         <p:spPr>
           <a:xfrm>
-            <a:off x="5394960" y="3520439"/>
+            <a:off x="5394960" y="3511296"/>
             <a:ext cx="4297680" cy="320040"/>
           </a:xfrm>
           <a:prstGeom prst="rect">
@@ -5449,9 +12296,9 @@
           <a:p>
             <a:pPr algn="l"/>
             <a:r>
-              <a:rPr sz="1200" b="0">
-                <a:solidFill>
-                  <a:srgbClr val="333333"/>
+              <a:rPr sz="1200" b="0" i="0">
+                <a:solidFill>
+                  <a:srgbClr val="2A2A2A"/>
                 </a:solidFill>
               </a:rPr>
               <a:t/>
@@ -5467,7 +12314,7 @@
         </p:nvSpPr>
         <p:spPr>
           <a:xfrm>
-            <a:off x="5349240" y="3858768"/>
+            <a:off x="5349240" y="3849624"/>
             <a:ext cx="4343400" cy="0"/>
           </a:xfrm>
           <a:prstGeom prst="rect">
@@ -5509,7 +12356,7 @@
         </p:nvSpPr>
         <p:spPr>
           <a:xfrm>
-            <a:off x="2468880" y="4069079"/>
+            <a:off x="2468880" y="4078224"/>
             <a:ext cx="2834640" cy="320040"/>
           </a:xfrm>
           <a:prstGeom prst="rect">
@@ -5525,7 +12372,7 @@
           <a:p>
             <a:pPr algn="l"/>
             <a:r>
-              <a:rPr sz="1200" b="1">
+              <a:rPr sz="1200" b="1" i="0">
                 <a:solidFill>
                   <a:srgbClr val="0D2B55"/>
                 </a:solidFill>
@@ -5543,7 +12390,7 @@
         </p:nvSpPr>
         <p:spPr>
           <a:xfrm>
-            <a:off x="5394960" y="4069079"/>
+            <a:off x="5394960" y="4078224"/>
             <a:ext cx="4297680" cy="320040"/>
           </a:xfrm>
           <a:prstGeom prst="rect">
@@ -5559,9 +12406,9 @@
           <a:p>
             <a:pPr algn="l"/>
             <a:r>
-              <a:rPr sz="1200" b="0">
-                <a:solidFill>
-                  <a:srgbClr val="333333"/>
+              <a:rPr sz="1200" b="0" i="0">
+                <a:solidFill>
+                  <a:srgbClr val="2A2A2A"/>
                 </a:solidFill>
               </a:rPr>
               <a:t/>
@@ -5577,7 +12424,7 @@
         </p:nvSpPr>
         <p:spPr>
           <a:xfrm>
-            <a:off x="5349240" y="4407407"/>
+            <a:off x="5349240" y="4416552"/>
             <a:ext cx="4343400" cy="0"/>
           </a:xfrm>
           <a:prstGeom prst="rect">
@@ -5619,7 +12466,7 @@
         </p:nvSpPr>
         <p:spPr>
           <a:xfrm>
-            <a:off x="2468880" y="4617720"/>
+            <a:off x="2468880" y="4645152"/>
             <a:ext cx="2834640" cy="320040"/>
           </a:xfrm>
           <a:prstGeom prst="rect">
@@ -5635,7 +12482,7 @@
           <a:p>
             <a:pPr algn="l"/>
             <a:r>
-              <a:rPr sz="1200" b="1">
+              <a:rPr sz="1200" b="1" i="0">
                 <a:solidFill>
                   <a:srgbClr val="0D2B55"/>
                 </a:solidFill>
@@ -5653,7 +12500,7 @@
         </p:nvSpPr>
         <p:spPr>
           <a:xfrm>
-            <a:off x="5394960" y="4617720"/>
+            <a:off x="5394960" y="4645152"/>
             <a:ext cx="4297680" cy="320040"/>
           </a:xfrm>
           <a:prstGeom prst="rect">
@@ -5669,9 +12516,9 @@
           <a:p>
             <a:pPr algn="l"/>
             <a:r>
-              <a:rPr sz="1200" b="0">
-                <a:solidFill>
-                  <a:srgbClr val="333333"/>
+              <a:rPr sz="1200" b="0" i="0">
+                <a:solidFill>
+                  <a:srgbClr val="2A2A2A"/>
                 </a:solidFill>
               </a:rPr>
               <a:t>Tasarım ve Geliştirme Sunumu</a:t>
@@ -5687,7 +12534,7 @@
         </p:nvSpPr>
         <p:spPr>
           <a:xfrm>
-            <a:off x="5349240" y="4956048"/>
+            <a:off x="5349240" y="4983480"/>
             <a:ext cx="4343400" cy="0"/>
           </a:xfrm>
           <a:prstGeom prst="rect">
@@ -5729,7 +12576,7 @@
         </p:nvSpPr>
         <p:spPr>
           <a:xfrm>
-            <a:off x="2468880" y="5394960"/>
+            <a:off x="2468880" y="5440680"/>
             <a:ext cx="2926080" cy="347472"/>
           </a:xfrm>
           <a:prstGeom prst="rect">
@@ -5745,7 +12592,7 @@
           <a:p>
             <a:pPr algn="l"/>
             <a:r>
-              <a:rPr sz="1300" b="1">
+              <a:rPr sz="1300" b="1" i="0">
                 <a:solidFill>
                   <a:srgbClr val="0D2B55"/>
                 </a:solidFill>
@@ -5763,7 +12610,7 @@
         </p:nvSpPr>
         <p:spPr>
           <a:xfrm>
-            <a:off x="3246120" y="5742432"/>
+            <a:off x="3246120" y="5788152"/>
             <a:ext cx="6080760" cy="0"/>
           </a:xfrm>
           <a:prstGeom prst="rect">
@@ -5771,7 +12618,7 @@
           </a:prstGeom>
           <a:ln w="19050">
             <a:solidFill>
-              <a:srgbClr val="333333"/>
+              <a:srgbClr val="2A2A2A"/>
             </a:solidFill>
           </a:ln>
         </p:spPr>
@@ -5805,8 +12652,8 @@
         </p:nvSpPr>
         <p:spPr>
           <a:xfrm>
-            <a:off x="3246120" y="5797296"/>
-            <a:ext cx="6080760" cy="292608"/>
+            <a:off x="3246120" y="5843016"/>
+            <a:ext cx="6080760" cy="274320"/>
           </a:xfrm>
           <a:prstGeom prst="rect">
             <a:avLst/>
@@ -5821,9 +12668,9 @@
           <a:p>
             <a:pPr algn="ctr"/>
             <a:r>
-              <a:rPr sz="900" b="0">
-                <a:solidFill>
-                  <a:srgbClr val="888888"/>
+              <a:rPr sz="900" b="0" i="0">
+                <a:solidFill>
+                  <a:srgbClr val="66707A"/>
                 </a:solidFill>
               </a:rPr>
               <a:t>(Öğrenci bu alanı imzalayarak sunumun kendisine ait olduğunu onaylar.)</a:t>

--- a/docs/academic/TeslimEdilecekler/Sunumlar/03_Tasarim_ve_Gelistirme_Sunumu.pptx
+++ b/docs/academic/TeslimEdilecekler/Sunumlar/03_Tasarim_ve_Gelistirme_Sunumu.pptx
@@ -3510,7 +3510,7 @@
         <p:spPr>
           <a:xfrm>
             <a:off x="365760" y="6473952"/>
-            <a:ext cx="7772400" cy="292608"/>
+            <a:ext cx="4206240" cy="292608"/>
           </a:xfrm>
           <a:prstGeom prst="rect">
             <a:avLst/>
@@ -3531,7 +3531,7 @@
                 </a:solidFill>
                 <a:latin typeface="Calibri"/>
               </a:rPr>
-              <a:t>AURIS  ·  Yapay Zekâ Üretimli Müzik Tespiti</a:t>
+              <a:t>AURIS · YZ Üretimli Müzik Tespiti</a:t>
             </a:r>
           </a:p>
         </p:txBody>
@@ -3544,8 +3544,8 @@
         </p:nvSpPr>
         <p:spPr>
           <a:xfrm>
-            <a:off x="5029200" y="6473952"/>
-            <a:ext cx="6793992" cy="292608"/>
+            <a:off x="4663440" y="6473952"/>
+            <a:ext cx="7159752" cy="292608"/>
           </a:xfrm>
           <a:prstGeom prst="rect">
             <a:avLst/>
@@ -4141,7 +4141,7 @@
         <p:spPr>
           <a:xfrm>
             <a:off x="365760" y="6473952"/>
-            <a:ext cx="7772400" cy="292608"/>
+            <a:ext cx="4206240" cy="292608"/>
           </a:xfrm>
           <a:prstGeom prst="rect">
             <a:avLst/>
@@ -4162,7 +4162,7 @@
                 </a:solidFill>
                 <a:latin typeface="Calibri"/>
               </a:rPr>
-              <a:t>AURIS  ·  Yapay Zekâ Üretimli Müzik Tespiti</a:t>
+              <a:t>AURIS · YZ Üretimli Müzik Tespiti</a:t>
             </a:r>
           </a:p>
         </p:txBody>
@@ -4175,8 +4175,8 @@
         </p:nvSpPr>
         <p:spPr>
           <a:xfrm>
-            <a:off x="5029200" y="6473952"/>
-            <a:ext cx="6793992" cy="292608"/>
+            <a:off x="4663440" y="6473952"/>
+            <a:ext cx="7159752" cy="292608"/>
           </a:xfrm>
           <a:prstGeom prst="rect">
             <a:avLst/>
@@ -7367,7 +7367,7 @@
         <p:spPr>
           <a:xfrm>
             <a:off x="365760" y="6473952"/>
-            <a:ext cx="7772400" cy="292608"/>
+            <a:ext cx="4206240" cy="292608"/>
           </a:xfrm>
           <a:prstGeom prst="rect">
             <a:avLst/>
@@ -7388,7 +7388,7 @@
                 </a:solidFill>
                 <a:latin typeface="Calibri"/>
               </a:rPr>
-              <a:t>AURIS  ·  Yapay Zekâ Üretimli Müzik Tespiti</a:t>
+              <a:t>AURIS · YZ Üretimli Müzik Tespiti</a:t>
             </a:r>
           </a:p>
         </p:txBody>
@@ -7401,8 +7401,8 @@
         </p:nvSpPr>
         <p:spPr>
           <a:xfrm>
-            <a:off x="5029200" y="6473952"/>
-            <a:ext cx="6793992" cy="292608"/>
+            <a:off x="4663440" y="6473952"/>
+            <a:ext cx="7159752" cy="292608"/>
           </a:xfrm>
           <a:prstGeom prst="rect">
             <a:avLst/>
@@ -9263,7 +9263,7 @@
         <p:spPr>
           <a:xfrm>
             <a:off x="365760" y="6473952"/>
-            <a:ext cx="7772400" cy="292608"/>
+            <a:ext cx="4206240" cy="292608"/>
           </a:xfrm>
           <a:prstGeom prst="rect">
             <a:avLst/>
@@ -9284,7 +9284,7 @@
                 </a:solidFill>
                 <a:latin typeface="Calibri"/>
               </a:rPr>
-              <a:t>AURIS  ·  Yapay Zekâ Üretimli Müzik Tespiti</a:t>
+              <a:t>AURIS · YZ Üretimli Müzik Tespiti</a:t>
             </a:r>
           </a:p>
         </p:txBody>
@@ -9297,8 +9297,8 @@
         </p:nvSpPr>
         <p:spPr>
           <a:xfrm>
-            <a:off x="5029200" y="6473952"/>
-            <a:ext cx="6793992" cy="292608"/>
+            <a:off x="4663440" y="6473952"/>
+            <a:ext cx="7159752" cy="292608"/>
           </a:xfrm>
           <a:prstGeom prst="rect">
             <a:avLst/>
@@ -9951,7 +9951,7 @@
         <p:spPr>
           <a:xfrm>
             <a:off x="365760" y="6473952"/>
-            <a:ext cx="7772400" cy="292608"/>
+            <a:ext cx="4206240" cy="292608"/>
           </a:xfrm>
           <a:prstGeom prst="rect">
             <a:avLst/>
@@ -9972,7 +9972,7 @@
                 </a:solidFill>
                 <a:latin typeface="Calibri"/>
               </a:rPr>
-              <a:t>AURIS  ·  Yapay Zekâ Üretimli Müzik Tespiti</a:t>
+              <a:t>AURIS · YZ Üretimli Müzik Tespiti</a:t>
             </a:r>
           </a:p>
         </p:txBody>
@@ -9985,8 +9985,8 @@
         </p:nvSpPr>
         <p:spPr>
           <a:xfrm>
-            <a:off x="5029200" y="6473952"/>
-            <a:ext cx="6793992" cy="292608"/>
+            <a:off x="4663440" y="6473952"/>
+            <a:ext cx="7159752" cy="292608"/>
           </a:xfrm>
           <a:prstGeom prst="rect">
             <a:avLst/>
@@ -11896,7 +11896,7 @@
         <p:spPr>
           <a:xfrm>
             <a:off x="365760" y="6473952"/>
-            <a:ext cx="7772400" cy="292608"/>
+            <a:ext cx="4206240" cy="292608"/>
           </a:xfrm>
           <a:prstGeom prst="rect">
             <a:avLst/>
@@ -11917,7 +11917,7 @@
                 </a:solidFill>
                 <a:latin typeface="Calibri"/>
               </a:rPr>
-              <a:t>AURIS  ·  Yapay Zekâ Üretimli Müzik Tespiti</a:t>
+              <a:t>AURIS · YZ Üretimli Müzik Tespiti</a:t>
             </a:r>
           </a:p>
         </p:txBody>
@@ -11930,8 +11930,8 @@
         </p:nvSpPr>
         <p:spPr>
           <a:xfrm>
-            <a:off x="5029200" y="6473952"/>
-            <a:ext cx="6793992" cy="292608"/>
+            <a:off x="4663440" y="6473952"/>
+            <a:ext cx="7159752" cy="292608"/>
           </a:xfrm>
           <a:prstGeom prst="rect">
             <a:avLst/>
